--- a/HW/HW12-Chem/12_chem_computer_technology.pptx
+++ b/HW/HW12-Chem/12_chem_computer_technology.pptx
@@ -3,7 +3,7 @@
 <p:presentation xmlns:a="http://schemas.openxmlformats.org/drawingml/2006/main" xmlns:p="http://schemas.openxmlformats.org/presentationml/2006/main" xmlns:r="http://schemas.openxmlformats.org/officeDocument/2006/relationships" xmlns:p14="http://schemas.microsoft.com/office/powerpoint/2010/main" xmlns:p15="http://schemas.microsoft.com/office/powerpoint/2012/main" xmlns:mc="http://schemas.openxmlformats.org/markup-compatibility/2006">
   <p:sldMasterIdLst>
     <p:sldMasterId id="2147483648" r:id="rId2"/>
-    <p:sldMasterId id="2147483652" r:id="rId3"/>
+    <p:sldMasterId id="2147483653" r:id="rId3"/>
   </p:sldMasterIdLst>
   <p:sldIdLst>
     <p:sldId id="256" r:id="rId4"/>
@@ -16,6 +16,10 @@
     <p:sldId id="263" r:id="rId11"/>
     <p:sldId id="264" r:id="rId12"/>
     <p:sldId id="265" r:id="rId13"/>
+    <p:sldId id="266" r:id="rId14"/>
+    <p:sldId id="267" r:id="rId15"/>
+    <p:sldId id="268" r:id="rId16"/>
+    <p:sldId id="269" r:id="rId17"/>
   </p:sldIdLst>
   <p:sldSz cx="10080625" cy="5670550"/>
   <p:notesSz cx="7559675" cy="10691813"/>
@@ -25,6 +29,710 @@
 <file path=ppt/slideLayouts/slideLayout1.xml><?xml version="1.0" encoding="utf-8"?>
 <p:sldLayout xmlns:a="http://schemas.openxmlformats.org/drawingml/2006/main" xmlns:p="http://schemas.openxmlformats.org/presentationml/2006/main" xmlns:r="http://schemas.openxmlformats.org/officeDocument/2006/relationships" xmlns:p14="http://schemas.microsoft.com/office/powerpoint/2010/main" xmlns:p15="http://schemas.microsoft.com/office/powerpoint/2012/main" xmlns:mc="http://schemas.openxmlformats.org/markup-compatibility/2006" type="title" preserve="1">
   <p:cSld name="Default">
+    <p:spTree>
+      <p:nvGrpSpPr>
+        <p:cNvPr id="1" name=""/>
+        <p:cNvGrpSpPr/>
+        <p:nvPr/>
+      </p:nvGrpSpPr>
+      <p:grpSpPr>
+        <a:xfrm>
+          <a:off x="0" y="0"/>
+          <a:ext cx="0" cy="0"/>
+          <a:chOff x="0" y="0"/>
+          <a:chExt cx="0" cy="0"/>
+        </a:xfrm>
+      </p:grpSpPr>
+      <p:sp>
+        <p:nvSpPr>
+          <p:cNvPr id="2" name="PlaceHolder 1"/>
+          <p:cNvSpPr>
+            <a:spLocks noGrp="1"/>
+          </p:cNvSpPr>
+          <p:nvPr>
+            <p:ph type="title"/>
+          </p:nvPr>
+        </p:nvSpPr>
+        <p:spPr>
+          <a:xfrm>
+            <a:off x="504000" y="363600"/>
+            <a:ext cx="9071280" cy="670680"/>
+          </a:xfrm>
+          <a:prstGeom prst="rect">
+            <a:avLst/>
+          </a:prstGeom>
+          <a:noFill/>
+          <a:ln w="0">
+            <a:noFill/>
+          </a:ln>
+        </p:spPr>
+        <p:txBody>
+          <a:bodyPr lIns="0" tIns="0" rIns="0" bIns="0" anchor="ctr">
+            <a:spAutoFit/>
+          </a:bodyPr>
+          <a:lstStyle>
+            <a:lvl1pPr indent="0" algn="l">
+              <a:buNone/>
+              <a:tabLst>
+                <a:tab pos="0" algn="l"/>
+              </a:tabLst>
+              <a:defRPr lang="sr-Latn-RS" sz="4400" b="0" u="none" strike="noStrike">
+                <a:solidFill>
+                  <a:srgbClr val="000000"/>
+                </a:solidFill>
+                <a:effectLst/>
+                <a:uFillTx/>
+                <a:latin typeface="Arial"/>
+              </a:defRPr>
+            </a:lvl1pPr>
+          </a:lstStyle>
+          <a:p>
+            <a:pPr indent="0" algn="l">
+              <a:buNone/>
+              <a:tabLst>
+                <a:tab pos="0" algn="l"/>
+              </a:tabLst>
+            </a:pPr>
+            <a:r>
+              <a:rPr lang="sr-Latn-RS" sz="4400" b="0" u="none" strike="noStrike">
+                <a:solidFill>
+                  <a:srgbClr val="000000"/>
+                </a:solidFill>
+                <a:effectLst/>
+                <a:uFillTx/>
+                <a:latin typeface="Arial"/>
+              </a:rPr>
+              <a:t>Click to edit the title text format</a:t>
+            </a:r>
+            <a:endParaRPr lang="sr-Latn-RS" sz="4400" b="0" u="none" strike="noStrike">
+              <a:solidFill>
+                <a:srgbClr val="000000"/>
+              </a:solidFill>
+              <a:effectLst/>
+              <a:uFillTx/>
+              <a:latin typeface="Arial"/>
+            </a:endParaRPr>
+          </a:p>
+        </p:txBody>
+      </p:sp>
+      <p:sp>
+        <p:nvSpPr>
+          <p:cNvPr id="3" name="PlaceHolder 2"/>
+          <p:cNvSpPr>
+            <a:spLocks noGrp="1"/>
+          </p:cNvSpPr>
+          <p:nvPr>
+            <p:ph type="ftr" idx="1"/>
+          </p:nvPr>
+        </p:nvSpPr>
+        <p:spPr>
+          <a:xfrm>
+            <a:off x="3447360" y="5165280"/>
+            <a:ext cx="3194640" cy="390240"/>
+          </a:xfrm>
+          <a:prstGeom prst="rect">
+            <a:avLst/>
+          </a:prstGeom>
+          <a:noFill/>
+          <a:ln w="0">
+            <a:noFill/>
+          </a:ln>
+        </p:spPr>
+        <p:txBody>
+          <a:bodyPr lIns="0" tIns="0" rIns="0" bIns="0" anchor="t">
+            <a:noAutofit/>
+          </a:bodyPr>
+          <a:lstStyle>
+            <a:lvl1pPr indent="0" algn="ctr">
+              <a:lnSpc>
+                <a:spcPct val="100000"/>
+              </a:lnSpc>
+              <a:buNone/>
+              <a:tabLst>
+                <a:tab pos="0" algn="l"/>
+              </a:tabLst>
+              <a:defRPr lang="sr-Latn-RS" sz="1400" b="0" u="none" strike="noStrike">
+                <a:solidFill>
+                  <a:srgbClr val="000000"/>
+                </a:solidFill>
+                <a:effectLst/>
+                <a:uFillTx/>
+                <a:latin typeface="Times New Roman"/>
+              </a:defRPr>
+            </a:lvl1pPr>
+          </a:lstStyle>
+          <a:p>
+            <a:pPr indent="0" algn="ctr">
+              <a:lnSpc>
+                <a:spcPct val="100000"/>
+              </a:lnSpc>
+              <a:buNone/>
+              <a:tabLst>
+                <a:tab pos="0" algn="l"/>
+              </a:tabLst>
+            </a:pPr>
+            <a:r>
+              <a:rPr lang="sr-Latn-RS" sz="1400" b="0" u="none" strike="noStrike">
+                <a:solidFill>
+                  <a:srgbClr val="000000"/>
+                </a:solidFill>
+                <a:effectLst/>
+                <a:uFillTx/>
+                <a:latin typeface="Times New Roman"/>
+              </a:rPr>
+              <a:t>&lt;footer&gt;</a:t>
+            </a:r>
+            <a:endParaRPr lang="sr-Latn-RS" sz="1400" b="0" u="none" strike="noStrike">
+              <a:solidFill>
+                <a:srgbClr val="000000"/>
+              </a:solidFill>
+              <a:effectLst/>
+              <a:uFillTx/>
+              <a:latin typeface="Times New Roman"/>
+            </a:endParaRPr>
+          </a:p>
+        </p:txBody>
+      </p:sp>
+      <p:sp>
+        <p:nvSpPr>
+          <p:cNvPr id="4" name="PlaceHolder 3"/>
+          <p:cNvSpPr>
+            <a:spLocks noGrp="1"/>
+          </p:cNvSpPr>
+          <p:nvPr>
+            <p:ph type="sldNum" idx="2"/>
+          </p:nvPr>
+        </p:nvSpPr>
+        <p:spPr>
+          <a:xfrm>
+            <a:off x="7227360" y="5165280"/>
+            <a:ext cx="2347920" cy="390240"/>
+          </a:xfrm>
+          <a:prstGeom prst="rect">
+            <a:avLst/>
+          </a:prstGeom>
+          <a:noFill/>
+          <a:ln w="0">
+            <a:noFill/>
+          </a:ln>
+        </p:spPr>
+        <p:txBody>
+          <a:bodyPr lIns="0" tIns="0" rIns="0" bIns="0" anchor="t">
+            <a:noAutofit/>
+          </a:bodyPr>
+          <a:lstStyle>
+            <a:lvl1pPr indent="0" algn="r">
+              <a:lnSpc>
+                <a:spcPct val="100000"/>
+              </a:lnSpc>
+              <a:buNone/>
+              <a:tabLst>
+                <a:tab pos="0" algn="l"/>
+              </a:tabLst>
+              <a:defRPr lang="sr-Latn-RS" sz="1400" b="0" u="none" strike="noStrike">
+                <a:solidFill>
+                  <a:srgbClr val="000000"/>
+                </a:solidFill>
+                <a:effectLst/>
+                <a:uFillTx/>
+                <a:latin typeface="Times New Roman"/>
+              </a:defRPr>
+            </a:lvl1pPr>
+          </a:lstStyle>
+          <a:p>
+            <a:pPr indent="0" algn="r">
+              <a:lnSpc>
+                <a:spcPct val="100000"/>
+              </a:lnSpc>
+              <a:buNone/>
+              <a:tabLst>
+                <a:tab pos="0" algn="l"/>
+              </a:tabLst>
+            </a:pPr>
+            <a:fld id="{03EBA5EC-3D7C-4435-8094-35956F4D76E1}" type="slidenum">
+              <a:rPr lang="sr-Latn-RS" sz="1400" b="0" u="none" strike="noStrike">
+                <a:solidFill>
+                  <a:srgbClr val="000000"/>
+                </a:solidFill>
+                <a:effectLst/>
+                <a:uFillTx/>
+                <a:latin typeface="Times New Roman"/>
+              </a:rPr>
+              <a:t>&lt;number&gt;</a:t>
+            </a:fld>
+            <a:endParaRPr lang="sr-Latn-RS" sz="1400" b="0" u="none" strike="noStrike">
+              <a:solidFill>
+                <a:srgbClr val="000000"/>
+              </a:solidFill>
+              <a:effectLst/>
+              <a:uFillTx/>
+              <a:latin typeface="Times New Roman"/>
+            </a:endParaRPr>
+          </a:p>
+        </p:txBody>
+      </p:sp>
+      <p:sp>
+        <p:nvSpPr>
+          <p:cNvPr id="5" name="PlaceHolder 4"/>
+          <p:cNvSpPr>
+            <a:spLocks noGrp="1"/>
+          </p:cNvSpPr>
+          <p:nvPr>
+            <p:ph type="dt" idx="3"/>
+          </p:nvPr>
+        </p:nvSpPr>
+        <p:spPr>
+          <a:xfrm>
+            <a:off x="504000" y="5165280"/>
+            <a:ext cx="2347920" cy="390240"/>
+          </a:xfrm>
+          <a:prstGeom prst="rect">
+            <a:avLst/>
+          </a:prstGeom>
+          <a:noFill/>
+          <a:ln w="0">
+            <a:noFill/>
+          </a:ln>
+        </p:spPr>
+        <p:txBody>
+          <a:bodyPr lIns="0" tIns="0" rIns="0" bIns="0" anchor="t">
+            <a:noAutofit/>
+          </a:bodyPr>
+          <a:lstStyle>
+            <a:lvl1pPr indent="0" algn="l">
+              <a:buNone/>
+              <a:defRPr lang="sr-Latn-RS" sz="1400" b="0" u="none" strike="noStrike">
+                <a:solidFill>
+                  <a:srgbClr val="000000"/>
+                </a:solidFill>
+                <a:effectLst/>
+                <a:uFillTx/>
+                <a:latin typeface="Times New Roman"/>
+              </a:defRPr>
+            </a:lvl1pPr>
+          </a:lstStyle>
+          <a:p>
+            <a:pPr indent="0" algn="l">
+              <a:buNone/>
+            </a:pPr>
+            <a:r>
+              <a:rPr lang="sr-Latn-RS" sz="1400" b="0" u="none" strike="noStrike">
+                <a:solidFill>
+                  <a:srgbClr val="000000"/>
+                </a:solidFill>
+                <a:effectLst/>
+                <a:uFillTx/>
+                <a:latin typeface="Times New Roman"/>
+              </a:rPr>
+              <a:t>&lt;date/time&gt;</a:t>
+            </a:r>
+            <a:endParaRPr lang="sr-Latn-RS" sz="1400" b="0" u="none" strike="noStrike">
+              <a:solidFill>
+                <a:srgbClr val="000000"/>
+              </a:solidFill>
+              <a:effectLst/>
+              <a:uFillTx/>
+              <a:latin typeface="Times New Roman"/>
+            </a:endParaRPr>
+          </a:p>
+        </p:txBody>
+      </p:sp>
+      <p:sp>
+        <p:nvSpPr>
+          <p:cNvPr id="6" name="PlaceHolder 5"/>
+          <p:cNvSpPr>
+            <a:spLocks noGrp="1"/>
+          </p:cNvSpPr>
+          <p:nvPr>
+            <p:ph type="body"/>
+          </p:nvPr>
+        </p:nvSpPr>
+        <p:spPr>
+          <a:xfrm>
+            <a:off x="504000" y="1326600"/>
+            <a:ext cx="9072000" cy="3288600"/>
+          </a:xfrm>
+          <a:prstGeom prst="rect">
+            <a:avLst/>
+          </a:prstGeom>
+          <a:noFill/>
+          <a:ln w="0">
+            <a:noFill/>
+          </a:ln>
+        </p:spPr>
+        <p:txBody>
+          <a:bodyPr lIns="0" tIns="0" rIns="0" bIns="0" anchor="t">
+            <a:normAutofit/>
+          </a:bodyPr>
+          <a:lstStyle>
+            <a:lvl1pPr algn="l">
+              <a:spcBef>
+                <a:spcPts val="1417"/>
+              </a:spcBef>
+              <a:buClr>
+                <a:srgbClr val="000000"/>
+              </a:buClr>
+              <a:buSzPct val="45000"/>
+              <a:buFont typeface="Wingdings" charset="2"/>
+              <a:buChar char=""/>
+              <a:defRPr lang="sr-Latn-RS" sz="3200" b="0" u="none" strike="noStrike">
+                <a:solidFill>
+                  <a:srgbClr val="000000"/>
+                </a:solidFill>
+                <a:effectLst/>
+                <a:uFillTx/>
+                <a:latin typeface="Arial"/>
+              </a:defRPr>
+            </a:lvl1pPr>
+            <a:lvl2pPr lvl="1" algn="l">
+              <a:spcBef>
+                <a:spcPts val="1134"/>
+              </a:spcBef>
+              <a:buClr>
+                <a:srgbClr val="000000"/>
+              </a:buClr>
+              <a:buSzPct val="75000"/>
+              <a:buFont typeface="Symbol" charset="2"/>
+              <a:buChar char=""/>
+              <a:defRPr lang="sr-Latn-RS" sz="2800" b="0" u="none" strike="noStrike">
+                <a:solidFill>
+                  <a:srgbClr val="000000"/>
+                </a:solidFill>
+                <a:effectLst/>
+                <a:uFillTx/>
+                <a:latin typeface="Arial"/>
+              </a:defRPr>
+            </a:lvl2pPr>
+            <a:lvl3pPr lvl="2" algn="l">
+              <a:spcBef>
+                <a:spcPts val="850"/>
+              </a:spcBef>
+              <a:buClr>
+                <a:srgbClr val="000000"/>
+              </a:buClr>
+              <a:buSzPct val="45000"/>
+              <a:buFont typeface="Wingdings" charset="2"/>
+              <a:buChar char=""/>
+              <a:defRPr lang="sr-Latn-RS" sz="2400" b="0" u="none" strike="noStrike">
+                <a:solidFill>
+                  <a:srgbClr val="000000"/>
+                </a:solidFill>
+                <a:effectLst/>
+                <a:uFillTx/>
+                <a:latin typeface="Arial"/>
+              </a:defRPr>
+            </a:lvl3pPr>
+            <a:lvl4pPr lvl="3" algn="l">
+              <a:spcBef>
+                <a:spcPts val="567"/>
+              </a:spcBef>
+              <a:buClr>
+                <a:srgbClr val="000000"/>
+              </a:buClr>
+              <a:buSzPct val="75000"/>
+              <a:buFont typeface="Symbol" charset="2"/>
+              <a:buChar char=""/>
+              <a:defRPr lang="sr-Latn-RS" sz="2000" b="0" u="none" strike="noStrike">
+                <a:solidFill>
+                  <a:srgbClr val="000000"/>
+                </a:solidFill>
+                <a:effectLst/>
+                <a:uFillTx/>
+                <a:latin typeface="Arial"/>
+              </a:defRPr>
+            </a:lvl4pPr>
+            <a:lvl5pPr lvl="4" algn="l">
+              <a:spcBef>
+                <a:spcPts val="283"/>
+              </a:spcBef>
+              <a:buClr>
+                <a:srgbClr val="000000"/>
+              </a:buClr>
+              <a:buSzPct val="45000"/>
+              <a:buFont typeface="Wingdings" charset="2"/>
+              <a:buChar char=""/>
+              <a:defRPr lang="sr-Latn-RS" sz="2000" b="0" u="none" strike="noStrike">
+                <a:solidFill>
+                  <a:srgbClr val="000000"/>
+                </a:solidFill>
+                <a:effectLst/>
+                <a:uFillTx/>
+                <a:latin typeface="Arial"/>
+              </a:defRPr>
+            </a:lvl5pPr>
+            <a:lvl6pPr lvl="5" algn="l">
+              <a:spcBef>
+                <a:spcPts val="283"/>
+              </a:spcBef>
+              <a:buClr>
+                <a:srgbClr val="000000"/>
+              </a:buClr>
+              <a:buSzPct val="45000"/>
+              <a:buFont typeface="Wingdings" charset="2"/>
+              <a:buChar char=""/>
+              <a:defRPr lang="sr-Latn-RS" sz="2000" b="0" u="none" strike="noStrike">
+                <a:solidFill>
+                  <a:srgbClr val="000000"/>
+                </a:solidFill>
+                <a:effectLst/>
+                <a:uFillTx/>
+                <a:latin typeface="Arial"/>
+              </a:defRPr>
+            </a:lvl6pPr>
+            <a:lvl7pPr lvl="6" algn="l">
+              <a:spcBef>
+                <a:spcPts val="283"/>
+              </a:spcBef>
+              <a:buClr>
+                <a:srgbClr val="000000"/>
+              </a:buClr>
+              <a:buSzPct val="45000"/>
+              <a:buFont typeface="Wingdings" charset="2"/>
+              <a:buChar char=""/>
+              <a:defRPr lang="sr-Latn-RS" sz="2000" b="0" u="none" strike="noStrike">
+                <a:solidFill>
+                  <a:srgbClr val="000000"/>
+                </a:solidFill>
+                <a:effectLst/>
+                <a:uFillTx/>
+                <a:latin typeface="Arial"/>
+              </a:defRPr>
+            </a:lvl7pPr>
+          </a:lstStyle>
+          <a:p>
+            <a:pPr indent="-324000" algn="l">
+              <a:spcBef>
+                <a:spcPts val="1417"/>
+              </a:spcBef>
+              <a:buClr>
+                <a:srgbClr val="000000"/>
+              </a:buClr>
+              <a:buSzPct val="45000"/>
+              <a:buFont typeface="Wingdings" charset="2"/>
+              <a:buChar char=""/>
+            </a:pPr>
+            <a:r>
+              <a:rPr lang="sr-Latn-RS" sz="3200" b="0" u="none" strike="noStrike">
+                <a:solidFill>
+                  <a:srgbClr val="000000"/>
+                </a:solidFill>
+                <a:effectLst/>
+                <a:uFillTx/>
+                <a:latin typeface="Arial"/>
+              </a:rPr>
+              <a:t>Click to edit the outline text format</a:t>
+            </a:r>
+            <a:endParaRPr lang="sr-Latn-RS" sz="3200" b="0" u="none" strike="noStrike">
+              <a:solidFill>
+                <a:srgbClr val="000000"/>
+              </a:solidFill>
+              <a:effectLst/>
+              <a:uFillTx/>
+              <a:latin typeface="Arial"/>
+            </a:endParaRPr>
+          </a:p>
+          <a:p>
+            <a:pPr marL="864000" lvl="1" indent="-324000" algn="l">
+              <a:spcBef>
+                <a:spcPts val="1134"/>
+              </a:spcBef>
+              <a:buClr>
+                <a:srgbClr val="000000"/>
+              </a:buClr>
+              <a:buSzPct val="75000"/>
+              <a:buFont typeface="Symbol" charset="2"/>
+              <a:buChar char=""/>
+            </a:pPr>
+            <a:r>
+              <a:rPr lang="sr-Latn-RS" sz="2800" b="0" u="none" strike="noStrike">
+                <a:solidFill>
+                  <a:srgbClr val="000000"/>
+                </a:solidFill>
+                <a:effectLst/>
+                <a:uFillTx/>
+                <a:latin typeface="Arial"/>
+              </a:rPr>
+              <a:t>Second Outline Level</a:t>
+            </a:r>
+            <a:endParaRPr lang="sr-Latn-RS" sz="2800" b="0" u="none" strike="noStrike">
+              <a:solidFill>
+                <a:srgbClr val="000000"/>
+              </a:solidFill>
+              <a:effectLst/>
+              <a:uFillTx/>
+              <a:latin typeface="Arial"/>
+            </a:endParaRPr>
+          </a:p>
+          <a:p>
+            <a:pPr marL="1296000" lvl="2" indent="-288000" algn="l">
+              <a:spcBef>
+                <a:spcPts val="850"/>
+              </a:spcBef>
+              <a:buClr>
+                <a:srgbClr val="000000"/>
+              </a:buClr>
+              <a:buSzPct val="45000"/>
+              <a:buFont typeface="Wingdings" charset="2"/>
+              <a:buChar char=""/>
+            </a:pPr>
+            <a:r>
+              <a:rPr lang="sr-Latn-RS" sz="2400" b="0" u="none" strike="noStrike">
+                <a:solidFill>
+                  <a:srgbClr val="000000"/>
+                </a:solidFill>
+                <a:effectLst/>
+                <a:uFillTx/>
+                <a:latin typeface="Arial"/>
+              </a:rPr>
+              <a:t>Third Outline Level</a:t>
+            </a:r>
+            <a:endParaRPr lang="sr-Latn-RS" sz="2400" b="0" u="none" strike="noStrike">
+              <a:solidFill>
+                <a:srgbClr val="000000"/>
+              </a:solidFill>
+              <a:effectLst/>
+              <a:uFillTx/>
+              <a:latin typeface="Arial"/>
+            </a:endParaRPr>
+          </a:p>
+          <a:p>
+            <a:pPr marL="1728000" lvl="3" indent="-216000" algn="l">
+              <a:spcBef>
+                <a:spcPts val="567"/>
+              </a:spcBef>
+              <a:buClr>
+                <a:srgbClr val="000000"/>
+              </a:buClr>
+              <a:buSzPct val="75000"/>
+              <a:buFont typeface="Symbol" charset="2"/>
+              <a:buChar char=""/>
+            </a:pPr>
+            <a:r>
+              <a:rPr lang="sr-Latn-RS" sz="2000" b="0" u="none" strike="noStrike">
+                <a:solidFill>
+                  <a:srgbClr val="000000"/>
+                </a:solidFill>
+                <a:effectLst/>
+                <a:uFillTx/>
+                <a:latin typeface="Arial"/>
+              </a:rPr>
+              <a:t>Fourth Outline Level</a:t>
+            </a:r>
+            <a:endParaRPr lang="sr-Latn-RS" sz="2000" b="0" u="none" strike="noStrike">
+              <a:solidFill>
+                <a:srgbClr val="000000"/>
+              </a:solidFill>
+              <a:effectLst/>
+              <a:uFillTx/>
+              <a:latin typeface="Arial"/>
+            </a:endParaRPr>
+          </a:p>
+          <a:p>
+            <a:pPr marL="2160000" lvl="4" indent="-216000" algn="l">
+              <a:spcBef>
+                <a:spcPts val="283"/>
+              </a:spcBef>
+              <a:buClr>
+                <a:srgbClr val="000000"/>
+              </a:buClr>
+              <a:buSzPct val="45000"/>
+              <a:buFont typeface="Wingdings" charset="2"/>
+              <a:buChar char=""/>
+            </a:pPr>
+            <a:r>
+              <a:rPr lang="sr-Latn-RS" sz="2000" b="0" u="none" strike="noStrike">
+                <a:solidFill>
+                  <a:srgbClr val="000000"/>
+                </a:solidFill>
+                <a:effectLst/>
+                <a:uFillTx/>
+                <a:latin typeface="Arial"/>
+              </a:rPr>
+              <a:t>Fifth Outline Level</a:t>
+            </a:r>
+            <a:endParaRPr lang="sr-Latn-RS" sz="2000" b="0" u="none" strike="noStrike">
+              <a:solidFill>
+                <a:srgbClr val="000000"/>
+              </a:solidFill>
+              <a:effectLst/>
+              <a:uFillTx/>
+              <a:latin typeface="Arial"/>
+            </a:endParaRPr>
+          </a:p>
+          <a:p>
+            <a:pPr marL="2592000" lvl="5" indent="-216000" algn="l">
+              <a:spcBef>
+                <a:spcPts val="283"/>
+              </a:spcBef>
+              <a:buClr>
+                <a:srgbClr val="000000"/>
+              </a:buClr>
+              <a:buSzPct val="45000"/>
+              <a:buFont typeface="Wingdings" charset="2"/>
+              <a:buChar char=""/>
+            </a:pPr>
+            <a:r>
+              <a:rPr lang="sr-Latn-RS" sz="2000" b="0" u="none" strike="noStrike">
+                <a:solidFill>
+                  <a:srgbClr val="000000"/>
+                </a:solidFill>
+                <a:effectLst/>
+                <a:uFillTx/>
+                <a:latin typeface="Arial"/>
+              </a:rPr>
+              <a:t>Sixth Outline Level</a:t>
+            </a:r>
+            <a:endParaRPr lang="sr-Latn-RS" sz="2000" b="0" u="none" strike="noStrike">
+              <a:solidFill>
+                <a:srgbClr val="000000"/>
+              </a:solidFill>
+              <a:effectLst/>
+              <a:uFillTx/>
+              <a:latin typeface="Arial"/>
+            </a:endParaRPr>
+          </a:p>
+          <a:p>
+            <a:pPr marL="3024000" lvl="6" indent="-216000" algn="l">
+              <a:spcBef>
+                <a:spcPts val="283"/>
+              </a:spcBef>
+              <a:buClr>
+                <a:srgbClr val="000000"/>
+              </a:buClr>
+              <a:buSzPct val="45000"/>
+              <a:buFont typeface="Wingdings" charset="2"/>
+              <a:buChar char=""/>
+            </a:pPr>
+            <a:r>
+              <a:rPr lang="sr-Latn-RS" sz="2000" b="0" u="none" strike="noStrike">
+                <a:solidFill>
+                  <a:srgbClr val="000000"/>
+                </a:solidFill>
+                <a:effectLst/>
+                <a:uFillTx/>
+                <a:latin typeface="Arial"/>
+              </a:rPr>
+              <a:t>Seventh Outline Level</a:t>
+            </a:r>
+            <a:endParaRPr lang="sr-Latn-RS" sz="2000" b="0" u="none" strike="noStrike">
+              <a:solidFill>
+                <a:srgbClr val="000000"/>
+              </a:solidFill>
+              <a:effectLst/>
+              <a:uFillTx/>
+              <a:latin typeface="Arial"/>
+            </a:endParaRPr>
+          </a:p>
+        </p:txBody>
+      </p:sp>
+    </p:spTree>
+  </p:cSld>
+</p:sldLayout>
+</file>
+
+<file path=ppt/slideLayouts/slideLayout2.xml><?xml version="1.0" encoding="utf-8"?>
+<p:sldLayout xmlns:a="http://schemas.openxmlformats.org/drawingml/2006/main" xmlns:p="http://schemas.openxmlformats.org/presentationml/2006/main" xmlns:r="http://schemas.openxmlformats.org/officeDocument/2006/relationships" xmlns:p14="http://schemas.microsoft.com/office/powerpoint/2010/main" xmlns:p15="http://schemas.microsoft.com/office/powerpoint/2012/main" xmlns:mc="http://schemas.openxmlformats.org/markup-compatibility/2006" type="tx" preserve="1">
+  <p:cSld name="Default 1">
     <p:spTree>
       <p:nvGrpSpPr>
         <p:cNvPr id="1" name=""/>
@@ -51,8 +759,8 @@
         </p:nvSpPr>
         <p:spPr>
           <a:xfrm>
-            <a:off x="504000" y="226080"/>
-            <a:ext cx="9071640" cy="946440"/>
+            <a:off x="504000" y="363600"/>
+            <a:ext cx="9071280" cy="670680"/>
           </a:xfrm>
           <a:prstGeom prst="rect">
             <a:avLst/>
@@ -66,10 +774,40 @@
           <a:bodyPr lIns="0" tIns="0" rIns="0" bIns="0" anchor="ctr">
             <a:spAutoFit/>
           </a:bodyPr>
-          <a:p>
-            <a:pPr indent="0" algn="ctr">
+          <a:lstStyle>
+            <a:lvl1pPr indent="0" algn="l">
               <a:buNone/>
-            </a:pPr>
+              <a:tabLst>
+                <a:tab pos="0" algn="l"/>
+              </a:tabLst>
+              <a:defRPr lang="sr-Latn-RS" sz="4400" b="0" u="none" strike="noStrike">
+                <a:solidFill>
+                  <a:srgbClr val="000000"/>
+                </a:solidFill>
+                <a:effectLst/>
+                <a:uFillTx/>
+                <a:latin typeface="Arial"/>
+              </a:defRPr>
+            </a:lvl1pPr>
+          </a:lstStyle>
+          <a:p>
+            <a:pPr indent="0" algn="l">
+              <a:buNone/>
+              <a:tabLst>
+                <a:tab pos="0" algn="l"/>
+              </a:tabLst>
+            </a:pPr>
+            <a:r>
+              <a:rPr lang="sr-Latn-RS" sz="4400" b="0" u="none" strike="noStrike">
+                <a:solidFill>
+                  <a:srgbClr val="000000"/>
+                </a:solidFill>
+                <a:effectLst/>
+                <a:uFillTx/>
+                <a:latin typeface="Arial"/>
+              </a:rPr>
+              <a:t>Click to edit the title text format</a:t>
+            </a:r>
             <a:endParaRPr lang="sr-Latn-RS" sz="4400" b="0" u="none" strike="noStrike">
               <a:solidFill>
                 <a:srgbClr val="000000"/>
@@ -88,13 +826,13 @@
             <a:spLocks noGrp="1"/>
           </p:cNvSpPr>
           <p:nvPr>
-            <p:ph type="subTitle"/>
+            <p:ph type="body"/>
           </p:nvPr>
         </p:nvSpPr>
         <p:spPr>
           <a:xfrm>
             <a:off x="504000" y="1326600"/>
-            <a:ext cx="9071640" cy="3288240"/>
+            <a:ext cx="9071280" cy="3287880"/>
           </a:xfrm>
           <a:prstGeom prst="rect">
             <a:avLst/>
@@ -105,13 +843,359 @@
           </a:ln>
         </p:spPr>
         <p:txBody>
-          <a:bodyPr lIns="0" tIns="0" rIns="0" bIns="0" anchor="ctr">
-            <a:spAutoFit/>
+          <a:bodyPr lIns="0" tIns="0" rIns="0" bIns="0" anchor="t">
+            <a:normAutofit fontScale="92500" lnSpcReduction="9999"/>
           </a:bodyPr>
-          <a:p>
-            <a:pPr indent="0" algn="ctr">
-              <a:buNone/>
-            </a:pPr>
+          <a:lstStyle>
+            <a:lvl1pPr algn="l">
+              <a:spcBef>
+                <a:spcPts val="1417"/>
+              </a:spcBef>
+              <a:buClr>
+                <a:srgbClr val="000000"/>
+              </a:buClr>
+              <a:buSzPct val="45000"/>
+              <a:buFont typeface="Wingdings" charset="2"/>
+              <a:buChar char=""/>
+              <a:defRPr lang="sr-Latn-RS" sz="3200" b="0" u="none" strike="noStrike">
+                <a:solidFill>
+                  <a:srgbClr val="000000"/>
+                </a:solidFill>
+                <a:effectLst/>
+                <a:uFillTx/>
+                <a:latin typeface="Arial"/>
+              </a:defRPr>
+            </a:lvl1pPr>
+            <a:lvl2pPr lvl="1" algn="l">
+              <a:spcBef>
+                <a:spcPts val="1134"/>
+              </a:spcBef>
+              <a:buClr>
+                <a:srgbClr val="000000"/>
+              </a:buClr>
+              <a:buSzPct val="75000"/>
+              <a:buFont typeface="Symbol" charset="2"/>
+              <a:buChar char=""/>
+              <a:defRPr lang="sr-Latn-RS" sz="3200" b="0" u="none" strike="noStrike">
+                <a:solidFill>
+                  <a:srgbClr val="000000"/>
+                </a:solidFill>
+                <a:effectLst/>
+                <a:uFillTx/>
+                <a:latin typeface="Arial"/>
+              </a:defRPr>
+            </a:lvl2pPr>
+            <a:lvl3pPr lvl="2" algn="l">
+              <a:spcBef>
+                <a:spcPts val="850"/>
+              </a:spcBef>
+              <a:buClr>
+                <a:srgbClr val="000000"/>
+              </a:buClr>
+              <a:buSzPct val="45000"/>
+              <a:buFont typeface="Wingdings" charset="2"/>
+              <a:buChar char=""/>
+              <a:defRPr lang="sr-Latn-RS" sz="3200" b="0" u="none" strike="noStrike">
+                <a:solidFill>
+                  <a:srgbClr val="000000"/>
+                </a:solidFill>
+                <a:effectLst/>
+                <a:uFillTx/>
+                <a:latin typeface="Arial"/>
+              </a:defRPr>
+            </a:lvl3pPr>
+            <a:lvl4pPr lvl="3" algn="l">
+              <a:spcBef>
+                <a:spcPts val="567"/>
+              </a:spcBef>
+              <a:buClr>
+                <a:srgbClr val="000000"/>
+              </a:buClr>
+              <a:buSzPct val="75000"/>
+              <a:buFont typeface="Symbol" charset="2"/>
+              <a:buChar char=""/>
+              <a:defRPr lang="sr-Latn-RS" sz="3200" b="0" u="none" strike="noStrike">
+                <a:solidFill>
+                  <a:srgbClr val="000000"/>
+                </a:solidFill>
+                <a:effectLst/>
+                <a:uFillTx/>
+                <a:latin typeface="Arial"/>
+              </a:defRPr>
+            </a:lvl4pPr>
+            <a:lvl5pPr lvl="4" algn="l">
+              <a:spcBef>
+                <a:spcPts val="283"/>
+              </a:spcBef>
+              <a:buClr>
+                <a:srgbClr val="000000"/>
+              </a:buClr>
+              <a:buSzPct val="45000"/>
+              <a:buFont typeface="Wingdings" charset="2"/>
+              <a:buChar char=""/>
+              <a:defRPr lang="sr-Latn-RS" sz="3200" b="0" u="none" strike="noStrike">
+                <a:solidFill>
+                  <a:srgbClr val="000000"/>
+                </a:solidFill>
+                <a:effectLst/>
+                <a:uFillTx/>
+                <a:latin typeface="Arial"/>
+              </a:defRPr>
+            </a:lvl5pPr>
+            <a:lvl6pPr lvl="5" algn="l">
+              <a:spcBef>
+                <a:spcPts val="283"/>
+              </a:spcBef>
+              <a:buClr>
+                <a:srgbClr val="000000"/>
+              </a:buClr>
+              <a:buSzPct val="45000"/>
+              <a:buFont typeface="Wingdings" charset="2"/>
+              <a:buChar char=""/>
+              <a:defRPr lang="sr-Latn-RS" sz="3200" b="0" u="none" strike="noStrike">
+                <a:solidFill>
+                  <a:srgbClr val="000000"/>
+                </a:solidFill>
+                <a:effectLst/>
+                <a:uFillTx/>
+                <a:latin typeface="Arial"/>
+              </a:defRPr>
+            </a:lvl6pPr>
+            <a:lvl7pPr lvl="6" algn="l">
+              <a:spcBef>
+                <a:spcPts val="283"/>
+              </a:spcBef>
+              <a:buClr>
+                <a:srgbClr val="000000"/>
+              </a:buClr>
+              <a:buSzPct val="45000"/>
+              <a:buFont typeface="Wingdings" charset="2"/>
+              <a:buChar char=""/>
+              <a:defRPr lang="sr-Latn-RS" sz="3200" b="0" u="none" strike="noStrike">
+                <a:solidFill>
+                  <a:srgbClr val="000000"/>
+                </a:solidFill>
+                <a:effectLst/>
+                <a:uFillTx/>
+                <a:latin typeface="Arial"/>
+              </a:defRPr>
+            </a:lvl7pPr>
+          </a:lstStyle>
+          <a:p>
+            <a:pPr indent="-324000" algn="l">
+              <a:spcBef>
+                <a:spcPts val="1417"/>
+              </a:spcBef>
+              <a:buClr>
+                <a:srgbClr val="000000"/>
+              </a:buClr>
+              <a:buSzPct val="45000"/>
+              <a:buFont typeface="Wingdings" charset="2"/>
+              <a:buChar char=""/>
+            </a:pPr>
+            <a:r>
+              <a:rPr lang="sr-Latn-RS" sz="3200" b="0" u="none" strike="noStrike">
+                <a:solidFill>
+                  <a:srgbClr val="000000"/>
+                </a:solidFill>
+                <a:effectLst/>
+                <a:uFillTx/>
+                <a:latin typeface="Arial"/>
+              </a:rPr>
+              <a:t>Click to edit the outline text format</a:t>
+            </a:r>
+            <a:endParaRPr lang="sr-Latn-RS" sz="3200" b="0" u="none" strike="noStrike">
+              <a:solidFill>
+                <a:srgbClr val="000000"/>
+              </a:solidFill>
+              <a:effectLst/>
+              <a:uFillTx/>
+              <a:latin typeface="Arial"/>
+            </a:endParaRPr>
+          </a:p>
+          <a:p>
+            <a:pPr marL="864000" lvl="1" indent="-324000" algn="l">
+              <a:spcBef>
+                <a:spcPts val="1134"/>
+              </a:spcBef>
+              <a:buClr>
+                <a:srgbClr val="000000"/>
+              </a:buClr>
+              <a:buSzPct val="75000"/>
+              <a:buFont typeface="Symbol" charset="2"/>
+              <a:buChar char=""/>
+            </a:pPr>
+            <a:r>
+              <a:rPr lang="sr-Latn-RS" sz="3200" b="0" u="none" strike="noStrike">
+                <a:solidFill>
+                  <a:srgbClr val="000000"/>
+                </a:solidFill>
+                <a:effectLst/>
+                <a:uFillTx/>
+                <a:latin typeface="Arial"/>
+              </a:rPr>
+              <a:t>Second Outline Level</a:t>
+            </a:r>
+            <a:endParaRPr lang="sr-Latn-RS" sz="3200" b="0" u="none" strike="noStrike">
+              <a:solidFill>
+                <a:srgbClr val="000000"/>
+              </a:solidFill>
+              <a:effectLst/>
+              <a:uFillTx/>
+              <a:latin typeface="Arial"/>
+            </a:endParaRPr>
+          </a:p>
+          <a:p>
+            <a:pPr marL="1296000" lvl="2" indent="-288000" algn="l">
+              <a:spcBef>
+                <a:spcPts val="850"/>
+              </a:spcBef>
+              <a:buClr>
+                <a:srgbClr val="000000"/>
+              </a:buClr>
+              <a:buSzPct val="45000"/>
+              <a:buFont typeface="Wingdings" charset="2"/>
+              <a:buChar char=""/>
+            </a:pPr>
+            <a:r>
+              <a:rPr lang="sr-Latn-RS" sz="3200" b="0" u="none" strike="noStrike">
+                <a:solidFill>
+                  <a:srgbClr val="000000"/>
+                </a:solidFill>
+                <a:effectLst/>
+                <a:uFillTx/>
+                <a:latin typeface="Arial"/>
+              </a:rPr>
+              <a:t>Third Outline Level</a:t>
+            </a:r>
+            <a:endParaRPr lang="sr-Latn-RS" sz="3200" b="0" u="none" strike="noStrike">
+              <a:solidFill>
+                <a:srgbClr val="000000"/>
+              </a:solidFill>
+              <a:effectLst/>
+              <a:uFillTx/>
+              <a:latin typeface="Arial"/>
+            </a:endParaRPr>
+          </a:p>
+          <a:p>
+            <a:pPr marL="1728000" lvl="3" indent="-216000" algn="l">
+              <a:spcBef>
+                <a:spcPts val="567"/>
+              </a:spcBef>
+              <a:buClr>
+                <a:srgbClr val="000000"/>
+              </a:buClr>
+              <a:buSzPct val="75000"/>
+              <a:buFont typeface="Symbol" charset="2"/>
+              <a:buChar char=""/>
+            </a:pPr>
+            <a:r>
+              <a:rPr lang="sr-Latn-RS" sz="3200" b="0" u="none" strike="noStrike">
+                <a:solidFill>
+                  <a:srgbClr val="000000"/>
+                </a:solidFill>
+                <a:effectLst/>
+                <a:uFillTx/>
+                <a:latin typeface="Arial"/>
+              </a:rPr>
+              <a:t>Fourth Outline Level</a:t>
+            </a:r>
+            <a:endParaRPr lang="sr-Latn-RS" sz="3200" b="0" u="none" strike="noStrike">
+              <a:solidFill>
+                <a:srgbClr val="000000"/>
+              </a:solidFill>
+              <a:effectLst/>
+              <a:uFillTx/>
+              <a:latin typeface="Arial"/>
+            </a:endParaRPr>
+          </a:p>
+          <a:p>
+            <a:pPr marL="2160000" lvl="4" indent="-216000" algn="l">
+              <a:spcBef>
+                <a:spcPts val="283"/>
+              </a:spcBef>
+              <a:buClr>
+                <a:srgbClr val="000000"/>
+              </a:buClr>
+              <a:buSzPct val="45000"/>
+              <a:buFont typeface="Wingdings" charset="2"/>
+              <a:buChar char=""/>
+            </a:pPr>
+            <a:r>
+              <a:rPr lang="sr-Latn-RS" sz="3200" b="0" u="none" strike="noStrike">
+                <a:solidFill>
+                  <a:srgbClr val="000000"/>
+                </a:solidFill>
+                <a:effectLst/>
+                <a:uFillTx/>
+                <a:latin typeface="Arial"/>
+              </a:rPr>
+              <a:t>Fifth Outline Level</a:t>
+            </a:r>
+            <a:endParaRPr lang="sr-Latn-RS" sz="3200" b="0" u="none" strike="noStrike">
+              <a:solidFill>
+                <a:srgbClr val="000000"/>
+              </a:solidFill>
+              <a:effectLst/>
+              <a:uFillTx/>
+              <a:latin typeface="Arial"/>
+            </a:endParaRPr>
+          </a:p>
+          <a:p>
+            <a:pPr marL="2592000" lvl="5" indent="-216000" algn="l">
+              <a:spcBef>
+                <a:spcPts val="283"/>
+              </a:spcBef>
+              <a:buClr>
+                <a:srgbClr val="000000"/>
+              </a:buClr>
+              <a:buSzPct val="45000"/>
+              <a:buFont typeface="Wingdings" charset="2"/>
+              <a:buChar char=""/>
+            </a:pPr>
+            <a:r>
+              <a:rPr lang="sr-Latn-RS" sz="3200" b="0" u="none" strike="noStrike">
+                <a:solidFill>
+                  <a:srgbClr val="000000"/>
+                </a:solidFill>
+                <a:effectLst/>
+                <a:uFillTx/>
+                <a:latin typeface="Arial"/>
+              </a:rPr>
+              <a:t>Sixth Outline Level</a:t>
+            </a:r>
+            <a:endParaRPr lang="sr-Latn-RS" sz="3200" b="0" u="none" strike="noStrike">
+              <a:solidFill>
+                <a:srgbClr val="000000"/>
+              </a:solidFill>
+              <a:effectLst/>
+              <a:uFillTx/>
+              <a:latin typeface="Arial"/>
+            </a:endParaRPr>
+          </a:p>
+          <a:p>
+            <a:pPr marL="3024000" lvl="6" indent="-216000" algn="l">
+              <a:spcBef>
+                <a:spcPts val="283"/>
+              </a:spcBef>
+              <a:buClr>
+                <a:srgbClr val="000000"/>
+              </a:buClr>
+              <a:buSzPct val="45000"/>
+              <a:buFont typeface="Wingdings" charset="2"/>
+              <a:buChar char=""/>
+            </a:pPr>
+            <a:r>
+              <a:rPr lang="sr-Latn-RS" sz="3200" b="0" u="none" strike="noStrike">
+                <a:solidFill>
+                  <a:srgbClr val="000000"/>
+                </a:solidFill>
+                <a:effectLst/>
+                <a:uFillTx/>
+                <a:latin typeface="Arial"/>
+              </a:rPr>
+              <a:t>Seventh Outline Level</a:t>
+            </a:r>
             <a:endParaRPr lang="sr-Latn-RS" sz="3200" b="0" u="none" strike="noStrike">
               <a:solidFill>
                 <a:srgbClr val="000000"/>
@@ -125,62 +1209,223 @@
       </p:sp>
       <p:sp>
         <p:nvSpPr>
-          <p:cNvPr id="4" name="PlaceHolder 3"/>
+          <p:cNvPr id="9" name="PlaceHolder 3"/>
           <p:cNvSpPr>
             <a:spLocks noGrp="1"/>
           </p:cNvSpPr>
           <p:nvPr>
-            <p:ph type="ftr" idx="2"/>
+            <p:ph type="ftr" idx="4"/>
           </p:nvPr>
         </p:nvSpPr>
-        <p:spPr/>
+        <p:spPr>
+          <a:xfrm>
+            <a:off x="3447360" y="5165280"/>
+            <a:ext cx="3194640" cy="390240"/>
+          </a:xfrm>
+          <a:prstGeom prst="rect">
+            <a:avLst/>
+          </a:prstGeom>
+          <a:noFill/>
+          <a:ln w="0">
+            <a:noFill/>
+          </a:ln>
+        </p:spPr>
         <p:txBody>
-          <a:bodyPr/>
-          <a:p>
-            <a:r>
-              <a:t>Footer</a:t>
-            </a:r>
+          <a:bodyPr lIns="0" tIns="0" rIns="0" bIns="0" anchor="t">
+            <a:noAutofit/>
+          </a:bodyPr>
+          <a:lstStyle>
+            <a:lvl1pPr indent="0" algn="ctr">
+              <a:lnSpc>
+                <a:spcPct val="100000"/>
+              </a:lnSpc>
+              <a:buNone/>
+              <a:tabLst>
+                <a:tab pos="0" algn="l"/>
+              </a:tabLst>
+              <a:defRPr lang="sr-Latn-RS" sz="1400" b="0" u="none" strike="noStrike">
+                <a:solidFill>
+                  <a:srgbClr val="000000"/>
+                </a:solidFill>
+                <a:effectLst/>
+                <a:uFillTx/>
+                <a:latin typeface="Times New Roman"/>
+              </a:defRPr>
+            </a:lvl1pPr>
+          </a:lstStyle>
+          <a:p>
+            <a:pPr indent="0" algn="ctr">
+              <a:lnSpc>
+                <a:spcPct val="100000"/>
+              </a:lnSpc>
+              <a:buNone/>
+              <a:tabLst>
+                <a:tab pos="0" algn="l"/>
+              </a:tabLst>
+            </a:pPr>
+            <a:r>
+              <a:rPr lang="sr-Latn-RS" sz="1400" b="0" u="none" strike="noStrike">
+                <a:solidFill>
+                  <a:srgbClr val="000000"/>
+                </a:solidFill>
+                <a:effectLst/>
+                <a:uFillTx/>
+                <a:latin typeface="Times New Roman"/>
+              </a:rPr>
+              <a:t>&lt;footer&gt;</a:t>
+            </a:r>
+            <a:endParaRPr lang="sr-Latn-RS" sz="1400" b="0" u="none" strike="noStrike">
+              <a:solidFill>
+                <a:srgbClr val="000000"/>
+              </a:solidFill>
+              <a:effectLst/>
+              <a:uFillTx/>
+              <a:latin typeface="Times New Roman"/>
+            </a:endParaRPr>
           </a:p>
         </p:txBody>
       </p:sp>
       <p:sp>
         <p:nvSpPr>
-          <p:cNvPr id="5" name="PlaceHolder 4"/>
+          <p:cNvPr id="10" name="PlaceHolder 4"/>
           <p:cNvSpPr>
             <a:spLocks noGrp="1"/>
           </p:cNvSpPr>
           <p:nvPr>
-            <p:ph type="sldNum" idx="3"/>
+            <p:ph type="sldNum" idx="5"/>
           </p:nvPr>
         </p:nvSpPr>
-        <p:spPr/>
+        <p:spPr>
+          <a:xfrm>
+            <a:off x="7227360" y="5165280"/>
+            <a:ext cx="2347920" cy="390240"/>
+          </a:xfrm>
+          <a:prstGeom prst="rect">
+            <a:avLst/>
+          </a:prstGeom>
+          <a:noFill/>
+          <a:ln w="0">
+            <a:noFill/>
+          </a:ln>
+        </p:spPr>
         <p:txBody>
-          <a:bodyPr/>
-          <a:p>
-            <a:fld id="{1767FF0F-9523-4B3F-AA86-220F36E6D605}" type="slidenum">
-              <a:t>&lt;#&gt;</a:t>
+          <a:bodyPr lIns="0" tIns="0" rIns="0" bIns="0" anchor="t">
+            <a:noAutofit/>
+          </a:bodyPr>
+          <a:lstStyle>
+            <a:lvl1pPr indent="0" algn="r">
+              <a:lnSpc>
+                <a:spcPct val="100000"/>
+              </a:lnSpc>
+              <a:buNone/>
+              <a:tabLst>
+                <a:tab pos="0" algn="l"/>
+              </a:tabLst>
+              <a:defRPr lang="sr-Latn-RS" sz="1400" b="0" u="none" strike="noStrike">
+                <a:solidFill>
+                  <a:srgbClr val="000000"/>
+                </a:solidFill>
+                <a:effectLst/>
+                <a:uFillTx/>
+                <a:latin typeface="Times New Roman"/>
+              </a:defRPr>
+            </a:lvl1pPr>
+          </a:lstStyle>
+          <a:p>
+            <a:pPr indent="0" algn="r">
+              <a:lnSpc>
+                <a:spcPct val="100000"/>
+              </a:lnSpc>
+              <a:buNone/>
+              <a:tabLst>
+                <a:tab pos="0" algn="l"/>
+              </a:tabLst>
+            </a:pPr>
+            <a:fld id="{6970D491-0175-4D1A-B744-9EE1A968A166}" type="slidenum">
+              <a:rPr lang="sr-Latn-RS" sz="1400" b="0" u="none" strike="noStrike">
+                <a:solidFill>
+                  <a:srgbClr val="000000"/>
+                </a:solidFill>
+                <a:effectLst/>
+                <a:uFillTx/>
+                <a:latin typeface="Times New Roman"/>
+              </a:rPr>
+              <a:t>&lt;number&gt;</a:t>
             </a:fld>
+            <a:endParaRPr lang="sr-Latn-RS" sz="1400" b="0" u="none" strike="noStrike">
+              <a:solidFill>
+                <a:srgbClr val="000000"/>
+              </a:solidFill>
+              <a:effectLst/>
+              <a:uFillTx/>
+              <a:latin typeface="Times New Roman"/>
+            </a:endParaRPr>
           </a:p>
         </p:txBody>
       </p:sp>
       <p:sp>
         <p:nvSpPr>
-          <p:cNvPr id="6" name="PlaceHolder 5"/>
+          <p:cNvPr id="11" name="PlaceHolder 5"/>
           <p:cNvSpPr>
             <a:spLocks noGrp="1"/>
           </p:cNvSpPr>
           <p:nvPr>
-            <p:ph type="dt" idx="1"/>
+            <p:ph type="dt" idx="6"/>
           </p:nvPr>
         </p:nvSpPr>
-        <p:spPr/>
+        <p:spPr>
+          <a:xfrm>
+            <a:off x="504000" y="5165280"/>
+            <a:ext cx="2347920" cy="390240"/>
+          </a:xfrm>
+          <a:prstGeom prst="rect">
+            <a:avLst/>
+          </a:prstGeom>
+          <a:noFill/>
+          <a:ln w="0">
+            <a:noFill/>
+          </a:ln>
+        </p:spPr>
         <p:txBody>
-          <a:bodyPr/>
-          <a:p>
-            <a:r>
-              <a:rPr lang="sr-Latn-RS"/>
-              <a:t/>
-            </a:r>
+          <a:bodyPr lIns="0" tIns="0" rIns="0" bIns="0" anchor="t">
+            <a:noAutofit/>
+          </a:bodyPr>
+          <a:lstStyle>
+            <a:lvl1pPr indent="0" algn="l">
+              <a:buNone/>
+              <a:defRPr lang="sr-Latn-RS" sz="1400" b="0" u="none" strike="noStrike">
+                <a:solidFill>
+                  <a:srgbClr val="000000"/>
+                </a:solidFill>
+                <a:effectLst/>
+                <a:uFillTx/>
+                <a:latin typeface="Times New Roman"/>
+              </a:defRPr>
+            </a:lvl1pPr>
+          </a:lstStyle>
+          <a:p>
+            <a:pPr indent="0" algn="l">
+              <a:buNone/>
+            </a:pPr>
+            <a:r>
+              <a:rPr lang="sr-Latn-RS" sz="1400" b="0" u="none" strike="noStrike">
+                <a:solidFill>
+                  <a:srgbClr val="000000"/>
+                </a:solidFill>
+                <a:effectLst/>
+                <a:uFillTx/>
+                <a:latin typeface="Times New Roman"/>
+              </a:rPr>
+              <a:t>&lt;date/time&gt;</a:t>
+            </a:r>
+            <a:endParaRPr lang="sr-Latn-RS" sz="1400" b="0" u="none" strike="noStrike">
+              <a:solidFill>
+                <a:srgbClr val="000000"/>
+              </a:solidFill>
+              <a:effectLst/>
+              <a:uFillTx/>
+              <a:latin typeface="Times New Roman"/>
+            </a:endParaRPr>
           </a:p>
         </p:txBody>
       </p:sp>
@@ -189,9 +1434,9 @@
 </p:sldLayout>
 </file>
 
-<file path=ppt/slideLayouts/slideLayout2.xml><?xml version="1.0" encoding="utf-8"?>
-<p:sldLayout xmlns:a="http://schemas.openxmlformats.org/drawingml/2006/main" xmlns:p="http://schemas.openxmlformats.org/presentationml/2006/main" xmlns:r="http://schemas.openxmlformats.org/officeDocument/2006/relationships" xmlns:p14="http://schemas.microsoft.com/office/powerpoint/2010/main" xmlns:p15="http://schemas.microsoft.com/office/powerpoint/2012/main" xmlns:mc="http://schemas.openxmlformats.org/markup-compatibility/2006" type="tx" preserve="1">
-  <p:cSld name="Default">
+<file path=ppt/slideLayouts/slideLayout3.xml><?xml version="1.0" encoding="utf-8"?>
+<p:sldLayout xmlns:a="http://schemas.openxmlformats.org/drawingml/2006/main" xmlns:p="http://schemas.openxmlformats.org/presentationml/2006/main" xmlns:r="http://schemas.openxmlformats.org/officeDocument/2006/relationships" xmlns:p14="http://schemas.microsoft.com/office/powerpoint/2010/main" xmlns:p15="http://schemas.microsoft.com/office/powerpoint/2012/main" xmlns:mc="http://schemas.openxmlformats.org/markup-compatibility/2006" type="blank" preserve="1">
+  <p:cSld name="Default 1">
     <p:spTree>
       <p:nvGrpSpPr>
         <p:cNvPr id="1" name=""/>
@@ -208,7 +1453,7 @@
       </p:grpSpPr>
       <p:sp>
         <p:nvSpPr>
-          <p:cNvPr id="9" name="PlaceHolder 1"/>
+          <p:cNvPr id="12" name="PlaceHolder 1"/>
           <p:cNvSpPr>
             <a:spLocks noGrp="1"/>
           </p:cNvSpPr>
@@ -218,8 +1463,8 @@
         </p:nvSpPr>
         <p:spPr>
           <a:xfrm>
-            <a:off x="504000" y="226080"/>
-            <a:ext cx="9071640" cy="946440"/>
+            <a:off x="504000" y="363600"/>
+            <a:ext cx="9071280" cy="670680"/>
           </a:xfrm>
           <a:prstGeom prst="rect">
             <a:avLst/>
@@ -233,10 +1478,40 @@
           <a:bodyPr lIns="0" tIns="0" rIns="0" bIns="0" anchor="ctr">
             <a:spAutoFit/>
           </a:bodyPr>
-          <a:p>
-            <a:pPr indent="0" algn="ctr">
+          <a:lstStyle>
+            <a:lvl1pPr indent="0" algn="l">
               <a:buNone/>
-            </a:pPr>
+              <a:tabLst>
+                <a:tab pos="0" algn="l"/>
+              </a:tabLst>
+              <a:defRPr lang="sr-Latn-RS" sz="4400" b="0" u="none" strike="noStrike">
+                <a:solidFill>
+                  <a:srgbClr val="000000"/>
+                </a:solidFill>
+                <a:effectLst/>
+                <a:uFillTx/>
+                <a:latin typeface="Arial"/>
+              </a:defRPr>
+            </a:lvl1pPr>
+          </a:lstStyle>
+          <a:p>
+            <a:pPr indent="0" algn="l">
+              <a:buNone/>
+              <a:tabLst>
+                <a:tab pos="0" algn="l"/>
+              </a:tabLst>
+            </a:pPr>
+            <a:r>
+              <a:rPr lang="sr-Latn-RS" sz="4400" b="0" u="none" strike="noStrike">
+                <a:solidFill>
+                  <a:srgbClr val="000000"/>
+                </a:solidFill>
+                <a:effectLst/>
+                <a:uFillTx/>
+                <a:latin typeface="Arial"/>
+              </a:rPr>
+              <a:t>Click to edit the title text format</a:t>
+            </a:r>
             <a:endParaRPr lang="sr-Latn-RS" sz="4400" b="0" u="none" strike="noStrike">
               <a:solidFill>
                 <a:srgbClr val="000000"/>
@@ -250,18 +1525,18 @@
       </p:sp>
       <p:sp>
         <p:nvSpPr>
-          <p:cNvPr id="10" name="PlaceHolder 2"/>
+          <p:cNvPr id="13" name="PlaceHolder 2"/>
           <p:cNvSpPr>
             <a:spLocks noGrp="1"/>
           </p:cNvSpPr>
           <p:nvPr>
-            <p:ph/>
+            <p:ph type="body"/>
           </p:nvPr>
         </p:nvSpPr>
         <p:spPr>
           <a:xfrm>
             <a:off x="504000" y="1326600"/>
-            <a:ext cx="9071640" cy="3288240"/>
+            <a:ext cx="9071280" cy="3287880"/>
           </a:xfrm>
           <a:prstGeom prst="rect">
             <a:avLst/>
@@ -273,15 +1548,358 @@
         </p:spPr>
         <p:txBody>
           <a:bodyPr lIns="0" tIns="0" rIns="0" bIns="0" anchor="t">
-            <a:normAutofit/>
+            <a:normAutofit fontScale="92500" lnSpcReduction="9999"/>
           </a:bodyPr>
-          <a:p>
-            <a:pPr indent="0" algn="l">
+          <a:lstStyle>
+            <a:lvl1pPr algn="l">
               <a:spcBef>
                 <a:spcPts val="1417"/>
               </a:spcBef>
-              <a:buNone/>
-            </a:pPr>
+              <a:buClr>
+                <a:srgbClr val="000000"/>
+              </a:buClr>
+              <a:buSzPct val="45000"/>
+              <a:buFont typeface="Wingdings" charset="2"/>
+              <a:buChar char=""/>
+              <a:defRPr lang="sr-Latn-RS" sz="3200" b="0" u="none" strike="noStrike">
+                <a:solidFill>
+                  <a:srgbClr val="000000"/>
+                </a:solidFill>
+                <a:effectLst/>
+                <a:uFillTx/>
+                <a:latin typeface="Arial"/>
+              </a:defRPr>
+            </a:lvl1pPr>
+            <a:lvl2pPr lvl="1" algn="l">
+              <a:spcBef>
+                <a:spcPts val="1134"/>
+              </a:spcBef>
+              <a:buClr>
+                <a:srgbClr val="000000"/>
+              </a:buClr>
+              <a:buSzPct val="75000"/>
+              <a:buFont typeface="Symbol" charset="2"/>
+              <a:buChar char=""/>
+              <a:defRPr lang="sr-Latn-RS" sz="3200" b="0" u="none" strike="noStrike">
+                <a:solidFill>
+                  <a:srgbClr val="000000"/>
+                </a:solidFill>
+                <a:effectLst/>
+                <a:uFillTx/>
+                <a:latin typeface="Arial"/>
+              </a:defRPr>
+            </a:lvl2pPr>
+            <a:lvl3pPr lvl="2" algn="l">
+              <a:spcBef>
+                <a:spcPts val="850"/>
+              </a:spcBef>
+              <a:buClr>
+                <a:srgbClr val="000000"/>
+              </a:buClr>
+              <a:buSzPct val="45000"/>
+              <a:buFont typeface="Wingdings" charset="2"/>
+              <a:buChar char=""/>
+              <a:defRPr lang="sr-Latn-RS" sz="3200" b="0" u="none" strike="noStrike">
+                <a:solidFill>
+                  <a:srgbClr val="000000"/>
+                </a:solidFill>
+                <a:effectLst/>
+                <a:uFillTx/>
+                <a:latin typeface="Arial"/>
+              </a:defRPr>
+            </a:lvl3pPr>
+            <a:lvl4pPr lvl="3" algn="l">
+              <a:spcBef>
+                <a:spcPts val="567"/>
+              </a:spcBef>
+              <a:buClr>
+                <a:srgbClr val="000000"/>
+              </a:buClr>
+              <a:buSzPct val="75000"/>
+              <a:buFont typeface="Symbol" charset="2"/>
+              <a:buChar char=""/>
+              <a:defRPr lang="sr-Latn-RS" sz="3200" b="0" u="none" strike="noStrike">
+                <a:solidFill>
+                  <a:srgbClr val="000000"/>
+                </a:solidFill>
+                <a:effectLst/>
+                <a:uFillTx/>
+                <a:latin typeface="Arial"/>
+              </a:defRPr>
+            </a:lvl4pPr>
+            <a:lvl5pPr lvl="4" algn="l">
+              <a:spcBef>
+                <a:spcPts val="283"/>
+              </a:spcBef>
+              <a:buClr>
+                <a:srgbClr val="000000"/>
+              </a:buClr>
+              <a:buSzPct val="45000"/>
+              <a:buFont typeface="Wingdings" charset="2"/>
+              <a:buChar char=""/>
+              <a:defRPr lang="sr-Latn-RS" sz="3200" b="0" u="none" strike="noStrike">
+                <a:solidFill>
+                  <a:srgbClr val="000000"/>
+                </a:solidFill>
+                <a:effectLst/>
+                <a:uFillTx/>
+                <a:latin typeface="Arial"/>
+              </a:defRPr>
+            </a:lvl5pPr>
+            <a:lvl6pPr lvl="5" algn="l">
+              <a:spcBef>
+                <a:spcPts val="283"/>
+              </a:spcBef>
+              <a:buClr>
+                <a:srgbClr val="000000"/>
+              </a:buClr>
+              <a:buSzPct val="45000"/>
+              <a:buFont typeface="Wingdings" charset="2"/>
+              <a:buChar char=""/>
+              <a:defRPr lang="sr-Latn-RS" sz="3200" b="0" u="none" strike="noStrike">
+                <a:solidFill>
+                  <a:srgbClr val="000000"/>
+                </a:solidFill>
+                <a:effectLst/>
+                <a:uFillTx/>
+                <a:latin typeface="Arial"/>
+              </a:defRPr>
+            </a:lvl6pPr>
+            <a:lvl7pPr lvl="6" algn="l">
+              <a:spcBef>
+                <a:spcPts val="283"/>
+              </a:spcBef>
+              <a:buClr>
+                <a:srgbClr val="000000"/>
+              </a:buClr>
+              <a:buSzPct val="45000"/>
+              <a:buFont typeface="Wingdings" charset="2"/>
+              <a:buChar char=""/>
+              <a:defRPr lang="sr-Latn-RS" sz="3200" b="0" u="none" strike="noStrike">
+                <a:solidFill>
+                  <a:srgbClr val="000000"/>
+                </a:solidFill>
+                <a:effectLst/>
+                <a:uFillTx/>
+                <a:latin typeface="Arial"/>
+              </a:defRPr>
+            </a:lvl7pPr>
+          </a:lstStyle>
+          <a:p>
+            <a:pPr indent="-324000" algn="l">
+              <a:spcBef>
+                <a:spcPts val="1417"/>
+              </a:spcBef>
+              <a:buClr>
+                <a:srgbClr val="000000"/>
+              </a:buClr>
+              <a:buSzPct val="45000"/>
+              <a:buFont typeface="Wingdings" charset="2"/>
+              <a:buChar char=""/>
+            </a:pPr>
+            <a:r>
+              <a:rPr lang="sr-Latn-RS" sz="3200" b="0" u="none" strike="noStrike">
+                <a:solidFill>
+                  <a:srgbClr val="000000"/>
+                </a:solidFill>
+                <a:effectLst/>
+                <a:uFillTx/>
+                <a:latin typeface="Arial"/>
+              </a:rPr>
+              <a:t>Click to edit the outline text format</a:t>
+            </a:r>
+            <a:endParaRPr lang="sr-Latn-RS" sz="3200" b="0" u="none" strike="noStrike">
+              <a:solidFill>
+                <a:srgbClr val="000000"/>
+              </a:solidFill>
+              <a:effectLst/>
+              <a:uFillTx/>
+              <a:latin typeface="Arial"/>
+            </a:endParaRPr>
+          </a:p>
+          <a:p>
+            <a:pPr marL="864000" lvl="1" indent="-324000" algn="l">
+              <a:spcBef>
+                <a:spcPts val="1134"/>
+              </a:spcBef>
+              <a:buClr>
+                <a:srgbClr val="000000"/>
+              </a:buClr>
+              <a:buSzPct val="75000"/>
+              <a:buFont typeface="Symbol" charset="2"/>
+              <a:buChar char=""/>
+            </a:pPr>
+            <a:r>
+              <a:rPr lang="sr-Latn-RS" sz="3200" b="0" u="none" strike="noStrike">
+                <a:solidFill>
+                  <a:srgbClr val="000000"/>
+                </a:solidFill>
+                <a:effectLst/>
+                <a:uFillTx/>
+                <a:latin typeface="Arial"/>
+              </a:rPr>
+              <a:t>Second Outline Level</a:t>
+            </a:r>
+            <a:endParaRPr lang="sr-Latn-RS" sz="3200" b="0" u="none" strike="noStrike">
+              <a:solidFill>
+                <a:srgbClr val="000000"/>
+              </a:solidFill>
+              <a:effectLst/>
+              <a:uFillTx/>
+              <a:latin typeface="Arial"/>
+            </a:endParaRPr>
+          </a:p>
+          <a:p>
+            <a:pPr marL="1296000" lvl="2" indent="-288000" algn="l">
+              <a:spcBef>
+                <a:spcPts val="850"/>
+              </a:spcBef>
+              <a:buClr>
+                <a:srgbClr val="000000"/>
+              </a:buClr>
+              <a:buSzPct val="45000"/>
+              <a:buFont typeface="Wingdings" charset="2"/>
+              <a:buChar char=""/>
+            </a:pPr>
+            <a:r>
+              <a:rPr lang="sr-Latn-RS" sz="3200" b="0" u="none" strike="noStrike">
+                <a:solidFill>
+                  <a:srgbClr val="000000"/>
+                </a:solidFill>
+                <a:effectLst/>
+                <a:uFillTx/>
+                <a:latin typeface="Arial"/>
+              </a:rPr>
+              <a:t>Third Outline Level</a:t>
+            </a:r>
+            <a:endParaRPr lang="sr-Latn-RS" sz="3200" b="0" u="none" strike="noStrike">
+              <a:solidFill>
+                <a:srgbClr val="000000"/>
+              </a:solidFill>
+              <a:effectLst/>
+              <a:uFillTx/>
+              <a:latin typeface="Arial"/>
+            </a:endParaRPr>
+          </a:p>
+          <a:p>
+            <a:pPr marL="1728000" lvl="3" indent="-216000" algn="l">
+              <a:spcBef>
+                <a:spcPts val="567"/>
+              </a:spcBef>
+              <a:buClr>
+                <a:srgbClr val="000000"/>
+              </a:buClr>
+              <a:buSzPct val="75000"/>
+              <a:buFont typeface="Symbol" charset="2"/>
+              <a:buChar char=""/>
+            </a:pPr>
+            <a:r>
+              <a:rPr lang="sr-Latn-RS" sz="3200" b="0" u="none" strike="noStrike">
+                <a:solidFill>
+                  <a:srgbClr val="000000"/>
+                </a:solidFill>
+                <a:effectLst/>
+                <a:uFillTx/>
+                <a:latin typeface="Arial"/>
+              </a:rPr>
+              <a:t>Fourth Outline Level</a:t>
+            </a:r>
+            <a:endParaRPr lang="sr-Latn-RS" sz="3200" b="0" u="none" strike="noStrike">
+              <a:solidFill>
+                <a:srgbClr val="000000"/>
+              </a:solidFill>
+              <a:effectLst/>
+              <a:uFillTx/>
+              <a:latin typeface="Arial"/>
+            </a:endParaRPr>
+          </a:p>
+          <a:p>
+            <a:pPr marL="2160000" lvl="4" indent="-216000" algn="l">
+              <a:spcBef>
+                <a:spcPts val="283"/>
+              </a:spcBef>
+              <a:buClr>
+                <a:srgbClr val="000000"/>
+              </a:buClr>
+              <a:buSzPct val="45000"/>
+              <a:buFont typeface="Wingdings" charset="2"/>
+              <a:buChar char=""/>
+            </a:pPr>
+            <a:r>
+              <a:rPr lang="sr-Latn-RS" sz="3200" b="0" u="none" strike="noStrike">
+                <a:solidFill>
+                  <a:srgbClr val="000000"/>
+                </a:solidFill>
+                <a:effectLst/>
+                <a:uFillTx/>
+                <a:latin typeface="Arial"/>
+              </a:rPr>
+              <a:t>Fifth Outline Level</a:t>
+            </a:r>
+            <a:endParaRPr lang="sr-Latn-RS" sz="3200" b="0" u="none" strike="noStrike">
+              <a:solidFill>
+                <a:srgbClr val="000000"/>
+              </a:solidFill>
+              <a:effectLst/>
+              <a:uFillTx/>
+              <a:latin typeface="Arial"/>
+            </a:endParaRPr>
+          </a:p>
+          <a:p>
+            <a:pPr marL="2592000" lvl="5" indent="-216000" algn="l">
+              <a:spcBef>
+                <a:spcPts val="283"/>
+              </a:spcBef>
+              <a:buClr>
+                <a:srgbClr val="000000"/>
+              </a:buClr>
+              <a:buSzPct val="45000"/>
+              <a:buFont typeface="Wingdings" charset="2"/>
+              <a:buChar char=""/>
+            </a:pPr>
+            <a:r>
+              <a:rPr lang="sr-Latn-RS" sz="3200" b="0" u="none" strike="noStrike">
+                <a:solidFill>
+                  <a:srgbClr val="000000"/>
+                </a:solidFill>
+                <a:effectLst/>
+                <a:uFillTx/>
+                <a:latin typeface="Arial"/>
+              </a:rPr>
+              <a:t>Sixth Outline Level</a:t>
+            </a:r>
+            <a:endParaRPr lang="sr-Latn-RS" sz="3200" b="0" u="none" strike="noStrike">
+              <a:solidFill>
+                <a:srgbClr val="000000"/>
+              </a:solidFill>
+              <a:effectLst/>
+              <a:uFillTx/>
+              <a:latin typeface="Arial"/>
+            </a:endParaRPr>
+          </a:p>
+          <a:p>
+            <a:pPr marL="3024000" lvl="6" indent="-216000" algn="l">
+              <a:spcBef>
+                <a:spcPts val="283"/>
+              </a:spcBef>
+              <a:buClr>
+                <a:srgbClr val="000000"/>
+              </a:buClr>
+              <a:buSzPct val="45000"/>
+              <a:buFont typeface="Wingdings" charset="2"/>
+              <a:buChar char=""/>
+            </a:pPr>
+            <a:r>
+              <a:rPr lang="sr-Latn-RS" sz="3200" b="0" u="none" strike="noStrike">
+                <a:solidFill>
+                  <a:srgbClr val="000000"/>
+                </a:solidFill>
+                <a:effectLst/>
+                <a:uFillTx/>
+                <a:latin typeface="Arial"/>
+              </a:rPr>
+              <a:t>Seventh Outline Level</a:t>
+            </a:r>
             <a:endParaRPr lang="sr-Latn-RS" sz="3200" b="0" u="none" strike="noStrike">
               <a:solidFill>
                 <a:srgbClr val="000000"/>
@@ -295,62 +1913,223 @@
       </p:sp>
       <p:sp>
         <p:nvSpPr>
-          <p:cNvPr id="4" name="PlaceHolder 3"/>
+          <p:cNvPr id="14" name="PlaceHolder 3"/>
           <p:cNvSpPr>
             <a:spLocks noGrp="1"/>
           </p:cNvSpPr>
           <p:nvPr>
-            <p:ph type="ftr" idx="2"/>
+            <p:ph type="ftr" idx="7"/>
           </p:nvPr>
         </p:nvSpPr>
-        <p:spPr/>
+        <p:spPr>
+          <a:xfrm>
+            <a:off x="3447360" y="5165280"/>
+            <a:ext cx="3194640" cy="390240"/>
+          </a:xfrm>
+          <a:prstGeom prst="rect">
+            <a:avLst/>
+          </a:prstGeom>
+          <a:noFill/>
+          <a:ln w="0">
+            <a:noFill/>
+          </a:ln>
+        </p:spPr>
         <p:txBody>
-          <a:bodyPr/>
-          <a:p>
-            <a:r>
-              <a:t>Footer</a:t>
-            </a:r>
+          <a:bodyPr lIns="0" tIns="0" rIns="0" bIns="0" anchor="t">
+            <a:noAutofit/>
+          </a:bodyPr>
+          <a:lstStyle>
+            <a:lvl1pPr indent="0" algn="ctr">
+              <a:lnSpc>
+                <a:spcPct val="100000"/>
+              </a:lnSpc>
+              <a:buNone/>
+              <a:tabLst>
+                <a:tab pos="0" algn="l"/>
+              </a:tabLst>
+              <a:defRPr lang="sr-Latn-RS" sz="1400" b="0" u="none" strike="noStrike">
+                <a:solidFill>
+                  <a:srgbClr val="000000"/>
+                </a:solidFill>
+                <a:effectLst/>
+                <a:uFillTx/>
+                <a:latin typeface="Times New Roman"/>
+              </a:defRPr>
+            </a:lvl1pPr>
+          </a:lstStyle>
+          <a:p>
+            <a:pPr indent="0" algn="ctr">
+              <a:lnSpc>
+                <a:spcPct val="100000"/>
+              </a:lnSpc>
+              <a:buNone/>
+              <a:tabLst>
+                <a:tab pos="0" algn="l"/>
+              </a:tabLst>
+            </a:pPr>
+            <a:r>
+              <a:rPr lang="sr-Latn-RS" sz="1400" b="0" u="none" strike="noStrike">
+                <a:solidFill>
+                  <a:srgbClr val="000000"/>
+                </a:solidFill>
+                <a:effectLst/>
+                <a:uFillTx/>
+                <a:latin typeface="Times New Roman"/>
+              </a:rPr>
+              <a:t>&lt;footer&gt;</a:t>
+            </a:r>
+            <a:endParaRPr lang="sr-Latn-RS" sz="1400" b="0" u="none" strike="noStrike">
+              <a:solidFill>
+                <a:srgbClr val="000000"/>
+              </a:solidFill>
+              <a:effectLst/>
+              <a:uFillTx/>
+              <a:latin typeface="Times New Roman"/>
+            </a:endParaRPr>
           </a:p>
         </p:txBody>
       </p:sp>
       <p:sp>
         <p:nvSpPr>
-          <p:cNvPr id="5" name="PlaceHolder 4"/>
+          <p:cNvPr id="15" name="PlaceHolder 4"/>
           <p:cNvSpPr>
             <a:spLocks noGrp="1"/>
           </p:cNvSpPr>
           <p:nvPr>
-            <p:ph type="sldNum" idx="3"/>
+            <p:ph type="sldNum" idx="8"/>
           </p:nvPr>
         </p:nvSpPr>
-        <p:spPr/>
+        <p:spPr>
+          <a:xfrm>
+            <a:off x="7227360" y="5165280"/>
+            <a:ext cx="2347920" cy="390240"/>
+          </a:xfrm>
+          <a:prstGeom prst="rect">
+            <a:avLst/>
+          </a:prstGeom>
+          <a:noFill/>
+          <a:ln w="0">
+            <a:noFill/>
+          </a:ln>
+        </p:spPr>
         <p:txBody>
-          <a:bodyPr/>
-          <a:p>
-            <a:fld id="{ADD9AF6E-8F6D-4B6F-BCA6-A1457D98E61C}" type="slidenum">
-              <a:t>&lt;#&gt;</a:t>
+          <a:bodyPr lIns="0" tIns="0" rIns="0" bIns="0" anchor="t">
+            <a:noAutofit/>
+          </a:bodyPr>
+          <a:lstStyle>
+            <a:lvl1pPr indent="0" algn="r">
+              <a:lnSpc>
+                <a:spcPct val="100000"/>
+              </a:lnSpc>
+              <a:buNone/>
+              <a:tabLst>
+                <a:tab pos="0" algn="l"/>
+              </a:tabLst>
+              <a:defRPr lang="sr-Latn-RS" sz="1400" b="0" u="none" strike="noStrike">
+                <a:solidFill>
+                  <a:srgbClr val="000000"/>
+                </a:solidFill>
+                <a:effectLst/>
+                <a:uFillTx/>
+                <a:latin typeface="Times New Roman"/>
+              </a:defRPr>
+            </a:lvl1pPr>
+          </a:lstStyle>
+          <a:p>
+            <a:pPr indent="0" algn="r">
+              <a:lnSpc>
+                <a:spcPct val="100000"/>
+              </a:lnSpc>
+              <a:buNone/>
+              <a:tabLst>
+                <a:tab pos="0" algn="l"/>
+              </a:tabLst>
+            </a:pPr>
+            <a:fld id="{5C563DF7-8314-41FD-89D5-1F26ECB284FB}" type="slidenum">
+              <a:rPr lang="sr-Latn-RS" sz="1400" b="0" u="none" strike="noStrike">
+                <a:solidFill>
+                  <a:srgbClr val="000000"/>
+                </a:solidFill>
+                <a:effectLst/>
+                <a:uFillTx/>
+                <a:latin typeface="Times New Roman"/>
+              </a:rPr>
+              <a:t>&lt;number&gt;</a:t>
             </a:fld>
+            <a:endParaRPr lang="sr-Latn-RS" sz="1400" b="0" u="none" strike="noStrike">
+              <a:solidFill>
+                <a:srgbClr val="000000"/>
+              </a:solidFill>
+              <a:effectLst/>
+              <a:uFillTx/>
+              <a:latin typeface="Times New Roman"/>
+            </a:endParaRPr>
           </a:p>
         </p:txBody>
       </p:sp>
       <p:sp>
         <p:nvSpPr>
-          <p:cNvPr id="6" name="PlaceHolder 5"/>
+          <p:cNvPr id="16" name="PlaceHolder 5"/>
           <p:cNvSpPr>
             <a:spLocks noGrp="1"/>
           </p:cNvSpPr>
           <p:nvPr>
-            <p:ph type="dt" idx="1"/>
+            <p:ph type="dt" idx="9"/>
           </p:nvPr>
         </p:nvSpPr>
-        <p:spPr/>
+        <p:spPr>
+          <a:xfrm>
+            <a:off x="504000" y="5165280"/>
+            <a:ext cx="2347920" cy="390240"/>
+          </a:xfrm>
+          <a:prstGeom prst="rect">
+            <a:avLst/>
+          </a:prstGeom>
+          <a:noFill/>
+          <a:ln w="0">
+            <a:noFill/>
+          </a:ln>
+        </p:spPr>
         <p:txBody>
-          <a:bodyPr/>
-          <a:p>
-            <a:r>
-              <a:rPr lang="sr-Latn-RS"/>
-              <a:t/>
-            </a:r>
+          <a:bodyPr lIns="0" tIns="0" rIns="0" bIns="0" anchor="t">
+            <a:noAutofit/>
+          </a:bodyPr>
+          <a:lstStyle>
+            <a:lvl1pPr indent="0" algn="l">
+              <a:buNone/>
+              <a:defRPr lang="sr-Latn-RS" sz="1400" b="0" u="none" strike="noStrike">
+                <a:solidFill>
+                  <a:srgbClr val="000000"/>
+                </a:solidFill>
+                <a:effectLst/>
+                <a:uFillTx/>
+                <a:latin typeface="Times New Roman"/>
+              </a:defRPr>
+            </a:lvl1pPr>
+          </a:lstStyle>
+          <a:p>
+            <a:pPr indent="0" algn="l">
+              <a:buNone/>
+            </a:pPr>
+            <a:r>
+              <a:rPr lang="sr-Latn-RS" sz="1400" b="0" u="none" strike="noStrike">
+                <a:solidFill>
+                  <a:srgbClr val="000000"/>
+                </a:solidFill>
+                <a:effectLst/>
+                <a:uFillTx/>
+                <a:latin typeface="Times New Roman"/>
+              </a:rPr>
+              <a:t>&lt;date/time&gt;</a:t>
+            </a:r>
+            <a:endParaRPr lang="sr-Latn-RS" sz="1400" b="0" u="none" strike="noStrike">
+              <a:solidFill>
+                <a:srgbClr val="000000"/>
+              </a:solidFill>
+              <a:effectLst/>
+              <a:uFillTx/>
+              <a:latin typeface="Times New Roman"/>
+            </a:endParaRPr>
           </a:p>
         </p:txBody>
       </p:sp>
@@ -359,9 +2138,9 @@
 </p:sldLayout>
 </file>
 
-<file path=ppt/slideLayouts/slideLayout3.xml><?xml version="1.0" encoding="utf-8"?>
+<file path=ppt/slideLayouts/slideLayout4.xml><?xml version="1.0" encoding="utf-8"?>
 <p:sldLayout xmlns:a="http://schemas.openxmlformats.org/drawingml/2006/main" xmlns:p="http://schemas.openxmlformats.org/presentationml/2006/main" xmlns:r="http://schemas.openxmlformats.org/officeDocument/2006/relationships" xmlns:p14="http://schemas.microsoft.com/office/powerpoint/2010/main" xmlns:p15="http://schemas.microsoft.com/office/powerpoint/2012/main" xmlns:mc="http://schemas.openxmlformats.org/markup-compatibility/2006" type="titleOnly" preserve="1">
-  <p:cSld name="Default">
+  <p:cSld name="Default 2">
     <p:spTree>
       <p:nvGrpSpPr>
         <p:cNvPr id="1" name=""/>
@@ -378,7 +2157,7 @@
       </p:grpSpPr>
       <p:sp>
         <p:nvSpPr>
-          <p:cNvPr id="11" name="PlaceHolder 1"/>
+          <p:cNvPr id="17" name="PlaceHolder 1"/>
           <p:cNvSpPr>
             <a:spLocks noGrp="1"/>
           </p:cNvSpPr>
@@ -388,8 +2167,8 @@
         </p:nvSpPr>
         <p:spPr>
           <a:xfrm>
-            <a:off x="504000" y="226080"/>
-            <a:ext cx="9071640" cy="946440"/>
+            <a:off x="504000" y="363600"/>
+            <a:ext cx="9071280" cy="670680"/>
           </a:xfrm>
           <a:prstGeom prst="rect">
             <a:avLst/>
@@ -403,10 +2182,40 @@
           <a:bodyPr lIns="0" tIns="0" rIns="0" bIns="0" anchor="ctr">
             <a:spAutoFit/>
           </a:bodyPr>
-          <a:p>
-            <a:pPr indent="0" algn="ctr">
+          <a:lstStyle>
+            <a:lvl1pPr indent="0" algn="l">
               <a:buNone/>
-            </a:pPr>
+              <a:tabLst>
+                <a:tab pos="0" algn="l"/>
+              </a:tabLst>
+              <a:defRPr lang="sr-Latn-RS" sz="4400" b="0" u="none" strike="noStrike">
+                <a:solidFill>
+                  <a:srgbClr val="000000"/>
+                </a:solidFill>
+                <a:effectLst/>
+                <a:uFillTx/>
+                <a:latin typeface="Arial"/>
+              </a:defRPr>
+            </a:lvl1pPr>
+          </a:lstStyle>
+          <a:p>
+            <a:pPr indent="0" algn="l">
+              <a:buNone/>
+              <a:tabLst>
+                <a:tab pos="0" algn="l"/>
+              </a:tabLst>
+            </a:pPr>
+            <a:r>
+              <a:rPr lang="sr-Latn-RS" sz="4400" b="0" u="none" strike="noStrike">
+                <a:solidFill>
+                  <a:srgbClr val="000000"/>
+                </a:solidFill>
+                <a:effectLst/>
+                <a:uFillTx/>
+                <a:latin typeface="Arial"/>
+              </a:rPr>
+              <a:t>Click to edit the title text format</a:t>
+            </a:r>
             <a:endParaRPr lang="sr-Latn-RS" sz="4400" b="0" u="none" strike="noStrike">
               <a:solidFill>
                 <a:srgbClr val="000000"/>
@@ -420,62 +2229,611 @@
       </p:sp>
       <p:sp>
         <p:nvSpPr>
-          <p:cNvPr id="3" name="PlaceHolder 2"/>
+          <p:cNvPr id="18" name="PlaceHolder 2"/>
           <p:cNvSpPr>
             <a:spLocks noGrp="1"/>
           </p:cNvSpPr>
           <p:nvPr>
-            <p:ph type="ftr" idx="2"/>
+            <p:ph type="ftr" idx="10"/>
           </p:nvPr>
         </p:nvSpPr>
-        <p:spPr/>
+        <p:spPr>
+          <a:xfrm>
+            <a:off x="3447360" y="5165280"/>
+            <a:ext cx="3194640" cy="390240"/>
+          </a:xfrm>
+          <a:prstGeom prst="rect">
+            <a:avLst/>
+          </a:prstGeom>
+          <a:noFill/>
+          <a:ln w="0">
+            <a:noFill/>
+          </a:ln>
+        </p:spPr>
         <p:txBody>
-          <a:bodyPr/>
-          <a:p>
-            <a:r>
-              <a:t>Footer</a:t>
-            </a:r>
+          <a:bodyPr lIns="0" tIns="0" rIns="0" bIns="0" anchor="t">
+            <a:noAutofit/>
+          </a:bodyPr>
+          <a:lstStyle>
+            <a:lvl1pPr indent="0" algn="ctr">
+              <a:lnSpc>
+                <a:spcPct val="100000"/>
+              </a:lnSpc>
+              <a:buNone/>
+              <a:tabLst>
+                <a:tab pos="0" algn="l"/>
+              </a:tabLst>
+              <a:defRPr lang="sr-Latn-RS" sz="1400" b="0" u="none" strike="noStrike">
+                <a:solidFill>
+                  <a:srgbClr val="000000"/>
+                </a:solidFill>
+                <a:effectLst/>
+                <a:uFillTx/>
+                <a:latin typeface="Times New Roman"/>
+              </a:defRPr>
+            </a:lvl1pPr>
+          </a:lstStyle>
+          <a:p>
+            <a:pPr indent="0" algn="ctr">
+              <a:lnSpc>
+                <a:spcPct val="100000"/>
+              </a:lnSpc>
+              <a:buNone/>
+              <a:tabLst>
+                <a:tab pos="0" algn="l"/>
+              </a:tabLst>
+            </a:pPr>
+            <a:r>
+              <a:rPr lang="sr-Latn-RS" sz="1400" b="0" u="none" strike="noStrike">
+                <a:solidFill>
+                  <a:srgbClr val="000000"/>
+                </a:solidFill>
+                <a:effectLst/>
+                <a:uFillTx/>
+                <a:latin typeface="Times New Roman"/>
+              </a:rPr>
+              <a:t>&lt;footer&gt;</a:t>
+            </a:r>
+            <a:endParaRPr lang="sr-Latn-RS" sz="1400" b="0" u="none" strike="noStrike">
+              <a:solidFill>
+                <a:srgbClr val="000000"/>
+              </a:solidFill>
+              <a:effectLst/>
+              <a:uFillTx/>
+              <a:latin typeface="Times New Roman"/>
+            </a:endParaRPr>
           </a:p>
         </p:txBody>
       </p:sp>
       <p:sp>
         <p:nvSpPr>
-          <p:cNvPr id="4" name="PlaceHolder 3"/>
+          <p:cNvPr id="19" name="PlaceHolder 3"/>
           <p:cNvSpPr>
             <a:spLocks noGrp="1"/>
           </p:cNvSpPr>
           <p:nvPr>
-            <p:ph type="sldNum" idx="3"/>
+            <p:ph type="sldNum" idx="11"/>
           </p:nvPr>
         </p:nvSpPr>
-        <p:spPr/>
+        <p:spPr>
+          <a:xfrm>
+            <a:off x="7227360" y="5165280"/>
+            <a:ext cx="2347920" cy="390240"/>
+          </a:xfrm>
+          <a:prstGeom prst="rect">
+            <a:avLst/>
+          </a:prstGeom>
+          <a:noFill/>
+          <a:ln w="0">
+            <a:noFill/>
+          </a:ln>
+        </p:spPr>
         <p:txBody>
-          <a:bodyPr/>
-          <a:p>
-            <a:fld id="{89C702C2-293B-4761-A8F0-B0A2D0C857A2}" type="slidenum">
-              <a:t>&lt;#&gt;</a:t>
+          <a:bodyPr lIns="0" tIns="0" rIns="0" bIns="0" anchor="t">
+            <a:noAutofit/>
+          </a:bodyPr>
+          <a:lstStyle>
+            <a:lvl1pPr indent="0" algn="r">
+              <a:lnSpc>
+                <a:spcPct val="100000"/>
+              </a:lnSpc>
+              <a:buNone/>
+              <a:tabLst>
+                <a:tab pos="0" algn="l"/>
+              </a:tabLst>
+              <a:defRPr lang="sr-Latn-RS" sz="1400" b="0" u="none" strike="noStrike">
+                <a:solidFill>
+                  <a:srgbClr val="000000"/>
+                </a:solidFill>
+                <a:effectLst/>
+                <a:uFillTx/>
+                <a:latin typeface="Times New Roman"/>
+              </a:defRPr>
+            </a:lvl1pPr>
+          </a:lstStyle>
+          <a:p>
+            <a:pPr indent="0" algn="r">
+              <a:lnSpc>
+                <a:spcPct val="100000"/>
+              </a:lnSpc>
+              <a:buNone/>
+              <a:tabLst>
+                <a:tab pos="0" algn="l"/>
+              </a:tabLst>
+            </a:pPr>
+            <a:fld id="{6D88CA0C-F9A8-4025-8729-3A5D6980FDE2}" type="slidenum">
+              <a:rPr lang="sr-Latn-RS" sz="1400" b="0" u="none" strike="noStrike">
+                <a:solidFill>
+                  <a:srgbClr val="000000"/>
+                </a:solidFill>
+                <a:effectLst/>
+                <a:uFillTx/>
+                <a:latin typeface="Times New Roman"/>
+              </a:rPr>
+              <a:t>&lt;number&gt;</a:t>
             </a:fld>
+            <a:endParaRPr lang="sr-Latn-RS" sz="1400" b="0" u="none" strike="noStrike">
+              <a:solidFill>
+                <a:srgbClr val="000000"/>
+              </a:solidFill>
+              <a:effectLst/>
+              <a:uFillTx/>
+              <a:latin typeface="Times New Roman"/>
+            </a:endParaRPr>
           </a:p>
         </p:txBody>
       </p:sp>
       <p:sp>
         <p:nvSpPr>
-          <p:cNvPr id="5" name="PlaceHolder 4"/>
+          <p:cNvPr id="20" name="PlaceHolder 4"/>
           <p:cNvSpPr>
             <a:spLocks noGrp="1"/>
           </p:cNvSpPr>
           <p:nvPr>
-            <p:ph type="dt" idx="1"/>
+            <p:ph type="dt" idx="12"/>
           </p:nvPr>
         </p:nvSpPr>
-        <p:spPr/>
+        <p:spPr>
+          <a:xfrm>
+            <a:off x="504000" y="5165280"/>
+            <a:ext cx="2347920" cy="390240"/>
+          </a:xfrm>
+          <a:prstGeom prst="rect">
+            <a:avLst/>
+          </a:prstGeom>
+          <a:noFill/>
+          <a:ln w="0">
+            <a:noFill/>
+          </a:ln>
+        </p:spPr>
         <p:txBody>
-          <a:bodyPr/>
-          <a:p>
-            <a:r>
-              <a:rPr lang="sr-Latn-RS"/>
-              <a:t/>
-            </a:r>
+          <a:bodyPr lIns="0" tIns="0" rIns="0" bIns="0" anchor="t">
+            <a:noAutofit/>
+          </a:bodyPr>
+          <a:lstStyle>
+            <a:lvl1pPr indent="0" algn="l">
+              <a:buNone/>
+              <a:defRPr lang="sr-Latn-RS" sz="1400" b="0" u="none" strike="noStrike">
+                <a:solidFill>
+                  <a:srgbClr val="000000"/>
+                </a:solidFill>
+                <a:effectLst/>
+                <a:uFillTx/>
+                <a:latin typeface="Times New Roman"/>
+              </a:defRPr>
+            </a:lvl1pPr>
+          </a:lstStyle>
+          <a:p>
+            <a:pPr indent="0" algn="l">
+              <a:buNone/>
+            </a:pPr>
+            <a:r>
+              <a:rPr lang="sr-Latn-RS" sz="1400" b="0" u="none" strike="noStrike">
+                <a:solidFill>
+                  <a:srgbClr val="000000"/>
+                </a:solidFill>
+                <a:effectLst/>
+                <a:uFillTx/>
+                <a:latin typeface="Times New Roman"/>
+              </a:rPr>
+              <a:t>&lt;date/time&gt;</a:t>
+            </a:r>
+            <a:endParaRPr lang="sr-Latn-RS" sz="1400" b="0" u="none" strike="noStrike">
+              <a:solidFill>
+                <a:srgbClr val="000000"/>
+              </a:solidFill>
+              <a:effectLst/>
+              <a:uFillTx/>
+              <a:latin typeface="Times New Roman"/>
+            </a:endParaRPr>
+          </a:p>
+        </p:txBody>
+      </p:sp>
+      <p:sp>
+        <p:nvSpPr>
+          <p:cNvPr id="21" name="PlaceHolder 5"/>
+          <p:cNvSpPr>
+            <a:spLocks noGrp="1"/>
+          </p:cNvSpPr>
+          <p:nvPr>
+            <p:ph type="body"/>
+          </p:nvPr>
+        </p:nvSpPr>
+        <p:spPr>
+          <a:xfrm>
+            <a:off x="504000" y="1326600"/>
+            <a:ext cx="9072000" cy="3288600"/>
+          </a:xfrm>
+          <a:prstGeom prst="rect">
+            <a:avLst/>
+          </a:prstGeom>
+          <a:noFill/>
+          <a:ln w="0">
+            <a:noFill/>
+          </a:ln>
+        </p:spPr>
+        <p:txBody>
+          <a:bodyPr lIns="0" tIns="0" rIns="0" bIns="0" anchor="t">
+            <a:normAutofit/>
+          </a:bodyPr>
+          <a:lstStyle>
+            <a:lvl1pPr algn="l">
+              <a:spcBef>
+                <a:spcPts val="1417"/>
+              </a:spcBef>
+              <a:buClr>
+                <a:srgbClr val="000000"/>
+              </a:buClr>
+              <a:buSzPct val="45000"/>
+              <a:buFont typeface="Wingdings" charset="2"/>
+              <a:buChar char=""/>
+              <a:defRPr lang="sr-Latn-RS" sz="3200" b="0" u="none" strike="noStrike">
+                <a:solidFill>
+                  <a:srgbClr val="000000"/>
+                </a:solidFill>
+                <a:effectLst/>
+                <a:uFillTx/>
+                <a:latin typeface="Arial"/>
+              </a:defRPr>
+            </a:lvl1pPr>
+            <a:lvl2pPr lvl="1" algn="l">
+              <a:spcBef>
+                <a:spcPts val="1134"/>
+              </a:spcBef>
+              <a:buClr>
+                <a:srgbClr val="000000"/>
+              </a:buClr>
+              <a:buSzPct val="75000"/>
+              <a:buFont typeface="Symbol" charset="2"/>
+              <a:buChar char=""/>
+              <a:defRPr lang="sr-Latn-RS" sz="2800" b="0" u="none" strike="noStrike">
+                <a:solidFill>
+                  <a:srgbClr val="000000"/>
+                </a:solidFill>
+                <a:effectLst/>
+                <a:uFillTx/>
+                <a:latin typeface="Arial"/>
+              </a:defRPr>
+            </a:lvl2pPr>
+            <a:lvl3pPr lvl="2" algn="l">
+              <a:spcBef>
+                <a:spcPts val="850"/>
+              </a:spcBef>
+              <a:buClr>
+                <a:srgbClr val="000000"/>
+              </a:buClr>
+              <a:buSzPct val="45000"/>
+              <a:buFont typeface="Wingdings" charset="2"/>
+              <a:buChar char=""/>
+              <a:defRPr lang="sr-Latn-RS" sz="2400" b="0" u="none" strike="noStrike">
+                <a:solidFill>
+                  <a:srgbClr val="000000"/>
+                </a:solidFill>
+                <a:effectLst/>
+                <a:uFillTx/>
+                <a:latin typeface="Arial"/>
+              </a:defRPr>
+            </a:lvl3pPr>
+            <a:lvl4pPr lvl="3" algn="l">
+              <a:spcBef>
+                <a:spcPts val="567"/>
+              </a:spcBef>
+              <a:buClr>
+                <a:srgbClr val="000000"/>
+              </a:buClr>
+              <a:buSzPct val="75000"/>
+              <a:buFont typeface="Symbol" charset="2"/>
+              <a:buChar char=""/>
+              <a:defRPr lang="sr-Latn-RS" sz="2000" b="0" u="none" strike="noStrike">
+                <a:solidFill>
+                  <a:srgbClr val="000000"/>
+                </a:solidFill>
+                <a:effectLst/>
+                <a:uFillTx/>
+                <a:latin typeface="Arial"/>
+              </a:defRPr>
+            </a:lvl4pPr>
+            <a:lvl5pPr lvl="4" algn="l">
+              <a:spcBef>
+                <a:spcPts val="283"/>
+              </a:spcBef>
+              <a:buClr>
+                <a:srgbClr val="000000"/>
+              </a:buClr>
+              <a:buSzPct val="45000"/>
+              <a:buFont typeface="Wingdings" charset="2"/>
+              <a:buChar char=""/>
+              <a:defRPr lang="sr-Latn-RS" sz="2000" b="0" u="none" strike="noStrike">
+                <a:solidFill>
+                  <a:srgbClr val="000000"/>
+                </a:solidFill>
+                <a:effectLst/>
+                <a:uFillTx/>
+                <a:latin typeface="Arial"/>
+              </a:defRPr>
+            </a:lvl5pPr>
+            <a:lvl6pPr lvl="5" algn="l">
+              <a:spcBef>
+                <a:spcPts val="283"/>
+              </a:spcBef>
+              <a:buClr>
+                <a:srgbClr val="000000"/>
+              </a:buClr>
+              <a:buSzPct val="45000"/>
+              <a:buFont typeface="Wingdings" charset="2"/>
+              <a:buChar char=""/>
+              <a:defRPr lang="sr-Latn-RS" sz="2000" b="0" u="none" strike="noStrike">
+                <a:solidFill>
+                  <a:srgbClr val="000000"/>
+                </a:solidFill>
+                <a:effectLst/>
+                <a:uFillTx/>
+                <a:latin typeface="Arial"/>
+              </a:defRPr>
+            </a:lvl6pPr>
+            <a:lvl7pPr lvl="6" algn="l">
+              <a:spcBef>
+                <a:spcPts val="283"/>
+              </a:spcBef>
+              <a:buClr>
+                <a:srgbClr val="000000"/>
+              </a:buClr>
+              <a:buSzPct val="45000"/>
+              <a:buFont typeface="Wingdings" charset="2"/>
+              <a:buChar char=""/>
+              <a:defRPr lang="sr-Latn-RS" sz="2000" b="0" u="none" strike="noStrike">
+                <a:solidFill>
+                  <a:srgbClr val="000000"/>
+                </a:solidFill>
+                <a:effectLst/>
+                <a:uFillTx/>
+                <a:latin typeface="Arial"/>
+              </a:defRPr>
+            </a:lvl7pPr>
+          </a:lstStyle>
+          <a:p>
+            <a:pPr indent="-324000" algn="l">
+              <a:spcBef>
+                <a:spcPts val="1417"/>
+              </a:spcBef>
+              <a:buClr>
+                <a:srgbClr val="000000"/>
+              </a:buClr>
+              <a:buSzPct val="45000"/>
+              <a:buFont typeface="Wingdings" charset="2"/>
+              <a:buChar char=""/>
+            </a:pPr>
+            <a:r>
+              <a:rPr lang="sr-Latn-RS" sz="3200" b="0" u="none" strike="noStrike">
+                <a:solidFill>
+                  <a:srgbClr val="000000"/>
+                </a:solidFill>
+                <a:effectLst/>
+                <a:uFillTx/>
+                <a:latin typeface="Arial"/>
+              </a:rPr>
+              <a:t>Click to edit the outline text format</a:t>
+            </a:r>
+            <a:endParaRPr lang="sr-Latn-RS" sz="3200" b="0" u="none" strike="noStrike">
+              <a:solidFill>
+                <a:srgbClr val="000000"/>
+              </a:solidFill>
+              <a:effectLst/>
+              <a:uFillTx/>
+              <a:latin typeface="Arial"/>
+            </a:endParaRPr>
+          </a:p>
+          <a:p>
+            <a:pPr marL="864000" lvl="1" indent="-324000" algn="l">
+              <a:spcBef>
+                <a:spcPts val="1134"/>
+              </a:spcBef>
+              <a:buClr>
+                <a:srgbClr val="000000"/>
+              </a:buClr>
+              <a:buSzPct val="75000"/>
+              <a:buFont typeface="Symbol" charset="2"/>
+              <a:buChar char=""/>
+            </a:pPr>
+            <a:r>
+              <a:rPr lang="sr-Latn-RS" sz="2800" b="0" u="none" strike="noStrike">
+                <a:solidFill>
+                  <a:srgbClr val="000000"/>
+                </a:solidFill>
+                <a:effectLst/>
+                <a:uFillTx/>
+                <a:latin typeface="Arial"/>
+              </a:rPr>
+              <a:t>Second Outline Level</a:t>
+            </a:r>
+            <a:endParaRPr lang="sr-Latn-RS" sz="2800" b="0" u="none" strike="noStrike">
+              <a:solidFill>
+                <a:srgbClr val="000000"/>
+              </a:solidFill>
+              <a:effectLst/>
+              <a:uFillTx/>
+              <a:latin typeface="Arial"/>
+            </a:endParaRPr>
+          </a:p>
+          <a:p>
+            <a:pPr marL="1296000" lvl="2" indent="-288000" algn="l">
+              <a:spcBef>
+                <a:spcPts val="850"/>
+              </a:spcBef>
+              <a:buClr>
+                <a:srgbClr val="000000"/>
+              </a:buClr>
+              <a:buSzPct val="45000"/>
+              <a:buFont typeface="Wingdings" charset="2"/>
+              <a:buChar char=""/>
+            </a:pPr>
+            <a:r>
+              <a:rPr lang="sr-Latn-RS" sz="2400" b="0" u="none" strike="noStrike">
+                <a:solidFill>
+                  <a:srgbClr val="000000"/>
+                </a:solidFill>
+                <a:effectLst/>
+                <a:uFillTx/>
+                <a:latin typeface="Arial"/>
+              </a:rPr>
+              <a:t>Third Outline Level</a:t>
+            </a:r>
+            <a:endParaRPr lang="sr-Latn-RS" sz="2400" b="0" u="none" strike="noStrike">
+              <a:solidFill>
+                <a:srgbClr val="000000"/>
+              </a:solidFill>
+              <a:effectLst/>
+              <a:uFillTx/>
+              <a:latin typeface="Arial"/>
+            </a:endParaRPr>
+          </a:p>
+          <a:p>
+            <a:pPr marL="1728000" lvl="3" indent="-216000" algn="l">
+              <a:spcBef>
+                <a:spcPts val="567"/>
+              </a:spcBef>
+              <a:buClr>
+                <a:srgbClr val="000000"/>
+              </a:buClr>
+              <a:buSzPct val="75000"/>
+              <a:buFont typeface="Symbol" charset="2"/>
+              <a:buChar char=""/>
+            </a:pPr>
+            <a:r>
+              <a:rPr lang="sr-Latn-RS" sz="2000" b="0" u="none" strike="noStrike">
+                <a:solidFill>
+                  <a:srgbClr val="000000"/>
+                </a:solidFill>
+                <a:effectLst/>
+                <a:uFillTx/>
+                <a:latin typeface="Arial"/>
+              </a:rPr>
+              <a:t>Fourth Outline Level</a:t>
+            </a:r>
+            <a:endParaRPr lang="sr-Latn-RS" sz="2000" b="0" u="none" strike="noStrike">
+              <a:solidFill>
+                <a:srgbClr val="000000"/>
+              </a:solidFill>
+              <a:effectLst/>
+              <a:uFillTx/>
+              <a:latin typeface="Arial"/>
+            </a:endParaRPr>
+          </a:p>
+          <a:p>
+            <a:pPr marL="2160000" lvl="4" indent="-216000" algn="l">
+              <a:spcBef>
+                <a:spcPts val="283"/>
+              </a:spcBef>
+              <a:buClr>
+                <a:srgbClr val="000000"/>
+              </a:buClr>
+              <a:buSzPct val="45000"/>
+              <a:buFont typeface="Wingdings" charset="2"/>
+              <a:buChar char=""/>
+            </a:pPr>
+            <a:r>
+              <a:rPr lang="sr-Latn-RS" sz="2000" b="0" u="none" strike="noStrike">
+                <a:solidFill>
+                  <a:srgbClr val="000000"/>
+                </a:solidFill>
+                <a:effectLst/>
+                <a:uFillTx/>
+                <a:latin typeface="Arial"/>
+              </a:rPr>
+              <a:t>Fifth Outline Level</a:t>
+            </a:r>
+            <a:endParaRPr lang="sr-Latn-RS" sz="2000" b="0" u="none" strike="noStrike">
+              <a:solidFill>
+                <a:srgbClr val="000000"/>
+              </a:solidFill>
+              <a:effectLst/>
+              <a:uFillTx/>
+              <a:latin typeface="Arial"/>
+            </a:endParaRPr>
+          </a:p>
+          <a:p>
+            <a:pPr marL="2592000" lvl="5" indent="-216000" algn="l">
+              <a:spcBef>
+                <a:spcPts val="283"/>
+              </a:spcBef>
+              <a:buClr>
+                <a:srgbClr val="000000"/>
+              </a:buClr>
+              <a:buSzPct val="45000"/>
+              <a:buFont typeface="Wingdings" charset="2"/>
+              <a:buChar char=""/>
+            </a:pPr>
+            <a:r>
+              <a:rPr lang="sr-Latn-RS" sz="2000" b="0" u="none" strike="noStrike">
+                <a:solidFill>
+                  <a:srgbClr val="000000"/>
+                </a:solidFill>
+                <a:effectLst/>
+                <a:uFillTx/>
+                <a:latin typeface="Arial"/>
+              </a:rPr>
+              <a:t>Sixth Outline Level</a:t>
+            </a:r>
+            <a:endParaRPr lang="sr-Latn-RS" sz="2000" b="0" u="none" strike="noStrike">
+              <a:solidFill>
+                <a:srgbClr val="000000"/>
+              </a:solidFill>
+              <a:effectLst/>
+              <a:uFillTx/>
+              <a:latin typeface="Arial"/>
+            </a:endParaRPr>
+          </a:p>
+          <a:p>
+            <a:pPr marL="3024000" lvl="6" indent="-216000" algn="l">
+              <a:spcBef>
+                <a:spcPts val="283"/>
+              </a:spcBef>
+              <a:buClr>
+                <a:srgbClr val="000000"/>
+              </a:buClr>
+              <a:buSzPct val="45000"/>
+              <a:buFont typeface="Wingdings" charset="2"/>
+              <a:buChar char=""/>
+            </a:pPr>
+            <a:r>
+              <a:rPr lang="sr-Latn-RS" sz="2000" b="0" u="none" strike="noStrike">
+                <a:solidFill>
+                  <a:srgbClr val="000000"/>
+                </a:solidFill>
+                <a:effectLst/>
+                <a:uFillTx/>
+                <a:latin typeface="Arial"/>
+              </a:rPr>
+              <a:t>Seventh Outline Level</a:t>
+            </a:r>
+            <a:endParaRPr lang="sr-Latn-RS" sz="2000" b="0" u="none" strike="noStrike">
+              <a:solidFill>
+                <a:srgbClr val="000000"/>
+              </a:solidFill>
+              <a:effectLst/>
+              <a:uFillTx/>
+              <a:latin typeface="Arial"/>
+            </a:endParaRPr>
           </a:p>
         </p:txBody>
       </p:sp>
@@ -484,7 +2842,7 @@
 </p:sldLayout>
 </file>
 
-<file path=ppt/slideLayouts/slideLayout4.xml><?xml version="1.0" encoding="utf-8"?>
+<file path=ppt/slideLayouts/slideLayout5.xml><?xml version="1.0" encoding="utf-8"?>
 <p:sldLayout xmlns:a="http://schemas.openxmlformats.org/drawingml/2006/main" xmlns:p="http://schemas.openxmlformats.org/presentationml/2006/main" xmlns:r="http://schemas.openxmlformats.org/officeDocument/2006/relationships" xmlns:p14="http://schemas.microsoft.com/office/powerpoint/2010/main" xmlns:p15="http://schemas.microsoft.com/office/powerpoint/2012/main" xmlns:mc="http://schemas.openxmlformats.org/markup-compatibility/2006" type="blank" preserve="1">
   <p:cSld name="Default 5">
     <p:spTree>
@@ -508,7 +2866,7 @@
             <a:spLocks noGrp="1"/>
           </p:cNvSpPr>
           <p:nvPr>
-            <p:ph type="ftr" idx="4"/>
+            <p:ph type="ftr" idx="13"/>
           </p:nvPr>
         </p:nvSpPr>
         <p:spPr/>
@@ -528,14 +2886,14 @@
             <a:spLocks noGrp="1"/>
           </p:cNvSpPr>
           <p:nvPr>
-            <p:ph type="sldNum" idx="5"/>
+            <p:ph type="sldNum" idx="14"/>
           </p:nvPr>
         </p:nvSpPr>
         <p:spPr/>
         <p:txBody>
           <a:bodyPr/>
           <a:p>
-            <a:fld id="{87E10CE9-BC0C-4FA5-A196-542F240B917F}" type="slidenum">
+            <a:fld id="{B3C6827E-5D42-4C5F-ADEE-25FEBC22B55C}" type="slidenum">
               <a:t>&lt;#&gt;</a:t>
             </a:fld>
           </a:p>
@@ -548,7 +2906,7 @@
             <a:spLocks noGrp="1"/>
           </p:cNvSpPr>
           <p:nvPr>
-            <p:ph type="dt" idx="6"/>
+            <p:ph type="dt" idx="15"/>
           </p:nvPr>
         </p:nvSpPr>
         <p:spPr/>
@@ -584,658 +2942,6 @@
           <a:chExt cx="0" cy="0"/>
         </a:xfrm>
       </p:grpSpPr>
-      <p:sp>
-        <p:nvSpPr>
-          <p:cNvPr id="2" name="PlaceHolder 1"/>
-          <p:cNvSpPr>
-            <a:spLocks noGrp="1"/>
-          </p:cNvSpPr>
-          <p:nvPr>
-            <p:ph type="title"/>
-          </p:nvPr>
-        </p:nvSpPr>
-        <p:spPr>
-          <a:xfrm>
-            <a:off x="504000" y="226080"/>
-            <a:ext cx="9071640" cy="946440"/>
-          </a:xfrm>
-          <a:prstGeom prst="rect">
-            <a:avLst/>
-          </a:prstGeom>
-          <a:noFill/>
-          <a:ln w="0">
-            <a:noFill/>
-          </a:ln>
-        </p:spPr>
-        <p:txBody>
-          <a:bodyPr lIns="0" tIns="0" rIns="0" bIns="0" anchor="ctr">
-            <a:noAutofit/>
-          </a:bodyPr>
-          <a:lstStyle>
-            <a:lvl1pPr indent="0" algn="ctr">
-              <a:buNone/>
-              <a:defRPr lang="sr-Latn-RS" sz="4400" b="0" u="none" strike="noStrike">
-                <a:solidFill>
-                  <a:srgbClr val="000000"/>
-                </a:solidFill>
-                <a:effectLst/>
-                <a:uFillTx/>
-                <a:latin typeface="Arial"/>
-              </a:defRPr>
-            </a:lvl1pPr>
-          </a:lstStyle>
-          <a:p>
-            <a:pPr indent="0" algn="ctr">
-              <a:buNone/>
-            </a:pPr>
-            <a:r>
-              <a:rPr lang="sr-Latn-RS" sz="4400" b="0" u="none" strike="noStrike">
-                <a:solidFill>
-                  <a:srgbClr val="000000"/>
-                </a:solidFill>
-                <a:effectLst/>
-                <a:uFillTx/>
-                <a:latin typeface="Arial"/>
-              </a:rPr>
-              <a:t>Click to edit the title text format</a:t>
-            </a:r>
-            <a:endParaRPr lang="sr-Latn-RS" sz="4400" b="0" u="none" strike="noStrike">
-              <a:solidFill>
-                <a:srgbClr val="000000"/>
-              </a:solidFill>
-              <a:effectLst/>
-              <a:uFillTx/>
-              <a:latin typeface="Arial"/>
-            </a:endParaRPr>
-          </a:p>
-        </p:txBody>
-      </p:sp>
-      <p:sp>
-        <p:nvSpPr>
-          <p:cNvPr id="3" name="PlaceHolder 2"/>
-          <p:cNvSpPr>
-            <a:spLocks noGrp="1"/>
-          </p:cNvSpPr>
-          <p:nvPr>
-            <p:ph type="body"/>
-          </p:nvPr>
-        </p:nvSpPr>
-        <p:spPr>
-          <a:xfrm>
-            <a:off x="504000" y="1326600"/>
-            <a:ext cx="9071640" cy="3288240"/>
-          </a:xfrm>
-          <a:prstGeom prst="rect">
-            <a:avLst/>
-          </a:prstGeom>
-          <a:noFill/>
-          <a:ln w="0">
-            <a:noFill/>
-          </a:ln>
-        </p:spPr>
-        <p:txBody>
-          <a:bodyPr lIns="0" tIns="0" rIns="0" bIns="0" anchor="t">
-            <a:normAutofit/>
-          </a:bodyPr>
-          <a:lstStyle>
-            <a:lvl1pPr algn="l">
-              <a:spcBef>
-                <a:spcPts val="1417"/>
-              </a:spcBef>
-              <a:buClr>
-                <a:srgbClr val="000000"/>
-              </a:buClr>
-              <a:buSzPct val="45000"/>
-              <a:buFont typeface="Wingdings" charset="2"/>
-              <a:buChar char=""/>
-              <a:defRPr lang="sr-Latn-RS" sz="3200" b="0" u="none" strike="noStrike">
-                <a:solidFill>
-                  <a:srgbClr val="000000"/>
-                </a:solidFill>
-                <a:effectLst/>
-                <a:uFillTx/>
-                <a:latin typeface="Arial"/>
-              </a:defRPr>
-            </a:lvl1pPr>
-            <a:lvl2pPr lvl="1" algn="l">
-              <a:spcBef>
-                <a:spcPts val="1134"/>
-              </a:spcBef>
-              <a:buClr>
-                <a:srgbClr val="000000"/>
-              </a:buClr>
-              <a:buSzPct val="75000"/>
-              <a:buFont typeface="Symbol" charset="2"/>
-              <a:buChar char=""/>
-              <a:defRPr lang="sr-Latn-RS" sz="2800" b="0" u="none" strike="noStrike">
-                <a:solidFill>
-                  <a:srgbClr val="000000"/>
-                </a:solidFill>
-                <a:effectLst/>
-                <a:uFillTx/>
-                <a:latin typeface="Arial"/>
-              </a:defRPr>
-            </a:lvl2pPr>
-            <a:lvl3pPr lvl="2" algn="l">
-              <a:spcBef>
-                <a:spcPts val="850"/>
-              </a:spcBef>
-              <a:buClr>
-                <a:srgbClr val="000000"/>
-              </a:buClr>
-              <a:buSzPct val="45000"/>
-              <a:buFont typeface="Wingdings" charset="2"/>
-              <a:buChar char=""/>
-              <a:defRPr lang="sr-Latn-RS" sz="2400" b="0" u="none" strike="noStrike">
-                <a:solidFill>
-                  <a:srgbClr val="000000"/>
-                </a:solidFill>
-                <a:effectLst/>
-                <a:uFillTx/>
-                <a:latin typeface="Arial"/>
-              </a:defRPr>
-            </a:lvl3pPr>
-            <a:lvl4pPr lvl="3" algn="l">
-              <a:spcBef>
-                <a:spcPts val="567"/>
-              </a:spcBef>
-              <a:buClr>
-                <a:srgbClr val="000000"/>
-              </a:buClr>
-              <a:buSzPct val="75000"/>
-              <a:buFont typeface="Symbol" charset="2"/>
-              <a:buChar char=""/>
-              <a:defRPr lang="sr-Latn-RS" sz="2000" b="0" u="none" strike="noStrike">
-                <a:solidFill>
-                  <a:srgbClr val="000000"/>
-                </a:solidFill>
-                <a:effectLst/>
-                <a:uFillTx/>
-                <a:latin typeface="Arial"/>
-              </a:defRPr>
-            </a:lvl4pPr>
-            <a:lvl5pPr lvl="4" algn="l">
-              <a:spcBef>
-                <a:spcPts val="283"/>
-              </a:spcBef>
-              <a:buClr>
-                <a:srgbClr val="000000"/>
-              </a:buClr>
-              <a:buSzPct val="45000"/>
-              <a:buFont typeface="Wingdings" charset="2"/>
-              <a:buChar char=""/>
-              <a:defRPr lang="sr-Latn-RS" sz="2000" b="0" u="none" strike="noStrike">
-                <a:solidFill>
-                  <a:srgbClr val="000000"/>
-                </a:solidFill>
-                <a:effectLst/>
-                <a:uFillTx/>
-                <a:latin typeface="Arial"/>
-              </a:defRPr>
-            </a:lvl5pPr>
-            <a:lvl6pPr lvl="5" algn="l">
-              <a:spcBef>
-                <a:spcPts val="283"/>
-              </a:spcBef>
-              <a:buClr>
-                <a:srgbClr val="000000"/>
-              </a:buClr>
-              <a:buSzPct val="45000"/>
-              <a:buFont typeface="Wingdings" charset="2"/>
-              <a:buChar char=""/>
-              <a:defRPr lang="sr-Latn-RS" sz="2000" b="0" u="none" strike="noStrike">
-                <a:solidFill>
-                  <a:srgbClr val="000000"/>
-                </a:solidFill>
-                <a:effectLst/>
-                <a:uFillTx/>
-                <a:latin typeface="Arial"/>
-              </a:defRPr>
-            </a:lvl6pPr>
-            <a:lvl7pPr lvl="6" algn="l">
-              <a:spcBef>
-                <a:spcPts val="283"/>
-              </a:spcBef>
-              <a:buClr>
-                <a:srgbClr val="000000"/>
-              </a:buClr>
-              <a:buSzPct val="45000"/>
-              <a:buFont typeface="Wingdings" charset="2"/>
-              <a:buChar char=""/>
-              <a:defRPr lang="sr-Latn-RS" sz="2000" b="0" u="none" strike="noStrike">
-                <a:solidFill>
-                  <a:srgbClr val="000000"/>
-                </a:solidFill>
-                <a:effectLst/>
-                <a:uFillTx/>
-                <a:latin typeface="Arial"/>
-              </a:defRPr>
-            </a:lvl7pPr>
-          </a:lstStyle>
-          <a:p>
-            <a:pPr marL="432000" indent="-324000" algn="l">
-              <a:spcBef>
-                <a:spcPts val="1417"/>
-              </a:spcBef>
-              <a:buClr>
-                <a:srgbClr val="000000"/>
-              </a:buClr>
-              <a:buSzPct val="45000"/>
-              <a:buFont typeface="Wingdings" charset="2"/>
-              <a:buChar char=""/>
-            </a:pPr>
-            <a:r>
-              <a:rPr lang="sr-Latn-RS" sz="3200" b="0" u="none" strike="noStrike">
-                <a:solidFill>
-                  <a:srgbClr val="000000"/>
-                </a:solidFill>
-                <a:effectLst/>
-                <a:uFillTx/>
-                <a:latin typeface="Arial"/>
-              </a:rPr>
-              <a:t>Click to edit the outline text format</a:t>
-            </a:r>
-            <a:endParaRPr lang="sr-Latn-RS" sz="3200" b="0" u="none" strike="noStrike">
-              <a:solidFill>
-                <a:srgbClr val="000000"/>
-              </a:solidFill>
-              <a:effectLst/>
-              <a:uFillTx/>
-              <a:latin typeface="Arial"/>
-            </a:endParaRPr>
-          </a:p>
-          <a:p>
-            <a:pPr marL="864000" lvl="1" indent="-324000" algn="l">
-              <a:spcBef>
-                <a:spcPts val="1134"/>
-              </a:spcBef>
-              <a:buClr>
-                <a:srgbClr val="000000"/>
-              </a:buClr>
-              <a:buSzPct val="75000"/>
-              <a:buFont typeface="Symbol" charset="2"/>
-              <a:buChar char=""/>
-            </a:pPr>
-            <a:r>
-              <a:rPr lang="sr-Latn-RS" sz="2800" b="0" u="none" strike="noStrike">
-                <a:solidFill>
-                  <a:srgbClr val="000000"/>
-                </a:solidFill>
-                <a:effectLst/>
-                <a:uFillTx/>
-                <a:latin typeface="Arial"/>
-              </a:rPr>
-              <a:t>Second Outline Level</a:t>
-            </a:r>
-            <a:endParaRPr lang="sr-Latn-RS" sz="2800" b="0" u="none" strike="noStrike">
-              <a:solidFill>
-                <a:srgbClr val="000000"/>
-              </a:solidFill>
-              <a:effectLst/>
-              <a:uFillTx/>
-              <a:latin typeface="Arial"/>
-            </a:endParaRPr>
-          </a:p>
-          <a:p>
-            <a:pPr marL="1296000" lvl="2" indent="-288000" algn="l">
-              <a:spcBef>
-                <a:spcPts val="850"/>
-              </a:spcBef>
-              <a:buClr>
-                <a:srgbClr val="000000"/>
-              </a:buClr>
-              <a:buSzPct val="45000"/>
-              <a:buFont typeface="Wingdings" charset="2"/>
-              <a:buChar char=""/>
-            </a:pPr>
-            <a:r>
-              <a:rPr lang="sr-Latn-RS" sz="2400" b="0" u="none" strike="noStrike">
-                <a:solidFill>
-                  <a:srgbClr val="000000"/>
-                </a:solidFill>
-                <a:effectLst/>
-                <a:uFillTx/>
-                <a:latin typeface="Arial"/>
-              </a:rPr>
-              <a:t>Third Outline Level</a:t>
-            </a:r>
-            <a:endParaRPr lang="sr-Latn-RS" sz="2400" b="0" u="none" strike="noStrike">
-              <a:solidFill>
-                <a:srgbClr val="000000"/>
-              </a:solidFill>
-              <a:effectLst/>
-              <a:uFillTx/>
-              <a:latin typeface="Arial"/>
-            </a:endParaRPr>
-          </a:p>
-          <a:p>
-            <a:pPr marL="1728000" lvl="3" indent="-216000" algn="l">
-              <a:spcBef>
-                <a:spcPts val="567"/>
-              </a:spcBef>
-              <a:buClr>
-                <a:srgbClr val="000000"/>
-              </a:buClr>
-              <a:buSzPct val="75000"/>
-              <a:buFont typeface="Symbol" charset="2"/>
-              <a:buChar char=""/>
-            </a:pPr>
-            <a:r>
-              <a:rPr lang="sr-Latn-RS" sz="2000" b="0" u="none" strike="noStrike">
-                <a:solidFill>
-                  <a:srgbClr val="000000"/>
-                </a:solidFill>
-                <a:effectLst/>
-                <a:uFillTx/>
-                <a:latin typeface="Arial"/>
-              </a:rPr>
-              <a:t>Fourth Outline Level</a:t>
-            </a:r>
-            <a:endParaRPr lang="sr-Latn-RS" sz="2000" b="0" u="none" strike="noStrike">
-              <a:solidFill>
-                <a:srgbClr val="000000"/>
-              </a:solidFill>
-              <a:effectLst/>
-              <a:uFillTx/>
-              <a:latin typeface="Arial"/>
-            </a:endParaRPr>
-          </a:p>
-          <a:p>
-            <a:pPr marL="2160000" lvl="4" indent="-216000" algn="l">
-              <a:spcBef>
-                <a:spcPts val="283"/>
-              </a:spcBef>
-              <a:buClr>
-                <a:srgbClr val="000000"/>
-              </a:buClr>
-              <a:buSzPct val="45000"/>
-              <a:buFont typeface="Wingdings" charset="2"/>
-              <a:buChar char=""/>
-            </a:pPr>
-            <a:r>
-              <a:rPr lang="sr-Latn-RS" sz="2000" b="0" u="none" strike="noStrike">
-                <a:solidFill>
-                  <a:srgbClr val="000000"/>
-                </a:solidFill>
-                <a:effectLst/>
-                <a:uFillTx/>
-                <a:latin typeface="Arial"/>
-              </a:rPr>
-              <a:t>Fifth Outline Level</a:t>
-            </a:r>
-            <a:endParaRPr lang="sr-Latn-RS" sz="2000" b="0" u="none" strike="noStrike">
-              <a:solidFill>
-                <a:srgbClr val="000000"/>
-              </a:solidFill>
-              <a:effectLst/>
-              <a:uFillTx/>
-              <a:latin typeface="Arial"/>
-            </a:endParaRPr>
-          </a:p>
-          <a:p>
-            <a:pPr marL="2592000" lvl="5" indent="-216000" algn="l">
-              <a:spcBef>
-                <a:spcPts val="283"/>
-              </a:spcBef>
-              <a:buClr>
-                <a:srgbClr val="000000"/>
-              </a:buClr>
-              <a:buSzPct val="45000"/>
-              <a:buFont typeface="Wingdings" charset="2"/>
-              <a:buChar char=""/>
-            </a:pPr>
-            <a:r>
-              <a:rPr lang="sr-Latn-RS" sz="2000" b="0" u="none" strike="noStrike">
-                <a:solidFill>
-                  <a:srgbClr val="000000"/>
-                </a:solidFill>
-                <a:effectLst/>
-                <a:uFillTx/>
-                <a:latin typeface="Arial"/>
-              </a:rPr>
-              <a:t>Sixth Outline Level</a:t>
-            </a:r>
-            <a:endParaRPr lang="sr-Latn-RS" sz="2000" b="0" u="none" strike="noStrike">
-              <a:solidFill>
-                <a:srgbClr val="000000"/>
-              </a:solidFill>
-              <a:effectLst/>
-              <a:uFillTx/>
-              <a:latin typeface="Arial"/>
-            </a:endParaRPr>
-          </a:p>
-          <a:p>
-            <a:pPr marL="3024000" lvl="6" indent="-216000" algn="l">
-              <a:spcBef>
-                <a:spcPts val="283"/>
-              </a:spcBef>
-              <a:buClr>
-                <a:srgbClr val="000000"/>
-              </a:buClr>
-              <a:buSzPct val="45000"/>
-              <a:buFont typeface="Wingdings" charset="2"/>
-              <a:buChar char=""/>
-            </a:pPr>
-            <a:r>
-              <a:rPr lang="sr-Latn-RS" sz="2000" b="0" u="none" strike="noStrike">
-                <a:solidFill>
-                  <a:srgbClr val="000000"/>
-                </a:solidFill>
-                <a:effectLst/>
-                <a:uFillTx/>
-                <a:latin typeface="Arial"/>
-              </a:rPr>
-              <a:t>Seventh Outline Level</a:t>
-            </a:r>
-            <a:endParaRPr lang="sr-Latn-RS" sz="2000" b="0" u="none" strike="noStrike">
-              <a:solidFill>
-                <a:srgbClr val="000000"/>
-              </a:solidFill>
-              <a:effectLst/>
-              <a:uFillTx/>
-              <a:latin typeface="Arial"/>
-            </a:endParaRPr>
-          </a:p>
-        </p:txBody>
-      </p:sp>
-      <p:sp>
-        <p:nvSpPr>
-          <p:cNvPr id="4" name="PlaceHolder 3"/>
-          <p:cNvSpPr>
-            <a:spLocks noGrp="1"/>
-          </p:cNvSpPr>
-          <p:nvPr>
-            <p:ph type="dt" idx="1"/>
-          </p:nvPr>
-        </p:nvSpPr>
-        <p:spPr>
-          <a:xfrm>
-            <a:off x="504000" y="5165280"/>
-            <a:ext cx="2348280" cy="390600"/>
-          </a:xfrm>
-          <a:prstGeom prst="rect">
-            <a:avLst/>
-          </a:prstGeom>
-          <a:noFill/>
-          <a:ln w="0">
-            <a:noFill/>
-          </a:ln>
-        </p:spPr>
-        <p:txBody>
-          <a:bodyPr lIns="0" tIns="0" rIns="0" bIns="0" anchor="t">
-            <a:noAutofit/>
-          </a:bodyPr>
-          <a:lstStyle>
-            <a:lvl1pPr indent="0" algn="l">
-              <a:buNone/>
-              <a:defRPr lang="sr-Latn-RS" sz="1400" b="0" u="none" strike="noStrike">
-                <a:solidFill>
-                  <a:srgbClr val="000000"/>
-                </a:solidFill>
-                <a:effectLst/>
-                <a:uFillTx/>
-                <a:latin typeface="Times New Roman"/>
-              </a:defRPr>
-            </a:lvl1pPr>
-          </a:lstStyle>
-          <a:p>
-            <a:pPr indent="0" algn="l">
-              <a:buNone/>
-            </a:pPr>
-            <a:r>
-              <a:rPr lang="sr-Latn-RS" sz="1400" b="0" u="none" strike="noStrike">
-                <a:solidFill>
-                  <a:srgbClr val="000000"/>
-                </a:solidFill>
-                <a:effectLst/>
-                <a:uFillTx/>
-                <a:latin typeface="Times New Roman"/>
-              </a:rPr>
-              <a:t>&lt;date/time&gt;</a:t>
-            </a:r>
-            <a:endParaRPr lang="sr-Latn-RS" sz="1400" b="0" u="none" strike="noStrike">
-              <a:solidFill>
-                <a:srgbClr val="000000"/>
-              </a:solidFill>
-              <a:effectLst/>
-              <a:uFillTx/>
-              <a:latin typeface="Times New Roman"/>
-            </a:endParaRPr>
-          </a:p>
-        </p:txBody>
-      </p:sp>
-      <p:sp>
-        <p:nvSpPr>
-          <p:cNvPr id="5" name="PlaceHolder 4"/>
-          <p:cNvSpPr>
-            <a:spLocks noGrp="1"/>
-          </p:cNvSpPr>
-          <p:nvPr>
-            <p:ph type="ftr" idx="2"/>
-          </p:nvPr>
-        </p:nvSpPr>
-        <p:spPr>
-          <a:xfrm>
-            <a:off x="3447360" y="5165280"/>
-            <a:ext cx="3195000" cy="390600"/>
-          </a:xfrm>
-          <a:prstGeom prst="rect">
-            <a:avLst/>
-          </a:prstGeom>
-          <a:noFill/>
-          <a:ln w="0">
-            <a:noFill/>
-          </a:ln>
-        </p:spPr>
-        <p:txBody>
-          <a:bodyPr lIns="0" tIns="0" rIns="0" bIns="0" anchor="t">
-            <a:noAutofit/>
-          </a:bodyPr>
-          <a:lstStyle>
-            <a:lvl1pPr indent="0" algn="ctr">
-              <a:buNone/>
-              <a:defRPr lang="sr-Latn-RS" sz="1400" b="0" u="none" strike="noStrike">
-                <a:solidFill>
-                  <a:srgbClr val="000000"/>
-                </a:solidFill>
-                <a:effectLst/>
-                <a:uFillTx/>
-                <a:latin typeface="Times New Roman"/>
-              </a:defRPr>
-            </a:lvl1pPr>
-          </a:lstStyle>
-          <a:p>
-            <a:pPr indent="0" algn="ctr">
-              <a:buNone/>
-            </a:pPr>
-            <a:r>
-              <a:rPr lang="sr-Latn-RS" sz="1400" b="0" u="none" strike="noStrike">
-                <a:solidFill>
-                  <a:srgbClr val="000000"/>
-                </a:solidFill>
-                <a:effectLst/>
-                <a:uFillTx/>
-                <a:latin typeface="Times New Roman"/>
-              </a:rPr>
-              <a:t>&lt;footer&gt;</a:t>
-            </a:r>
-            <a:endParaRPr lang="sr-Latn-RS" sz="1400" b="0" u="none" strike="noStrike">
-              <a:solidFill>
-                <a:srgbClr val="000000"/>
-              </a:solidFill>
-              <a:effectLst/>
-              <a:uFillTx/>
-              <a:latin typeface="Times New Roman"/>
-            </a:endParaRPr>
-          </a:p>
-        </p:txBody>
-      </p:sp>
-      <p:sp>
-        <p:nvSpPr>
-          <p:cNvPr id="6" name="PlaceHolder 5"/>
-          <p:cNvSpPr>
-            <a:spLocks noGrp="1"/>
-          </p:cNvSpPr>
-          <p:nvPr>
-            <p:ph type="sldNum" idx="3"/>
-          </p:nvPr>
-        </p:nvSpPr>
-        <p:spPr>
-          <a:xfrm>
-            <a:off x="7227360" y="5165280"/>
-            <a:ext cx="2348280" cy="390600"/>
-          </a:xfrm>
-          <a:prstGeom prst="rect">
-            <a:avLst/>
-          </a:prstGeom>
-          <a:noFill/>
-          <a:ln w="0">
-            <a:noFill/>
-          </a:ln>
-        </p:spPr>
-        <p:txBody>
-          <a:bodyPr lIns="0" tIns="0" rIns="0" bIns="0" anchor="t">
-            <a:noAutofit/>
-          </a:bodyPr>
-          <a:lstStyle>
-            <a:lvl1pPr indent="0" algn="r">
-              <a:buNone/>
-              <a:defRPr lang="sr-Latn-RS" sz="1400" b="0" u="none" strike="noStrike">
-                <a:solidFill>
-                  <a:srgbClr val="000000"/>
-                </a:solidFill>
-                <a:effectLst/>
-                <a:uFillTx/>
-                <a:latin typeface="Times New Roman"/>
-              </a:defRPr>
-            </a:lvl1pPr>
-          </a:lstStyle>
-          <a:p>
-            <a:pPr indent="0" algn="r">
-              <a:buNone/>
-            </a:pPr>
-            <a:fld id="{8BF8083D-FE81-436A-958B-9AC735C94F91}" type="slidenum">
-              <a:rPr lang="sr-Latn-RS" sz="1400" b="0" u="none" strike="noStrike">
-                <a:solidFill>
-                  <a:srgbClr val="000000"/>
-                </a:solidFill>
-                <a:effectLst/>
-                <a:uFillTx/>
-                <a:latin typeface="Times New Roman"/>
-              </a:rPr>
-              <a:t>&lt;number&gt;</a:t>
-            </a:fld>
-            <a:endParaRPr lang="sr-Latn-RS" sz="1400" b="0" u="none" strike="noStrike">
-              <a:solidFill>
-                <a:srgbClr val="000000"/>
-              </a:solidFill>
-              <a:effectLst/>
-              <a:uFillTx/>
-              <a:latin typeface="Times New Roman"/>
-            </a:endParaRPr>
-          </a:p>
-        </p:txBody>
-      </p:sp>
     </p:spTree>
   </p:cSld>
   <p:clrMap bg1="lt1" tx1="dk1" bg2="lt2" tx2="dk2" accent1="accent1" accent2="accent2" accent3="accent3" accent4="accent4" accent5="accent5" accent6="accent6" hlink="hlink" folHlink="folHlink"/>
@@ -1243,11 +2949,12 @@
     <p:sldLayoutId id="2147483649" r:id="rId2"/>
     <p:sldLayoutId id="2147483650" r:id="rId3"/>
     <p:sldLayoutId id="2147483651" r:id="rId4"/>
+    <p:sldLayoutId id="2147483652" r:id="rId5"/>
   </p:sldLayoutIdLst>
 </p:sldMaster>
 </file>
 
-<file path=ppt/slideMasters/slideMaster2.xml><?xml version="1.0" encoding="utf-8"?>
+<file path=ppt/slideMasters/slideMaster4.xml><?xml version="1.0" encoding="utf-8"?>
 <p:sldMaster xmlns:a="http://schemas.openxmlformats.org/drawingml/2006/main" xmlns:p="http://schemas.openxmlformats.org/presentationml/2006/main" xmlns:r="http://schemas.openxmlformats.org/officeDocument/2006/relationships" xmlns:p14="http://schemas.microsoft.com/office/powerpoint/2010/main" xmlns:p15="http://schemas.microsoft.com/office/powerpoint/2012/main" xmlns:mc="http://schemas.openxmlformats.org/markup-compatibility/2006">
   <p:cSld>
     <p:spTree>
@@ -1266,18 +2973,18 @@
       </p:grpSpPr>
       <p:sp>
         <p:nvSpPr>
-          <p:cNvPr id="12" name="PlaceHolder 1"/>
+          <p:cNvPr id="22" name="PlaceHolder 1"/>
           <p:cNvSpPr>
             <a:spLocks noGrp="1"/>
           </p:cNvSpPr>
           <p:nvPr>
-            <p:ph type="ftr" idx="4"/>
+            <p:ph type="ftr" idx="13"/>
           </p:nvPr>
         </p:nvSpPr>
         <p:spPr>
           <a:xfrm>
             <a:off x="3446640" y="5163840"/>
-            <a:ext cx="3191760" cy="388080"/>
+            <a:ext cx="3191400" cy="387720"/>
           </a:xfrm>
           <a:prstGeom prst="rect">
             <a:avLst/>
@@ -1344,18 +3051,18 @@
       </p:sp>
       <p:sp>
         <p:nvSpPr>
-          <p:cNvPr id="13" name="PlaceHolder 2"/>
+          <p:cNvPr id="23" name="PlaceHolder 2"/>
           <p:cNvSpPr>
             <a:spLocks noGrp="1"/>
           </p:cNvSpPr>
           <p:nvPr>
-            <p:ph type="sldNum" idx="5"/>
+            <p:ph type="sldNum" idx="14"/>
           </p:nvPr>
         </p:nvSpPr>
         <p:spPr>
           <a:xfrm>
             <a:off x="7225920" y="5163840"/>
-            <a:ext cx="2345760" cy="388080"/>
+            <a:ext cx="2345400" cy="387720"/>
           </a:xfrm>
           <a:prstGeom prst="rect">
             <a:avLst/>
@@ -1398,7 +3105,7 @@
                 <a:tab pos="0" algn="l"/>
               </a:tabLst>
             </a:pPr>
-            <a:fld id="{F461A3F7-A398-46CB-A1A8-17BDD1025FF0}" type="slidenum">
+            <a:fld id="{05BC6248-4A91-49FF-9887-721DE0730EB3}" type="slidenum">
               <a:rPr lang="sr-Latn-RS" sz="1400" b="0" u="none" strike="noStrike">
                 <a:solidFill>
                   <a:srgbClr val="000000"/>
@@ -1422,18 +3129,18 @@
       </p:sp>
       <p:sp>
         <p:nvSpPr>
-          <p:cNvPr id="14" name="PlaceHolder 3"/>
+          <p:cNvPr id="24" name="PlaceHolder 3"/>
           <p:cNvSpPr>
             <a:spLocks noGrp="1"/>
           </p:cNvSpPr>
           <p:nvPr>
-            <p:ph type="dt" idx="6"/>
+            <p:ph type="dt" idx="15"/>
           </p:nvPr>
         </p:nvSpPr>
         <p:spPr>
           <a:xfrm>
             <a:off x="503280" y="5163840"/>
-            <a:ext cx="2345760" cy="388080"/>
+            <a:ext cx="2345400" cy="387720"/>
           </a:xfrm>
           <a:prstGeom prst="rect">
             <a:avLst/>
@@ -1449,13 +3156,7 @@
           </a:bodyPr>
           <a:lstStyle>
             <a:lvl1pPr indent="0" algn="l">
-              <a:lnSpc>
-                <a:spcPct val="100000"/>
-              </a:lnSpc>
               <a:buNone/>
-              <a:tabLst>
-                <a:tab pos="0" algn="l"/>
-              </a:tabLst>
               <a:defRPr lang="sr-Latn-RS" sz="1400" b="0" u="none" strike="noStrike">
                 <a:solidFill>
                   <a:srgbClr val="000000"/>
@@ -1468,13 +3169,7 @@
           </a:lstStyle>
           <a:p>
             <a:pPr indent="0" algn="l">
-              <a:lnSpc>
-                <a:spcPct val="100000"/>
-              </a:lnSpc>
               <a:buNone/>
-              <a:tabLst>
-                <a:tab pos="0" algn="l"/>
-              </a:tabLst>
             </a:pPr>
             <a:r>
               <a:rPr lang="sr-Latn-RS" sz="1400" b="0" u="none" strike="noStrike">
@@ -1500,7 +3195,7 @@
       </p:sp>
       <p:sp>
         <p:nvSpPr>
-          <p:cNvPr id="15" name="PlaceHolder 4"/>
+          <p:cNvPr id="25" name="PlaceHolder 4"/>
           <p:cNvSpPr>
             <a:spLocks noGrp="1"/>
           </p:cNvSpPr>
@@ -1511,7 +3206,7 @@
         <p:spPr>
           <a:xfrm>
             <a:off x="504000" y="226080"/>
-            <a:ext cx="9071640" cy="946440"/>
+            <a:ext cx="9072000" cy="946440"/>
           </a:xfrm>
           <a:prstGeom prst="rect">
             <a:avLst/>
@@ -1528,6 +3223,9 @@
           <a:lstStyle>
             <a:lvl1pPr indent="0" algn="ctr">
               <a:buNone/>
+              <a:tabLst>
+                <a:tab pos="0" algn="l"/>
+              </a:tabLst>
               <a:defRPr lang="sr-Latn-RS" sz="4400" b="0" u="none" strike="noStrike">
                 <a:solidFill>
                   <a:srgbClr val="000000"/>
@@ -1541,6 +3239,9 @@
           <a:p>
             <a:pPr indent="0" algn="ctr">
               <a:buNone/>
+              <a:tabLst>
+                <a:tab pos="0" algn="l"/>
+              </a:tabLst>
             </a:pPr>
             <a:r>
               <a:rPr lang="sr-Latn-RS" sz="4400" b="0" u="none" strike="noStrike">
@@ -1566,7 +3267,7 @@
       </p:sp>
       <p:sp>
         <p:nvSpPr>
-          <p:cNvPr id="16" name="PlaceHolder 5"/>
+          <p:cNvPr id="26" name="PlaceHolder 5"/>
           <p:cNvSpPr>
             <a:spLocks noGrp="1"/>
           </p:cNvSpPr>
@@ -1577,7 +3278,7 @@
         <p:spPr>
           <a:xfrm>
             <a:off x="504000" y="1326600"/>
-            <a:ext cx="9071640" cy="3288240"/>
+            <a:ext cx="9072000" cy="3288600"/>
           </a:xfrm>
           <a:prstGeom prst="rect">
             <a:avLst/>
@@ -1727,7 +3428,7 @@
             </a:lvl7pPr>
           </a:lstStyle>
           <a:p>
-            <a:pPr marL="432000" indent="-324000" algn="l">
+            <a:pPr indent="-324000" algn="l">
               <a:spcBef>
                 <a:spcPts val="1417"/>
               </a:spcBef>
@@ -1956,7 +3657,7 @@
   </p:cSld>
   <p:clrMap bg1="lt1" tx1="dk1" bg2="lt2" tx2="dk2" accent1="accent1" accent2="accent2" accent3="accent3" accent4="accent4" accent5="accent5" accent6="accent6" hlink="hlink" folHlink="folHlink"/>
   <p:sldLayoutIdLst>
-    <p:sldLayoutId id="2147483653" r:id="rId2"/>
+    <p:sldLayoutId id="2147483654" r:id="rId2"/>
   </p:sldLayoutIdLst>
 </p:sldMaster>
 </file>
@@ -1980,14 +3681,14 @@
       </p:grpSpPr>
       <p:sp>
         <p:nvSpPr>
-          <p:cNvPr id="17" name="PlaceHolder 1"/>
+          <p:cNvPr id="27" name="PlaceHolder 1"/>
           <p:cNvSpPr/>
           <p:nvPr/>
         </p:nvSpPr>
         <p:spPr>
           <a:xfrm>
             <a:off x="743040" y="406800"/>
-            <a:ext cx="8923320" cy="1968840"/>
+            <a:ext cx="8922960" cy="1968480"/>
           </a:xfrm>
           <a:prstGeom prst="rect">
             <a:avLst/>
@@ -2041,14 +3742,14 @@
       </p:sp>
       <p:sp>
         <p:nvSpPr>
-          <p:cNvPr id="18" name="PlaceHolder 2"/>
+          <p:cNvPr id="28" name="PlaceHolder 2"/>
           <p:cNvSpPr/>
           <p:nvPr/>
         </p:nvSpPr>
         <p:spPr>
           <a:xfrm>
             <a:off x="892080" y="3719160"/>
-            <a:ext cx="8179200" cy="1335240"/>
+            <a:ext cx="8178840" cy="1334880"/>
           </a:xfrm>
           <a:prstGeom prst="rect">
             <a:avLst/>
@@ -2162,7 +3863,7 @@
       </p:sp>
       <p:pic>
         <p:nvPicPr>
-          <p:cNvPr id="19" name="Picture 2"/>
+          <p:cNvPr id="29" name="Picture 2"/>
           <p:cNvPicPr/>
           <p:nvPr/>
         </p:nvPicPr>
@@ -2173,7 +3874,7 @@
         <p:spPr>
           <a:xfrm>
             <a:off x="4463640" y="2380680"/>
-            <a:ext cx="1175040" cy="1444320"/>
+            <a:ext cx="1174680" cy="1443960"/>
           </a:xfrm>
           <a:prstGeom prst="rect">
             <a:avLst/>
@@ -2186,14 +3887,14 @@
       </p:pic>
       <p:sp>
         <p:nvSpPr>
-          <p:cNvPr id="20" name="Rectangle 2"/>
+          <p:cNvPr id="30" name="Rectangle 2"/>
           <p:cNvSpPr/>
           <p:nvPr/>
         </p:nvSpPr>
         <p:spPr>
           <a:xfrm>
             <a:off x="8278560" y="5003280"/>
-            <a:ext cx="569880" cy="455400"/>
+            <a:ext cx="721800" cy="455400"/>
           </a:xfrm>
           <a:prstGeom prst="rect">
             <a:avLst/>
@@ -2219,7 +3920,7 @@
                 <a:spcPct val="100000"/>
               </a:lnSpc>
             </a:pPr>
-            <a:fld id="{0A9E809C-3140-478D-B2C1-95D5997EBC2D}" type="slidenum">
+            <a:fld id="{4846B208-FF22-408C-B929-1A55D9822E01}" type="slidenum">
               <a:rPr lang="sr-Latn-RS" sz="2400" b="0" u="none" strike="noStrike">
                 <a:solidFill>
                   <a:srgbClr val="000000"/>
@@ -2243,7 +3944,7 @@
               </a:rPr>
               <a:t>/</a:t>
             </a:r>
-            <a:fld id="{AD774405-ADB6-421F-97E8-71E743A61812}" type="slidecount">
+            <a:fld id="{B87F4F79-41EE-4842-AFF9-457EE446CB3B}" type="slidecount">
               <a:rPr lang="sr-Latn-RS" sz="2400" b="0" u="none" strike="noStrike">
                 <a:solidFill>
                   <a:srgbClr val="000000"/>
@@ -2253,7 +3954,7 @@
                 <a:latin typeface="Times New Roman"/>
                 <a:ea typeface="DejaVu Sans"/>
               </a:rPr>
-              <a:t>10</a:t>
+              <a:t>14</a:t>
             </a:fld>
             <a:endParaRPr lang="sr-Latn-RS" sz="2400" b="0" u="none" strike="noStrike">
               <a:solidFill>
@@ -2298,14 +3999,1139 @@
       </p:grpSpPr>
       <p:sp>
         <p:nvSpPr>
-          <p:cNvPr id="37" name="PlaceHolder 3"/>
+          <p:cNvPr id="56" name="PlaceHolder 1"/>
+          <p:cNvSpPr>
+            <a:spLocks noGrp="1"/>
+          </p:cNvSpPr>
+          <p:nvPr>
+            <p:ph type="title"/>
+          </p:nvPr>
+        </p:nvSpPr>
+        <p:spPr>
+          <a:xfrm>
+            <a:off x="504000" y="363600"/>
+            <a:ext cx="9071280" cy="670680"/>
+          </a:xfrm>
+          <a:prstGeom prst="rect">
+            <a:avLst/>
+          </a:prstGeom>
+          <a:noFill/>
+          <a:ln w="0">
+            <a:noFill/>
+          </a:ln>
+        </p:spPr>
+        <p:txBody>
+          <a:bodyPr lIns="0" tIns="0" rIns="0" bIns="0" anchor="ctr">
+            <a:spAutoFit/>
+          </a:bodyPr>
+          <a:p>
+            <a:pPr indent="0" algn="ctr">
+              <a:buNone/>
+              <a:tabLst>
+                <a:tab pos="0" algn="l"/>
+              </a:tabLst>
+            </a:pPr>
+            <a:r>
+              <a:rPr lang="sr-Latn-RS" sz="3200" b="0" u="none" strike="noStrike">
+                <a:solidFill>
+                  <a:srgbClr val="000000"/>
+                </a:solidFill>
+                <a:effectLst/>
+                <a:uFillTx/>
+                <a:latin typeface="Arial"/>
+              </a:rPr>
+              <a:t>Како представити негативне бројеве?</a:t>
+            </a:r>
+            <a:endParaRPr lang="sr-Latn-RS" sz="3200" b="0" u="none" strike="noStrike">
+              <a:solidFill>
+                <a:srgbClr val="000000"/>
+              </a:solidFill>
+              <a:effectLst/>
+              <a:uFillTx/>
+              <a:latin typeface="Arial"/>
+            </a:endParaRPr>
+          </a:p>
+        </p:txBody>
+      </p:sp>
+      <p:sp>
+        <p:nvSpPr>
+          <p:cNvPr id="57" name="PlaceHolder 2"/>
+          <p:cNvSpPr>
+            <a:spLocks noGrp="1"/>
+          </p:cNvSpPr>
+          <p:nvPr>
+            <p:ph/>
+          </p:nvPr>
+        </p:nvSpPr>
+        <p:spPr>
+          <a:xfrm>
+            <a:off x="504000" y="1326600"/>
+            <a:ext cx="9071280" cy="3287880"/>
+          </a:xfrm>
+          <a:prstGeom prst="rect">
+            <a:avLst/>
+          </a:prstGeom>
+          <a:noFill/>
+          <a:ln w="0">
+            <a:noFill/>
+          </a:ln>
+        </p:spPr>
+        <p:txBody>
+          <a:bodyPr lIns="0" tIns="0" rIns="0" bIns="0" anchor="t">
+            <a:normAutofit/>
+          </a:bodyPr>
+          <a:p>
+            <a:pPr indent="-324000" algn="l">
+              <a:spcBef>
+                <a:spcPts val="1417"/>
+              </a:spcBef>
+              <a:buClr>
+                <a:srgbClr val="000000"/>
+              </a:buClr>
+              <a:buSzPct val="45000"/>
+              <a:buFont typeface="Wingdings" charset="2"/>
+              <a:buChar char=""/>
+            </a:pPr>
+            <a:r>
+              <a:rPr lang="sr-Latn-RS" sz="2300" b="0" u="none" strike="noStrike">
+                <a:solidFill>
+                  <a:srgbClr val="000000"/>
+                </a:solidFill>
+                <a:effectLst/>
+                <a:uFillTx/>
+                <a:latin typeface="Arial"/>
+              </a:rPr>
+              <a:t> Хемијске концентрације не могу бити негативне</a:t>
+            </a:r>
+            <a:endParaRPr lang="sr-Latn-RS" sz="2300" b="0" u="none" strike="noStrike">
+              <a:solidFill>
+                <a:srgbClr val="000000"/>
+              </a:solidFill>
+              <a:effectLst/>
+              <a:uFillTx/>
+              <a:latin typeface="Arial"/>
+            </a:endParaRPr>
+          </a:p>
+          <a:p>
+            <a:pPr indent="-324000" algn="l">
+              <a:spcBef>
+                <a:spcPts val="1417"/>
+              </a:spcBef>
+              <a:buClr>
+                <a:srgbClr val="000000"/>
+              </a:buClr>
+              <a:buSzPct val="45000"/>
+              <a:buFont typeface="Wingdings" charset="2"/>
+              <a:buChar char=""/>
+            </a:pPr>
+            <a:r>
+              <a:rPr lang="sr-Latn-RS" sz="2300" b="0" u="none" strike="noStrike">
+                <a:solidFill>
+                  <a:srgbClr val="000000"/>
+                </a:solidFill>
+                <a:effectLst/>
+                <a:uFillTx/>
+                <a:latin typeface="Arial"/>
+              </a:rPr>
+              <a:t> Решење је Dual rail систем:</a:t>
+            </a:r>
+            <a:endParaRPr lang="sr-Latn-RS" sz="2300" b="0" u="none" strike="noStrike">
+              <a:solidFill>
+                <a:srgbClr val="000000"/>
+              </a:solidFill>
+              <a:effectLst/>
+              <a:uFillTx/>
+              <a:latin typeface="Arial"/>
+            </a:endParaRPr>
+          </a:p>
+          <a:p>
+            <a:pPr marL="864000" lvl="1" indent="-324000" algn="l">
+              <a:spcBef>
+                <a:spcPts val="1134"/>
+              </a:spcBef>
+              <a:buClr>
+                <a:srgbClr val="000000"/>
+              </a:buClr>
+              <a:buSzPct val="75000"/>
+              <a:buFont typeface="Symbol" charset="2"/>
+              <a:buChar char=""/>
+            </a:pPr>
+            <a:r>
+              <a:rPr lang="sr-Latn-RS" sz="1800" b="0" u="none" strike="noStrike">
+                <a:solidFill>
+                  <a:srgbClr val="000000"/>
+                </a:solidFill>
+                <a:effectLst/>
+                <a:uFillTx/>
+                <a:latin typeface="Arial"/>
+              </a:rPr>
+              <a:t>Вектори се деле на позитивне и негативне</a:t>
+            </a:r>
+            <a:endParaRPr lang="sr-Latn-RS" sz="1800" b="0" u="none" strike="noStrike">
+              <a:solidFill>
+                <a:srgbClr val="000000"/>
+              </a:solidFill>
+              <a:effectLst/>
+              <a:uFillTx/>
+              <a:latin typeface="Arial"/>
+            </a:endParaRPr>
+          </a:p>
+          <a:p>
+            <a:pPr marL="864000" lvl="1" indent="-324000" algn="l">
+              <a:spcBef>
+                <a:spcPts val="1134"/>
+              </a:spcBef>
+              <a:buClr>
+                <a:srgbClr val="000000"/>
+              </a:buClr>
+              <a:buSzPct val="75000"/>
+              <a:buFont typeface="Symbol" charset="2"/>
+              <a:buChar char=""/>
+            </a:pPr>
+            <a:r>
+              <a:rPr lang="sr-Latn-RS" sz="1800" b="0" u="none" strike="noStrike">
+                <a:solidFill>
+                  <a:srgbClr val="000000"/>
+                </a:solidFill>
+                <a:effectLst/>
+                <a:uFillTx/>
+                <a:latin typeface="Arial"/>
+              </a:rPr>
+              <a:t>Позитивни и негативни прорачуни се одвијају у два паралелна хемијска канала</a:t>
+            </a:r>
+            <a:endParaRPr lang="sr-Latn-RS" sz="1800" b="0" u="none" strike="noStrike">
+              <a:solidFill>
+                <a:srgbClr val="000000"/>
+              </a:solidFill>
+              <a:effectLst/>
+              <a:uFillTx/>
+              <a:latin typeface="Arial"/>
+            </a:endParaRPr>
+          </a:p>
+          <a:p>
+            <a:pPr marL="864000" lvl="1" indent="-324000" algn="l">
+              <a:spcBef>
+                <a:spcPts val="1134"/>
+              </a:spcBef>
+              <a:buClr>
+                <a:srgbClr val="000000"/>
+              </a:buClr>
+              <a:buSzPct val="75000"/>
+              <a:buFont typeface="Symbol" charset="2"/>
+              <a:buChar char=""/>
+            </a:pPr>
+            <a:r>
+              <a:rPr lang="sr-Latn-RS" sz="1800" b="0" u="none" strike="noStrike">
+                <a:solidFill>
+                  <a:srgbClr val="000000"/>
+                </a:solidFill>
+                <a:effectLst/>
+                <a:uFillTx/>
+                <a:latin typeface="Arial"/>
+              </a:rPr>
+              <a:t>Резултат се на крају одузима електронским сензором</a:t>
+            </a:r>
+            <a:endParaRPr lang="sr-Latn-RS" sz="1800" b="0" u="none" strike="noStrike">
+              <a:solidFill>
+                <a:srgbClr val="000000"/>
+              </a:solidFill>
+              <a:effectLst/>
+              <a:uFillTx/>
+              <a:latin typeface="Arial"/>
+            </a:endParaRPr>
+          </a:p>
+        </p:txBody>
+      </p:sp>
+      <p:sp>
+        <p:nvSpPr>
+          <p:cNvPr id="58" name="Rectangle 11"/>
+          <p:cNvSpPr/>
+          <p:nvPr/>
+        </p:nvSpPr>
+        <p:spPr>
+          <a:xfrm>
+            <a:off x="8278560" y="5003640"/>
+            <a:ext cx="875160" cy="455400"/>
+          </a:xfrm>
+          <a:prstGeom prst="rect">
+            <a:avLst/>
+          </a:prstGeom>
+          <a:noFill/>
+          <a:ln w="0">
+            <a:noFill/>
+          </a:ln>
+        </p:spPr>
+        <p:style>
+          <a:lnRef idx="0"/>
+          <a:fillRef idx="0"/>
+          <a:effectRef idx="0"/>
+          <a:fontRef idx="minor"/>
+        </p:style>
+        <p:txBody>
+          <a:bodyPr wrap="none" lIns="90000" tIns="45000" rIns="90000" bIns="45000" anchor="t">
+            <a:spAutoFit/>
+          </a:bodyPr>
+          <a:p>
+            <a:pPr defTabSz="914400">
+              <a:lnSpc>
+                <a:spcPct val="100000"/>
+              </a:lnSpc>
+            </a:pPr>
+            <a:fld id="{33B9309D-4441-4AFF-B1A8-C4311D870936}" type="slidenum">
+              <a:rPr lang="sr-Latn-RS" sz="2400" b="0" u="none" strike="noStrike">
+                <a:solidFill>
+                  <a:srgbClr val="000000"/>
+                </a:solidFill>
+                <a:effectLst/>
+                <a:uFillTx/>
+                <a:latin typeface="Times New Roman"/>
+                <a:ea typeface="DejaVu Sans"/>
+              </a:rPr>
+              <a:t>&lt;number&gt;</a:t>
+            </a:fld>
+            <a:r>
+              <a:rPr lang="sr-Latn-RS" sz="2400" b="0" u="none" strike="noStrike">
+                <a:solidFill>
+                  <a:srgbClr val="000000"/>
+                </a:solidFill>
+                <a:effectLst/>
+                <a:uFillTx/>
+                <a:latin typeface="Times New Roman"/>
+                <a:ea typeface="DejaVu Sans"/>
+              </a:rPr>
+              <a:t>/</a:t>
+            </a:r>
+            <a:fld id="{94B4C7C5-BEA2-431C-B781-96EC057AD3AC}" type="slidecount">
+              <a:rPr lang="sr-Latn-RS" sz="2400" b="0" u="none" strike="noStrike">
+                <a:solidFill>
+                  <a:srgbClr val="000000"/>
+                </a:solidFill>
+                <a:effectLst/>
+                <a:uFillTx/>
+                <a:latin typeface="Times New Roman"/>
+                <a:ea typeface="DejaVu Sans"/>
+              </a:rPr>
+              <a:t>14</a:t>
+            </a:fld>
+            <a:endParaRPr lang="sr-Latn-RS" sz="2400" b="0" u="none" strike="noStrike">
+              <a:solidFill>
+                <a:srgbClr val="000000"/>
+              </a:solidFill>
+              <a:effectLst/>
+              <a:uFillTx/>
+              <a:latin typeface="Arial"/>
+            </a:endParaRPr>
+          </a:p>
+        </p:txBody>
+      </p:sp>
+    </p:spTree>
+  </p:cSld>
+  <mc:AlternateContent>
+    <mc:Choice Requires="p14">
+      <p:transition spd="slow" p14:dur="2000"/>
+    </mc:Choice>
+    <mc:Fallback>
+      <p:transition spd="slow"/>
+    </mc:Fallback>
+  </mc:AlternateContent>
+</p:sld>
+</file>
+
+<file path=ppt/slides/slide11.xml><?xml version="1.0" encoding="utf-8"?>
+<p:sld xmlns:a="http://schemas.openxmlformats.org/drawingml/2006/main" xmlns:p="http://schemas.openxmlformats.org/presentationml/2006/main" xmlns:r="http://schemas.openxmlformats.org/officeDocument/2006/relationships" xmlns:p14="http://schemas.microsoft.com/office/powerpoint/2010/main" xmlns:p15="http://schemas.microsoft.com/office/powerpoint/2012/main" xmlns:mc="http://schemas.openxmlformats.org/markup-compatibility/2006">
+  <p:cSld>
+    <p:spTree>
+      <p:nvGrpSpPr>
+        <p:cNvPr id="1" name=""/>
+        <p:cNvGrpSpPr/>
+        <p:nvPr/>
+      </p:nvGrpSpPr>
+      <p:grpSpPr>
+        <a:xfrm>
+          <a:off x="0" y="0"/>
+          <a:ext cx="0" cy="0"/>
+          <a:chOff x="0" y="0"/>
+          <a:chExt cx="0" cy="0"/>
+        </a:xfrm>
+      </p:grpSpPr>
+      <p:sp>
+        <p:nvSpPr>
+          <p:cNvPr id="59" name="PlaceHolder 1"/>
+          <p:cNvSpPr>
+            <a:spLocks noGrp="1"/>
+          </p:cNvSpPr>
+          <p:nvPr>
+            <p:ph type="title"/>
+          </p:nvPr>
+        </p:nvSpPr>
+        <p:spPr>
+          <a:xfrm>
+            <a:off x="504000" y="363600"/>
+            <a:ext cx="9071280" cy="670680"/>
+          </a:xfrm>
+          <a:prstGeom prst="rect">
+            <a:avLst/>
+          </a:prstGeom>
+          <a:noFill/>
+          <a:ln w="0">
+            <a:noFill/>
+          </a:ln>
+        </p:spPr>
+        <p:txBody>
+          <a:bodyPr lIns="0" tIns="0" rIns="0" bIns="0" anchor="ctr">
+            <a:spAutoFit/>
+          </a:bodyPr>
+          <a:p>
+            <a:pPr indent="0" algn="ctr">
+              <a:buNone/>
+              <a:tabLst>
+                <a:tab pos="0" algn="l"/>
+              </a:tabLst>
+            </a:pPr>
+            <a:r>
+              <a:rPr lang="sr-Latn-RS" sz="3200" b="0" u="none" strike="noStrike">
+                <a:solidFill>
+                  <a:srgbClr val="000000"/>
+                </a:solidFill>
+                <a:effectLst/>
+                <a:uFillTx/>
+                <a:latin typeface="Arial"/>
+              </a:rPr>
+              <a:t>Шта недостаје хамијском чипу?</a:t>
+            </a:r>
+            <a:endParaRPr lang="sr-Latn-RS" sz="3200" b="0" u="none" strike="noStrike">
+              <a:solidFill>
+                <a:srgbClr val="000000"/>
+              </a:solidFill>
+              <a:effectLst/>
+              <a:uFillTx/>
+              <a:latin typeface="Arial"/>
+            </a:endParaRPr>
+          </a:p>
+        </p:txBody>
+      </p:sp>
+      <p:sp>
+        <p:nvSpPr>
+          <p:cNvPr id="60" name="PlaceHolder 2"/>
+          <p:cNvSpPr>
+            <a:spLocks noGrp="1"/>
+          </p:cNvSpPr>
+          <p:nvPr>
+            <p:ph/>
+          </p:nvPr>
+        </p:nvSpPr>
+        <p:spPr>
+          <a:xfrm>
+            <a:off x="504000" y="1326600"/>
+            <a:ext cx="9071280" cy="3287880"/>
+          </a:xfrm>
+          <a:prstGeom prst="rect">
+            <a:avLst/>
+          </a:prstGeom>
+          <a:noFill/>
+          <a:ln w="0">
+            <a:noFill/>
+          </a:ln>
+        </p:spPr>
+        <p:txBody>
+          <a:bodyPr lIns="0" tIns="0" rIns="0" bIns="0" anchor="t">
+            <a:normAutofit/>
+          </a:bodyPr>
+          <a:p>
+            <a:pPr indent="-324000" algn="l">
+              <a:spcBef>
+                <a:spcPts val="1417"/>
+              </a:spcBef>
+              <a:buClr>
+                <a:srgbClr val="000000"/>
+              </a:buClr>
+              <a:buSzPct val="45000"/>
+              <a:buFont typeface="Wingdings" charset="2"/>
+              <a:buChar char=""/>
+            </a:pPr>
+            <a:r>
+              <a:rPr lang="sr-Latn-RS" sz="2300" b="0" u="none" strike="noStrike">
+                <a:solidFill>
+                  <a:srgbClr val="000000"/>
+                </a:solidFill>
+                <a:effectLst/>
+                <a:uFillTx/>
+                <a:latin typeface="Arial"/>
+              </a:rPr>
+              <a:t> Брзина</a:t>
+            </a:r>
+            <a:endParaRPr lang="sr-Latn-RS" sz="2300" b="0" u="none" strike="noStrike">
+              <a:solidFill>
+                <a:srgbClr val="000000"/>
+              </a:solidFill>
+              <a:effectLst/>
+              <a:uFillTx/>
+              <a:latin typeface="Arial"/>
+            </a:endParaRPr>
+          </a:p>
+          <a:p>
+            <a:pPr marL="864000" lvl="1" indent="-324000" algn="l">
+              <a:spcBef>
+                <a:spcPts val="1134"/>
+              </a:spcBef>
+              <a:buClr>
+                <a:srgbClr val="000000"/>
+              </a:buClr>
+              <a:buSzPct val="75000"/>
+              <a:buFont typeface="Symbol" charset="2"/>
+              <a:buChar char=""/>
+            </a:pPr>
+            <a:r>
+              <a:rPr lang="sr-Latn-RS" sz="1800" b="0" u="none" strike="noStrike">
+                <a:solidFill>
+                  <a:srgbClr val="000000"/>
+                </a:solidFill>
+                <a:effectLst/>
+                <a:uFillTx/>
+                <a:latin typeface="Arial"/>
+              </a:rPr>
+              <a:t>Дифузија и хемијске реакције су спори процеси</a:t>
+            </a:r>
+            <a:endParaRPr lang="sr-Latn-RS" sz="1800" b="0" u="none" strike="noStrike">
+              <a:solidFill>
+                <a:srgbClr val="000000"/>
+              </a:solidFill>
+              <a:effectLst/>
+              <a:uFillTx/>
+              <a:latin typeface="Arial"/>
+            </a:endParaRPr>
+          </a:p>
+          <a:p>
+            <a:pPr indent="-324000" algn="l">
+              <a:spcBef>
+                <a:spcPts val="1417"/>
+              </a:spcBef>
+              <a:buClr>
+                <a:srgbClr val="000000"/>
+              </a:buClr>
+              <a:buSzPct val="45000"/>
+              <a:buFont typeface="Wingdings" charset="2"/>
+              <a:buChar char=""/>
+            </a:pPr>
+            <a:r>
+              <a:rPr lang="sr-Latn-RS" sz="2300" b="0" u="none" strike="noStrike">
+                <a:solidFill>
+                  <a:srgbClr val="000000"/>
+                </a:solidFill>
+                <a:effectLst/>
+                <a:uFillTx/>
+                <a:latin typeface="Arial"/>
+              </a:rPr>
+              <a:t> Ресетовање система</a:t>
+            </a:r>
+            <a:endParaRPr lang="sr-Latn-RS" sz="2300" b="0" u="none" strike="noStrike">
+              <a:solidFill>
+                <a:srgbClr val="000000"/>
+              </a:solidFill>
+              <a:effectLst/>
+              <a:uFillTx/>
+              <a:latin typeface="Arial"/>
+            </a:endParaRPr>
+          </a:p>
+          <a:p>
+            <a:pPr marL="864000" lvl="1" indent="-324000" algn="l">
+              <a:spcBef>
+                <a:spcPts val="1134"/>
+              </a:spcBef>
+              <a:buClr>
+                <a:srgbClr val="000000"/>
+              </a:buClr>
+              <a:buSzPct val="75000"/>
+              <a:buFont typeface="Symbol" charset="2"/>
+              <a:buChar char=""/>
+            </a:pPr>
+            <a:r>
+              <a:rPr lang="sr-Latn-RS" sz="1800" b="0" u="none" strike="noStrike">
+                <a:solidFill>
+                  <a:srgbClr val="000000"/>
+                </a:solidFill>
+                <a:effectLst/>
+                <a:uFillTx/>
+                <a:latin typeface="Arial"/>
+              </a:rPr>
+              <a:t>Отпадни производи реакције се накупљају</a:t>
+            </a:r>
+            <a:endParaRPr lang="sr-Latn-RS" sz="1800" b="0" u="none" strike="noStrike">
+              <a:solidFill>
+                <a:srgbClr val="000000"/>
+              </a:solidFill>
+              <a:effectLst/>
+              <a:uFillTx/>
+              <a:latin typeface="Arial"/>
+            </a:endParaRPr>
+          </a:p>
+          <a:p>
+            <a:pPr marL="864000" lvl="1" indent="-324000" algn="l">
+              <a:spcBef>
+                <a:spcPts val="1134"/>
+              </a:spcBef>
+              <a:buClr>
+                <a:srgbClr val="000000"/>
+              </a:buClr>
+              <a:buSzPct val="75000"/>
+              <a:buFont typeface="Symbol" charset="2"/>
+              <a:buChar char=""/>
+            </a:pPr>
+            <a:r>
+              <a:rPr lang="sr-Latn-RS" sz="1800" b="0" u="none" strike="noStrike">
+                <a:solidFill>
+                  <a:srgbClr val="000000"/>
+                </a:solidFill>
+                <a:effectLst/>
+                <a:uFillTx/>
+                <a:latin typeface="Arial"/>
+              </a:rPr>
+              <a:t>Тешко их је вратити у почетно стање без испирања система</a:t>
+            </a:r>
+            <a:endParaRPr lang="sr-Latn-RS" sz="1800" b="0" u="none" strike="noStrike">
+              <a:solidFill>
+                <a:srgbClr val="000000"/>
+              </a:solidFill>
+              <a:effectLst/>
+              <a:uFillTx/>
+              <a:latin typeface="Arial"/>
+            </a:endParaRPr>
+          </a:p>
+          <a:p>
+            <a:pPr indent="-324000" algn="l">
+              <a:spcBef>
+                <a:spcPts val="1417"/>
+              </a:spcBef>
+              <a:buClr>
+                <a:srgbClr val="000000"/>
+              </a:buClr>
+              <a:buSzPct val="45000"/>
+              <a:buFont typeface="Wingdings" charset="2"/>
+              <a:buChar char=""/>
+            </a:pPr>
+            <a:r>
+              <a:rPr lang="sr-Latn-RS" sz="2300" b="0" u="none" strike="noStrike">
+                <a:solidFill>
+                  <a:srgbClr val="000000"/>
+                </a:solidFill>
+                <a:effectLst/>
+                <a:uFillTx/>
+                <a:latin typeface="Arial"/>
+              </a:rPr>
+              <a:t> Прецизност </a:t>
+            </a:r>
+            <a:endParaRPr lang="sr-Latn-RS" sz="2300" b="0" u="none" strike="noStrike">
+              <a:solidFill>
+                <a:srgbClr val="000000"/>
+              </a:solidFill>
+              <a:effectLst/>
+              <a:uFillTx/>
+              <a:latin typeface="Arial"/>
+            </a:endParaRPr>
+          </a:p>
+          <a:p>
+            <a:pPr marL="864000" lvl="1" indent="-324000" algn="l">
+              <a:spcBef>
+                <a:spcPts val="1134"/>
+              </a:spcBef>
+              <a:buClr>
+                <a:srgbClr val="000000"/>
+              </a:buClr>
+              <a:buSzPct val="75000"/>
+              <a:buFont typeface="Symbol" charset="2"/>
+              <a:buChar char=""/>
+            </a:pPr>
+            <a:r>
+              <a:rPr lang="sr-Latn-RS" sz="1800" b="0" u="none" strike="noStrike">
+                <a:solidFill>
+                  <a:srgbClr val="000000"/>
+                </a:solidFill>
+                <a:effectLst/>
+                <a:uFillTx/>
+                <a:latin typeface="Arial"/>
+              </a:rPr>
+              <a:t>Аналогна природа значи да се подаци губе услед термалног шума</a:t>
+            </a:r>
+            <a:endParaRPr lang="sr-Latn-RS" sz="1800" b="0" u="none" strike="noStrike">
+              <a:solidFill>
+                <a:srgbClr val="000000"/>
+              </a:solidFill>
+              <a:effectLst/>
+              <a:uFillTx/>
+              <a:latin typeface="Arial"/>
+            </a:endParaRPr>
+          </a:p>
+        </p:txBody>
+      </p:sp>
+      <p:sp>
+        <p:nvSpPr>
+          <p:cNvPr id="61" name="Rectangle 12"/>
+          <p:cNvSpPr/>
+          <p:nvPr/>
+        </p:nvSpPr>
+        <p:spPr>
+          <a:xfrm>
+            <a:off x="8278560" y="5003640"/>
+            <a:ext cx="863640" cy="455400"/>
+          </a:xfrm>
+          <a:prstGeom prst="rect">
+            <a:avLst/>
+          </a:prstGeom>
+          <a:noFill/>
+          <a:ln w="0">
+            <a:noFill/>
+          </a:ln>
+        </p:spPr>
+        <p:style>
+          <a:lnRef idx="0"/>
+          <a:fillRef idx="0"/>
+          <a:effectRef idx="0"/>
+          <a:fontRef idx="minor"/>
+        </p:style>
+        <p:txBody>
+          <a:bodyPr wrap="none" lIns="90000" tIns="45000" rIns="90000" bIns="45000" anchor="t">
+            <a:spAutoFit/>
+          </a:bodyPr>
+          <a:p>
+            <a:pPr defTabSz="914400">
+              <a:lnSpc>
+                <a:spcPct val="100000"/>
+              </a:lnSpc>
+            </a:pPr>
+            <a:fld id="{1D42EEC4-5A94-49BA-89F4-BFB0A708780B}" type="slidenum">
+              <a:rPr lang="sr-Latn-RS" sz="2400" b="0" u="none" strike="noStrike">
+                <a:solidFill>
+                  <a:srgbClr val="000000"/>
+                </a:solidFill>
+                <a:effectLst/>
+                <a:uFillTx/>
+                <a:latin typeface="Times New Roman"/>
+                <a:ea typeface="DejaVu Sans"/>
+              </a:rPr>
+              <a:t>&lt;number&gt;</a:t>
+            </a:fld>
+            <a:r>
+              <a:rPr lang="sr-Latn-RS" sz="2400" b="0" u="none" strike="noStrike">
+                <a:solidFill>
+                  <a:srgbClr val="000000"/>
+                </a:solidFill>
+                <a:effectLst/>
+                <a:uFillTx/>
+                <a:latin typeface="Times New Roman"/>
+                <a:ea typeface="DejaVu Sans"/>
+              </a:rPr>
+              <a:t>/</a:t>
+            </a:r>
+            <a:fld id="{1F642A27-1853-4704-9C4D-E52CD6547D37}" type="slidecount">
+              <a:rPr lang="sr-Latn-RS" sz="2400" b="0" u="none" strike="noStrike">
+                <a:solidFill>
+                  <a:srgbClr val="000000"/>
+                </a:solidFill>
+                <a:effectLst/>
+                <a:uFillTx/>
+                <a:latin typeface="Times New Roman"/>
+                <a:ea typeface="DejaVu Sans"/>
+              </a:rPr>
+              <a:t>14</a:t>
+            </a:fld>
+            <a:endParaRPr lang="sr-Latn-RS" sz="2400" b="0" u="none" strike="noStrike">
+              <a:solidFill>
+                <a:srgbClr val="000000"/>
+              </a:solidFill>
+              <a:effectLst/>
+              <a:uFillTx/>
+              <a:latin typeface="Arial"/>
+            </a:endParaRPr>
+          </a:p>
+        </p:txBody>
+      </p:sp>
+    </p:spTree>
+  </p:cSld>
+  <mc:AlternateContent>
+    <mc:Choice Requires="p14">
+      <p:transition spd="slow" p14:dur="2000"/>
+    </mc:Choice>
+    <mc:Fallback>
+      <p:transition spd="slow"/>
+    </mc:Fallback>
+  </mc:AlternateContent>
+</p:sld>
+</file>
+
+<file path=ppt/slides/slide12.xml><?xml version="1.0" encoding="utf-8"?>
+<p:sld xmlns:a="http://schemas.openxmlformats.org/drawingml/2006/main" xmlns:p="http://schemas.openxmlformats.org/presentationml/2006/main" xmlns:r="http://schemas.openxmlformats.org/officeDocument/2006/relationships" xmlns:p14="http://schemas.microsoft.com/office/powerpoint/2010/main" xmlns:p15="http://schemas.microsoft.com/office/powerpoint/2012/main" xmlns:mc="http://schemas.openxmlformats.org/markup-compatibility/2006">
+  <p:cSld>
+    <p:spTree>
+      <p:nvGrpSpPr>
+        <p:cNvPr id="1" name=""/>
+        <p:cNvGrpSpPr/>
+        <p:nvPr/>
+      </p:nvGrpSpPr>
+      <p:grpSpPr>
+        <a:xfrm>
+          <a:off x="0" y="0"/>
+          <a:ext cx="0" cy="0"/>
+          <a:chOff x="0" y="0"/>
+          <a:chExt cx="0" cy="0"/>
+        </a:xfrm>
+      </p:grpSpPr>
+      <p:pic>
+        <p:nvPicPr>
+          <p:cNvPr id="62" name=""/>
+          <p:cNvPicPr/>
+          <p:nvPr/>
+        </p:nvPicPr>
+        <p:blipFill>
+          <a:blip r:embed="rId1"/>
+          <a:stretch/>
+        </p:blipFill>
+        <p:spPr>
+          <a:xfrm>
+            <a:off x="889560" y="15840"/>
+            <a:ext cx="8363880" cy="5670360"/>
+          </a:xfrm>
+          <a:prstGeom prst="rect">
+            <a:avLst/>
+          </a:prstGeom>
+          <a:noFill/>
+          <a:ln w="0">
+            <a:noFill/>
+          </a:ln>
+        </p:spPr>
+      </p:pic>
+      <p:sp>
+        <p:nvSpPr>
+          <p:cNvPr id="63" name="Rectangle 14"/>
+          <p:cNvSpPr/>
+          <p:nvPr/>
+        </p:nvSpPr>
+        <p:spPr>
+          <a:xfrm>
+            <a:off x="9205560" y="5040000"/>
+            <a:ext cx="875160" cy="455400"/>
+          </a:xfrm>
+          <a:prstGeom prst="rect">
+            <a:avLst/>
+          </a:prstGeom>
+          <a:noFill/>
+          <a:ln w="0">
+            <a:noFill/>
+          </a:ln>
+        </p:spPr>
+        <p:style>
+          <a:lnRef idx="0"/>
+          <a:fillRef idx="0"/>
+          <a:effectRef idx="0"/>
+          <a:fontRef idx="minor"/>
+        </p:style>
+        <p:txBody>
+          <a:bodyPr wrap="none" lIns="90000" tIns="45000" rIns="90000" bIns="45000" anchor="t">
+            <a:spAutoFit/>
+          </a:bodyPr>
+          <a:p>
+            <a:pPr defTabSz="914400">
+              <a:lnSpc>
+                <a:spcPct val="100000"/>
+              </a:lnSpc>
+            </a:pPr>
+            <a:fld id="{57E0E572-D15C-4CAF-A056-D182FF07AB56}" type="slidenum">
+              <a:rPr lang="sr-Latn-RS" sz="2400" b="0" u="none" strike="noStrike">
+                <a:solidFill>
+                  <a:srgbClr val="000000"/>
+                </a:solidFill>
+                <a:effectLst/>
+                <a:uFillTx/>
+                <a:latin typeface="Times New Roman"/>
+                <a:ea typeface="DejaVu Sans"/>
+              </a:rPr>
+              <a:t>&lt;number&gt;</a:t>
+            </a:fld>
+            <a:r>
+              <a:rPr lang="sr-Latn-RS" sz="2400" b="0" u="none" strike="noStrike">
+                <a:solidFill>
+                  <a:srgbClr val="000000"/>
+                </a:solidFill>
+                <a:effectLst/>
+                <a:uFillTx/>
+                <a:latin typeface="Times New Roman"/>
+                <a:ea typeface="DejaVu Sans"/>
+              </a:rPr>
+              <a:t>/</a:t>
+            </a:r>
+            <a:fld id="{69649FEC-8F87-4C96-8538-2D250CD9BC9F}" type="slidecount">
+              <a:rPr lang="sr-Latn-RS" sz="2400" b="0" u="none" strike="noStrike">
+                <a:solidFill>
+                  <a:srgbClr val="000000"/>
+                </a:solidFill>
+                <a:effectLst/>
+                <a:uFillTx/>
+                <a:latin typeface="Times New Roman"/>
+                <a:ea typeface="DejaVu Sans"/>
+              </a:rPr>
+              <a:t>14</a:t>
+            </a:fld>
+            <a:endParaRPr lang="sr-Latn-RS" sz="2400" b="0" u="none" strike="noStrike">
+              <a:solidFill>
+                <a:srgbClr val="000000"/>
+              </a:solidFill>
+              <a:effectLst/>
+              <a:uFillTx/>
+              <a:latin typeface="Arial"/>
+            </a:endParaRPr>
+          </a:p>
+        </p:txBody>
+      </p:sp>
+    </p:spTree>
+  </p:cSld>
+  <mc:AlternateContent>
+    <mc:Choice Requires="p14">
+      <p:transition spd="slow" p14:dur="2000"/>
+    </mc:Choice>
+    <mc:Fallback>
+      <p:transition spd="slow"/>
+    </mc:Fallback>
+  </mc:AlternateContent>
+</p:sld>
+</file>
+
+<file path=ppt/slides/slide13.xml><?xml version="1.0" encoding="utf-8"?>
+<p:sld xmlns:a="http://schemas.openxmlformats.org/drawingml/2006/main" xmlns:p="http://schemas.openxmlformats.org/presentationml/2006/main" xmlns:r="http://schemas.openxmlformats.org/officeDocument/2006/relationships" xmlns:p14="http://schemas.microsoft.com/office/powerpoint/2010/main" xmlns:p15="http://schemas.microsoft.com/office/powerpoint/2012/main" xmlns:mc="http://schemas.openxmlformats.org/markup-compatibility/2006">
+  <p:cSld>
+    <p:spTree>
+      <p:nvGrpSpPr>
+        <p:cNvPr id="1" name=""/>
+        <p:cNvGrpSpPr/>
+        <p:nvPr/>
+      </p:nvGrpSpPr>
+      <p:grpSpPr>
+        <a:xfrm>
+          <a:off x="0" y="0"/>
+          <a:ext cx="0" cy="0"/>
+          <a:chOff x="0" y="0"/>
+          <a:chExt cx="0" cy="0"/>
+        </a:xfrm>
+      </p:grpSpPr>
+      <p:sp>
+        <p:nvSpPr>
+          <p:cNvPr id="64" name=""/>
+          <p:cNvSpPr txBox="1"/>
+          <p:nvPr/>
+        </p:nvSpPr>
+        <p:spPr>
+          <a:xfrm>
+            <a:off x="540000" y="2315880"/>
+            <a:ext cx="9360000" cy="2467800"/>
+          </a:xfrm>
+          <a:prstGeom prst="rect">
+            <a:avLst/>
+          </a:prstGeom>
+          <a:noFill/>
+          <a:ln w="0">
+            <a:noFill/>
+          </a:ln>
+        </p:spPr>
+        <p:txBody>
+          <a:bodyPr lIns="90000" tIns="45000" rIns="90000" bIns="45000" anchor="t">
+            <a:spAutoFit/>
+          </a:bodyPr>
+          <a:p>
+            <a:r>
+              <a:rPr lang="sr-Latn-RS" sz="3200" b="0" i="1" u="none" strike="noStrike">
+                <a:solidFill>
+                  <a:srgbClr val="000000"/>
+                </a:solidFill>
+                <a:effectLst/>
+                <a:uFillTx/>
+                <a:latin typeface="Arial"/>
+              </a:rPr>
+              <a:t>„Imagination is more important than knowledge.” </a:t>
+            </a:r>
+            <a:r>
+              <a:rPr lang="sr-Latn-RS" sz="3200" b="0" i="1" u="none" strike="noStrike">
+                <a:solidFill>
+                  <a:srgbClr val="000000"/>
+                </a:solidFill>
+                <a:effectLst/>
+                <a:uFillTx/>
+                <a:latin typeface="Arial"/>
+              </a:rPr>
+              <a:t>	</a:t>
+            </a:r>
+            <a:r>
+              <a:rPr lang="sr-Latn-RS" sz="3200" b="0" i="1" u="none" strike="noStrike">
+                <a:solidFill>
+                  <a:srgbClr val="000000"/>
+                </a:solidFill>
+                <a:effectLst/>
+                <a:uFillTx/>
+                <a:latin typeface="Arial"/>
+              </a:rPr>
+              <a:t>   </a:t>
+            </a:r>
+            <a:r>
+              <a:rPr lang="sr-Latn-RS" sz="3200" b="0" u="none" strike="noStrike">
+                <a:solidFill>
+                  <a:srgbClr val="000000"/>
+                </a:solidFill>
+                <a:effectLst/>
+                <a:uFillTx/>
+                <a:latin typeface="Arial"/>
+              </a:rPr>
+              <a:t>                            Albert Einstein</a:t>
+            </a:r>
+            <a:endParaRPr lang="sr-Latn-RS" sz="3200" b="0" u="none" strike="noStrike">
+              <a:solidFill>
+                <a:srgbClr val="000000"/>
+              </a:solidFill>
+              <a:effectLst/>
+              <a:uFillTx/>
+              <a:latin typeface="Arial"/>
+            </a:endParaRPr>
+          </a:p>
+          <a:p>
+            <a:endParaRPr lang="sr-Latn-RS" sz="3200" b="0" u="none" strike="noStrike">
+              <a:solidFill>
+                <a:srgbClr val="000000"/>
+              </a:solidFill>
+              <a:effectLst/>
+              <a:uFillTx/>
+              <a:latin typeface="Arial"/>
+            </a:endParaRPr>
+          </a:p>
+          <a:p>
+            <a:endParaRPr lang="sr-Latn-RS" sz="3200" b="0" u="none" strike="noStrike">
+              <a:solidFill>
+                <a:srgbClr val="000000"/>
+              </a:solidFill>
+              <a:effectLst/>
+              <a:uFillTx/>
+              <a:latin typeface="Arial"/>
+            </a:endParaRPr>
+          </a:p>
+        </p:txBody>
+      </p:sp>
+      <p:sp>
+        <p:nvSpPr>
+          <p:cNvPr id="65" name="Rectangle 13"/>
+          <p:cNvSpPr/>
+          <p:nvPr/>
+        </p:nvSpPr>
+        <p:spPr>
+          <a:xfrm>
+            <a:off x="8278560" y="5003640"/>
+            <a:ext cx="875160" cy="455400"/>
+          </a:xfrm>
+          <a:prstGeom prst="rect">
+            <a:avLst/>
+          </a:prstGeom>
+          <a:noFill/>
+          <a:ln w="0">
+            <a:noFill/>
+          </a:ln>
+        </p:spPr>
+        <p:style>
+          <a:lnRef idx="0"/>
+          <a:fillRef idx="0"/>
+          <a:effectRef idx="0"/>
+          <a:fontRef idx="minor"/>
+        </p:style>
+        <p:txBody>
+          <a:bodyPr wrap="none" lIns="90000" tIns="45000" rIns="90000" bIns="45000" anchor="t">
+            <a:spAutoFit/>
+          </a:bodyPr>
+          <a:p>
+            <a:pPr defTabSz="914400">
+              <a:lnSpc>
+                <a:spcPct val="100000"/>
+              </a:lnSpc>
+            </a:pPr>
+            <a:fld id="{7F721059-E2EC-40D0-9096-41FDE9DB0146}" type="slidenum">
+              <a:rPr lang="sr-Latn-RS" sz="2400" b="0" u="none" strike="noStrike">
+                <a:solidFill>
+                  <a:srgbClr val="000000"/>
+                </a:solidFill>
+                <a:effectLst/>
+                <a:uFillTx/>
+                <a:latin typeface="Times New Roman"/>
+                <a:ea typeface="DejaVu Sans"/>
+              </a:rPr>
+              <a:t>&lt;number&gt;</a:t>
+            </a:fld>
+            <a:r>
+              <a:rPr lang="sr-Latn-RS" sz="2400" b="0" u="none" strike="noStrike">
+                <a:solidFill>
+                  <a:srgbClr val="000000"/>
+                </a:solidFill>
+                <a:effectLst/>
+                <a:uFillTx/>
+                <a:latin typeface="Times New Roman"/>
+                <a:ea typeface="DejaVu Sans"/>
+              </a:rPr>
+              <a:t>/</a:t>
+            </a:r>
+            <a:fld id="{F9BA33A6-8BD2-48BA-A7DE-31AFCBB2B25C}" type="slidecount">
+              <a:rPr lang="sr-Latn-RS" sz="2400" b="0" u="none" strike="noStrike">
+                <a:solidFill>
+                  <a:srgbClr val="000000"/>
+                </a:solidFill>
+                <a:effectLst/>
+                <a:uFillTx/>
+                <a:latin typeface="Times New Roman"/>
+                <a:ea typeface="DejaVu Sans"/>
+              </a:rPr>
+              <a:t>14</a:t>
+            </a:fld>
+            <a:endParaRPr lang="sr-Latn-RS" sz="2400" b="0" u="none" strike="noStrike">
+              <a:solidFill>
+                <a:srgbClr val="000000"/>
+              </a:solidFill>
+              <a:effectLst/>
+              <a:uFillTx/>
+              <a:latin typeface="Arial"/>
+            </a:endParaRPr>
+          </a:p>
+        </p:txBody>
+      </p:sp>
+    </p:spTree>
+  </p:cSld>
+  <mc:AlternateContent>
+    <mc:Choice Requires="p14">
+      <p:transition spd="slow" p14:dur="2000"/>
+    </mc:Choice>
+    <mc:Fallback>
+      <p:transition spd="slow"/>
+    </mc:Fallback>
+  </mc:AlternateContent>
+</p:sld>
+</file>
+
+<file path=ppt/slides/slide14.xml><?xml version="1.0" encoding="utf-8"?>
+<p:sld xmlns:a="http://schemas.openxmlformats.org/drawingml/2006/main" xmlns:p="http://schemas.openxmlformats.org/presentationml/2006/main" xmlns:r="http://schemas.openxmlformats.org/officeDocument/2006/relationships" xmlns:p14="http://schemas.microsoft.com/office/powerpoint/2010/main" xmlns:p15="http://schemas.microsoft.com/office/powerpoint/2012/main" xmlns:mc="http://schemas.openxmlformats.org/markup-compatibility/2006">
+  <p:cSld>
+    <p:spTree>
+      <p:nvGrpSpPr>
+        <p:cNvPr id="1" name=""/>
+        <p:cNvGrpSpPr/>
+        <p:nvPr/>
+      </p:nvGrpSpPr>
+      <p:grpSpPr>
+        <a:xfrm>
+          <a:off x="0" y="0"/>
+          <a:ext cx="0" cy="0"/>
+          <a:chOff x="0" y="0"/>
+          <a:chExt cx="0" cy="0"/>
+        </a:xfrm>
+      </p:grpSpPr>
+      <p:sp>
+        <p:nvSpPr>
+          <p:cNvPr id="66" name="PlaceHolder 3"/>
           <p:cNvSpPr/>
           <p:nvPr/>
         </p:nvSpPr>
         <p:spPr>
           <a:xfrm>
             <a:off x="1258920" y="1168920"/>
-            <a:ext cx="7555680" cy="822240"/>
+            <a:ext cx="7555320" cy="822240"/>
           </a:xfrm>
           <a:prstGeom prst="rect">
             <a:avLst/>
@@ -2359,14 +5185,14 @@
       </p:sp>
       <p:sp>
         <p:nvSpPr>
-          <p:cNvPr id="38" name="PlaceHolder 4"/>
+          <p:cNvPr id="67" name="PlaceHolder 4"/>
           <p:cNvSpPr/>
           <p:nvPr/>
         </p:nvSpPr>
         <p:spPr>
           <a:xfrm>
             <a:off x="1258920" y="2350800"/>
-            <a:ext cx="7555680" cy="2620800"/>
+            <a:ext cx="7555320" cy="2620800"/>
           </a:xfrm>
           <a:prstGeom prst="rect">
             <a:avLst/>
@@ -2590,14 +5416,14 @@
       </p:sp>
       <p:sp>
         <p:nvSpPr>
-          <p:cNvPr id="39" name="Rectangle 3"/>
+          <p:cNvPr id="68" name="Rectangle 3"/>
           <p:cNvSpPr/>
           <p:nvPr/>
         </p:nvSpPr>
         <p:spPr>
           <a:xfrm>
             <a:off x="8278560" y="5003640"/>
-            <a:ext cx="569880" cy="455400"/>
+            <a:ext cx="874440" cy="455400"/>
           </a:xfrm>
           <a:prstGeom prst="rect">
             <a:avLst/>
@@ -2623,7 +5449,7 @@
                 <a:spcPct val="100000"/>
               </a:lnSpc>
             </a:pPr>
-            <a:fld id="{B02672B1-29C8-4AC6-9141-0AC531EA575C}" type="slidenum">
+            <a:fld id="{85A3C42F-CB80-451D-8CAD-0FCBB6FF201C}" type="slidenum">
               <a:rPr lang="sr-Latn-RS" sz="2400" b="0" u="none" strike="noStrike">
                 <a:solidFill>
                   <a:srgbClr val="000000"/>
@@ -2647,7 +5473,7 @@
               </a:rPr>
               <a:t>/</a:t>
             </a:r>
-            <a:fld id="{259C8779-AD4C-40B6-BC76-0066C3C545E3}" type="slidecount">
+            <a:fld id="{1755EB7C-3FDA-463F-BF8D-C350EE3F7AC8}" type="slidecount">
               <a:rPr lang="sr-Latn-RS" sz="2400" b="0" u="none" strike="noStrike">
                 <a:solidFill>
                   <a:srgbClr val="000000"/>
@@ -2657,7 +5483,7 @@
                 <a:latin typeface="Times New Roman"/>
                 <a:ea typeface="DejaVu Sans"/>
               </a:rPr>
-              <a:t>10</a:t>
+              <a:t>14</a:t>
             </a:fld>
             <a:endParaRPr lang="sr-Latn-RS" sz="2400" b="0" u="none" strike="noStrike">
               <a:solidFill>
@@ -2702,7 +5528,7 @@
       </p:grpSpPr>
       <p:sp>
         <p:nvSpPr>
-          <p:cNvPr id="21" name="PlaceHolder 1"/>
+          <p:cNvPr id="31" name="PlaceHolder 1"/>
           <p:cNvSpPr>
             <a:spLocks noGrp="1"/>
           </p:cNvSpPr>
@@ -2712,8 +5538,8 @@
         </p:nvSpPr>
         <p:spPr>
           <a:xfrm>
-            <a:off x="504000" y="226080"/>
-            <a:ext cx="9071640" cy="946440"/>
+            <a:off x="504000" y="225720"/>
+            <a:ext cx="9071280" cy="946800"/>
           </a:xfrm>
           <a:prstGeom prst="rect">
             <a:avLst/>
@@ -2729,7 +5555,13 @@
           </a:bodyPr>
           <a:p>
             <a:pPr indent="0" algn="ctr">
+              <a:lnSpc>
+                <a:spcPct val="100000"/>
+              </a:lnSpc>
               <a:buNone/>
+              <a:tabLst>
+                <a:tab pos="0" algn="l"/>
+              </a:tabLst>
             </a:pPr>
             <a:r>
               <a:rPr lang="sr-Latn-RS" sz="3200" b="0" u="none" strike="noStrike">
@@ -2755,7 +5587,7 @@
       </p:sp>
       <p:sp>
         <p:nvSpPr>
-          <p:cNvPr id="22" name="PlaceHolder 2"/>
+          <p:cNvPr id="32" name="PlaceHolder 2"/>
           <p:cNvSpPr>
             <a:spLocks noGrp="1"/>
           </p:cNvSpPr>
@@ -2766,7 +5598,7 @@
         <p:spPr>
           <a:xfrm>
             <a:off x="504000" y="1326600"/>
-            <a:ext cx="9071640" cy="4073400"/>
+            <a:ext cx="9071280" cy="4073040"/>
           </a:xfrm>
           <a:prstGeom prst="rect">
             <a:avLst/>
@@ -2782,6 +5614,9 @@
           </a:bodyPr>
           <a:p>
             <a:pPr marL="432000" indent="-324000" algn="l">
+              <a:lnSpc>
+                <a:spcPct val="100000"/>
+              </a:lnSpc>
               <a:spcBef>
                 <a:spcPts val="1417"/>
               </a:spcBef>
@@ -2814,6 +5649,9 @@
           </a:p>
           <a:p>
             <a:pPr marL="864000" lvl="1" indent="-324000" algn="l">
+              <a:lnSpc>
+                <a:spcPct val="100000"/>
+              </a:lnSpc>
               <a:spcBef>
                 <a:spcPts val="1134"/>
               </a:spcBef>
@@ -2846,6 +5684,9 @@
           </a:p>
           <a:p>
             <a:pPr marL="432000" indent="-324000" algn="l">
+              <a:lnSpc>
+                <a:spcPct val="100000"/>
+              </a:lnSpc>
               <a:spcBef>
                 <a:spcPts val="1417"/>
               </a:spcBef>
@@ -2878,6 +5719,9 @@
           </a:p>
           <a:p>
             <a:pPr marL="864000" lvl="1" indent="-324000" algn="l">
+              <a:lnSpc>
+                <a:spcPct val="100000"/>
+              </a:lnSpc>
               <a:spcBef>
                 <a:spcPts val="1134"/>
               </a:spcBef>
@@ -2910,6 +5754,9 @@
           </a:p>
           <a:p>
             <a:pPr marL="864000" lvl="1" indent="-324000" algn="l">
+              <a:lnSpc>
+                <a:spcPct val="100000"/>
+              </a:lnSpc>
               <a:spcBef>
                 <a:spcPts val="1134"/>
               </a:spcBef>
@@ -2942,6 +5789,9 @@
           </a:p>
           <a:p>
             <a:pPr marL="864000" lvl="1" indent="-324000" algn="l">
+              <a:lnSpc>
+                <a:spcPct val="100000"/>
+              </a:lnSpc>
               <a:spcBef>
                 <a:spcPts val="1134"/>
               </a:spcBef>
@@ -2974,6 +5824,9 @@
           </a:p>
           <a:p>
             <a:pPr marL="432000" indent="-324000" algn="l">
+              <a:lnSpc>
+                <a:spcPct val="100000"/>
+              </a:lnSpc>
               <a:spcBef>
                 <a:spcPts val="1417"/>
               </a:spcBef>
@@ -3006,6 +5859,9 @@
           </a:p>
           <a:p>
             <a:pPr marL="864000" lvl="1" indent="-324000" algn="l">
+              <a:lnSpc>
+                <a:spcPct val="100000"/>
+              </a:lnSpc>
               <a:spcBef>
                 <a:spcPts val="1134"/>
               </a:spcBef>
@@ -3038,6 +5894,9 @@
           </a:p>
           <a:p>
             <a:pPr marL="864000" lvl="1" indent="-324000" algn="l">
+              <a:lnSpc>
+                <a:spcPct val="100000"/>
+              </a:lnSpc>
               <a:spcBef>
                 <a:spcPts val="1134"/>
               </a:spcBef>
@@ -3060,6 +5919,88 @@
               <a:t>Отпорнији су на услове околине</a:t>
             </a:r>
             <a:endParaRPr lang="sr-Latn-RS" sz="1800" b="0" u="none" strike="noStrike">
+              <a:solidFill>
+                <a:srgbClr val="000000"/>
+              </a:solidFill>
+              <a:effectLst/>
+              <a:uFillTx/>
+              <a:latin typeface="Arial"/>
+            </a:endParaRPr>
+          </a:p>
+        </p:txBody>
+      </p:sp>
+      <p:sp>
+        <p:nvSpPr>
+          <p:cNvPr id="33" name="Rectangle 1"/>
+          <p:cNvSpPr/>
+          <p:nvPr/>
+        </p:nvSpPr>
+        <p:spPr>
+          <a:xfrm>
+            <a:off x="8278560" y="5003640"/>
+            <a:ext cx="722520" cy="455400"/>
+          </a:xfrm>
+          <a:prstGeom prst="rect">
+            <a:avLst/>
+          </a:prstGeom>
+          <a:noFill/>
+          <a:ln w="0">
+            <a:noFill/>
+          </a:ln>
+        </p:spPr>
+        <p:style>
+          <a:lnRef idx="0"/>
+          <a:fillRef idx="0"/>
+          <a:effectRef idx="0"/>
+          <a:fontRef idx="minor"/>
+        </p:style>
+        <p:txBody>
+          <a:bodyPr wrap="none" lIns="90000" tIns="45000" rIns="90000" bIns="45000" anchor="t">
+            <a:spAutoFit/>
+          </a:bodyPr>
+          <a:p>
+            <a:pPr defTabSz="914400">
+              <a:lnSpc>
+                <a:spcPct val="100000"/>
+              </a:lnSpc>
+            </a:pPr>
+            <a:fld id="{484D5D8A-567A-4DC4-A6F1-B851C54E6E8F}" type="slidenum">
+              <a:rPr lang="sr-Latn-RS" sz="2400" b="0" u="none" strike="noStrike">
+                <a:solidFill>
+                  <a:srgbClr val="000000"/>
+                </a:solidFill>
+                <a:effectLst/>
+                <a:uFillTx/>
+                <a:latin typeface="Times New Roman"/>
+                <a:ea typeface="DejaVu Sans"/>
+              </a:rPr>
+              <a:t>2</a:t>
+            </a:fld>
+            <a:r>
+              <a:rPr lang="sr-Latn-RS" sz="2400" b="0" u="none" strike="noStrike">
+                <a:solidFill>
+                  <a:srgbClr val="000000"/>
+                </a:solidFill>
+                <a:effectLst/>
+                <a:uFillTx/>
+                <a:latin typeface="Times New Roman"/>
+                <a:ea typeface="DejaVu Sans"/>
+              </a:rPr>
+              <a:t>/</a:t>
+            </a:r>
+            <a:fld id="{71B45E76-839B-432B-A003-7A3C3B7DA95F}" type="slidecount">
+              <a:rPr lang="sr-Latn-RS" sz="2400" b="0" u="none" strike="noStrike">
+                <a:solidFill>
+                  <a:srgbClr val="000000"/>
+                </a:solidFill>
+                <a:effectLst/>
+                <a:uFillTx/>
+                <a:latin typeface="Times New Roman"/>
+                <a:ea typeface="DejaVu Sans"/>
+              </a:rPr>
+              <a:t>14</a:t>
+            </a:fld>
+            <a:endParaRPr lang="sr-Latn-RS" sz="2400" b="0" u="none" strike="noStrike">
               <a:solidFill>
                 <a:srgbClr val="000000"/>
               </a:solidFill>
@@ -3102,7 +6043,7 @@
       </p:grpSpPr>
       <p:sp>
         <p:nvSpPr>
-          <p:cNvPr id="23" name="PlaceHolder 1"/>
+          <p:cNvPr id="34" name="PlaceHolder 1"/>
           <p:cNvSpPr>
             <a:spLocks noGrp="1"/>
           </p:cNvSpPr>
@@ -3112,8 +6053,8 @@
         </p:nvSpPr>
         <p:spPr>
           <a:xfrm>
-            <a:off x="504000" y="226080"/>
-            <a:ext cx="9071640" cy="946440"/>
+            <a:off x="504000" y="225720"/>
+            <a:ext cx="9071280" cy="946800"/>
           </a:xfrm>
           <a:prstGeom prst="rect">
             <a:avLst/>
@@ -3129,7 +6070,13 @@
           </a:bodyPr>
           <a:p>
             <a:pPr indent="0" algn="ctr">
+              <a:lnSpc>
+                <a:spcPct val="100000"/>
+              </a:lnSpc>
               <a:buNone/>
+              <a:tabLst>
+                <a:tab pos="0" algn="l"/>
+              </a:tabLst>
             </a:pPr>
             <a:r>
               <a:rPr lang="sr-Latn-RS" sz="3200" b="0" u="none" strike="noStrike">
@@ -3155,7 +6102,7 @@
       </p:sp>
       <p:sp>
         <p:nvSpPr>
-          <p:cNvPr id="24" name="PlaceHolder 2"/>
+          <p:cNvPr id="35" name="PlaceHolder 2"/>
           <p:cNvSpPr>
             <a:spLocks noGrp="1"/>
           </p:cNvSpPr>
@@ -3166,7 +6113,7 @@
         <p:spPr>
           <a:xfrm>
             <a:off x="504000" y="1326600"/>
-            <a:ext cx="9071640" cy="4433400"/>
+            <a:ext cx="9071280" cy="4433040"/>
           </a:xfrm>
           <a:prstGeom prst="rect">
             <a:avLst/>
@@ -3182,6 +6129,9 @@
           </a:bodyPr>
           <a:p>
             <a:pPr marL="432000" indent="-324000" algn="l">
+              <a:lnSpc>
+                <a:spcPct val="100000"/>
+              </a:lnSpc>
               <a:spcBef>
                 <a:spcPts val="1417"/>
               </a:spcBef>
@@ -3214,6 +6164,9 @@
           </a:p>
           <a:p>
             <a:pPr marL="864000" lvl="1" indent="-324000" algn="l">
+              <a:lnSpc>
+                <a:spcPct val="100000"/>
+              </a:lnSpc>
               <a:spcBef>
                 <a:spcPts val="1134"/>
               </a:spcBef>
@@ -3246,6 +6199,9 @@
           </a:p>
           <a:p>
             <a:pPr marL="864000" lvl="1" indent="-324000" algn="l">
+              <a:lnSpc>
+                <a:spcPct val="100000"/>
+              </a:lnSpc>
               <a:spcBef>
                 <a:spcPts val="1134"/>
               </a:spcBef>
@@ -3278,6 +6234,9 @@
           </a:p>
           <a:p>
             <a:pPr marL="864000" lvl="1" indent="-324000" algn="l">
+              <a:lnSpc>
+                <a:spcPct val="100000"/>
+              </a:lnSpc>
               <a:spcBef>
                 <a:spcPts val="1134"/>
               </a:spcBef>
@@ -3310,6 +6269,9 @@
           </a:p>
           <a:p>
             <a:pPr marL="864000" lvl="1" indent="-324000" algn="l">
+              <a:lnSpc>
+                <a:spcPct val="100000"/>
+              </a:lnSpc>
               <a:spcBef>
                 <a:spcPts val="1134"/>
               </a:spcBef>
@@ -3342,6 +6304,9 @@
           </a:p>
           <a:p>
             <a:pPr marL="864000" lvl="1" indent="-324000" algn="l">
+              <a:lnSpc>
+                <a:spcPct val="100000"/>
+              </a:lnSpc>
               <a:spcBef>
                 <a:spcPts val="1134"/>
               </a:spcBef>
@@ -3374,6 +6339,9 @@
           </a:p>
           <a:p>
             <a:pPr marL="432000" indent="-324000" algn="l">
+              <a:lnSpc>
+                <a:spcPct val="100000"/>
+              </a:lnSpc>
               <a:spcBef>
                 <a:spcPts val="1417"/>
               </a:spcBef>
@@ -3406,6 +6374,9 @@
           </a:p>
           <a:p>
             <a:pPr marL="864000" lvl="1" indent="-324000" algn="l">
+              <a:lnSpc>
+                <a:spcPct val="100000"/>
+              </a:lnSpc>
               <a:spcBef>
                 <a:spcPts val="1134"/>
               </a:spcBef>
@@ -3438,6 +6409,9 @@
           </a:p>
           <a:p>
             <a:pPr marL="864000" lvl="1" indent="-324000" algn="l">
+              <a:lnSpc>
+                <a:spcPct val="100000"/>
+              </a:lnSpc>
               <a:spcBef>
                 <a:spcPts val="1134"/>
               </a:spcBef>
@@ -3460,6 +6434,88 @@
               <a:t>Зато реакција иде брже, зато се појављује множење концентрација</a:t>
             </a:r>
             <a:endParaRPr lang="sr-Latn-RS" sz="1800" b="0" u="none" strike="noStrike">
+              <a:solidFill>
+                <a:srgbClr val="000000"/>
+              </a:solidFill>
+              <a:effectLst/>
+              <a:uFillTx/>
+              <a:latin typeface="Arial"/>
+            </a:endParaRPr>
+          </a:p>
+        </p:txBody>
+      </p:sp>
+      <p:sp>
+        <p:nvSpPr>
+          <p:cNvPr id="36" name="Rectangle 4"/>
+          <p:cNvSpPr/>
+          <p:nvPr/>
+        </p:nvSpPr>
+        <p:spPr>
+          <a:xfrm>
+            <a:off x="8278560" y="5003640"/>
+            <a:ext cx="722520" cy="455400"/>
+          </a:xfrm>
+          <a:prstGeom prst="rect">
+            <a:avLst/>
+          </a:prstGeom>
+          <a:noFill/>
+          <a:ln w="0">
+            <a:noFill/>
+          </a:ln>
+        </p:spPr>
+        <p:style>
+          <a:lnRef idx="0"/>
+          <a:fillRef idx="0"/>
+          <a:effectRef idx="0"/>
+          <a:fontRef idx="minor"/>
+        </p:style>
+        <p:txBody>
+          <a:bodyPr wrap="none" lIns="90000" tIns="45000" rIns="90000" bIns="45000" anchor="t">
+            <a:spAutoFit/>
+          </a:bodyPr>
+          <a:p>
+            <a:pPr defTabSz="914400">
+              <a:lnSpc>
+                <a:spcPct val="100000"/>
+              </a:lnSpc>
+            </a:pPr>
+            <a:fld id="{DDA9CB43-8265-4256-A5AF-9FBCBF1E788E}" type="slidenum">
+              <a:rPr lang="sr-Latn-RS" sz="2400" b="0" u="none" strike="noStrike">
+                <a:solidFill>
+                  <a:srgbClr val="000000"/>
+                </a:solidFill>
+                <a:effectLst/>
+                <a:uFillTx/>
+                <a:latin typeface="Times New Roman"/>
+                <a:ea typeface="DejaVu Sans"/>
+              </a:rPr>
+              <a:t>3</a:t>
+            </a:fld>
+            <a:r>
+              <a:rPr lang="sr-Latn-RS" sz="2400" b="0" u="none" strike="noStrike">
+                <a:solidFill>
+                  <a:srgbClr val="000000"/>
+                </a:solidFill>
+                <a:effectLst/>
+                <a:uFillTx/>
+                <a:latin typeface="Times New Roman"/>
+                <a:ea typeface="DejaVu Sans"/>
+              </a:rPr>
+              <a:t>/</a:t>
+            </a:r>
+            <a:fld id="{6BE1ABF7-F4CD-43DA-807C-E6A1A4BE0BEE}" type="slidecount">
+              <a:rPr lang="sr-Latn-RS" sz="2400" b="0" u="none" strike="noStrike">
+                <a:solidFill>
+                  <a:srgbClr val="000000"/>
+                </a:solidFill>
+                <a:effectLst/>
+                <a:uFillTx/>
+                <a:latin typeface="Times New Roman"/>
+                <a:ea typeface="DejaVu Sans"/>
+              </a:rPr>
+              <a:t>14</a:t>
+            </a:fld>
+            <a:endParaRPr lang="sr-Latn-RS" sz="2400" b="0" u="none" strike="noStrike">
               <a:solidFill>
                 <a:srgbClr val="000000"/>
               </a:solidFill>
@@ -3502,7 +6558,7 @@
       </p:grpSpPr>
       <p:sp>
         <p:nvSpPr>
-          <p:cNvPr id="25" name="PlaceHolder 1"/>
+          <p:cNvPr id="37" name="PlaceHolder 1"/>
           <p:cNvSpPr>
             <a:spLocks noGrp="1"/>
           </p:cNvSpPr>
@@ -3512,8 +6568,8 @@
         </p:nvSpPr>
         <p:spPr>
           <a:xfrm>
-            <a:off x="504000" y="226080"/>
-            <a:ext cx="9071640" cy="946440"/>
+            <a:off x="504000" y="225720"/>
+            <a:ext cx="9071280" cy="946800"/>
           </a:xfrm>
           <a:prstGeom prst="rect">
             <a:avLst/>
@@ -3529,7 +6585,13 @@
           </a:bodyPr>
           <a:p>
             <a:pPr indent="0" algn="ctr">
+              <a:lnSpc>
+                <a:spcPct val="100000"/>
+              </a:lnSpc>
               <a:buNone/>
+              <a:tabLst>
+                <a:tab pos="0" algn="l"/>
+              </a:tabLst>
             </a:pPr>
             <a:r>
               <a:rPr lang="sr-Latn-RS" sz="3200" b="0" u="none" strike="noStrike">
@@ -3555,7 +6617,7 @@
       </p:sp>
       <p:sp>
         <p:nvSpPr>
-          <p:cNvPr id="26" name="PlaceHolder 2"/>
+          <p:cNvPr id="38" name="PlaceHolder 2"/>
           <p:cNvSpPr>
             <a:spLocks noGrp="1"/>
           </p:cNvSpPr>
@@ -3566,7 +6628,7 @@
         <p:spPr>
           <a:xfrm>
             <a:off x="504000" y="1326600"/>
-            <a:ext cx="9071640" cy="3288240"/>
+            <a:ext cx="9071280" cy="3287880"/>
           </a:xfrm>
           <a:prstGeom prst="rect">
             <a:avLst/>
@@ -3582,6 +6644,9 @@
           </a:bodyPr>
           <a:p>
             <a:pPr marL="432000" indent="-324000" algn="l">
+              <a:lnSpc>
+                <a:spcPct val="100000"/>
+              </a:lnSpc>
               <a:spcBef>
                 <a:spcPts val="1417"/>
               </a:spcBef>
@@ -3614,6 +6679,9 @@
           </a:p>
           <a:p>
             <a:pPr marL="864000" lvl="1" indent="-324000" algn="l">
+              <a:lnSpc>
+                <a:spcPct val="100000"/>
+              </a:lnSpc>
               <a:spcBef>
                 <a:spcPts val="1134"/>
               </a:spcBef>
@@ -3646,6 +6714,9 @@
           </a:p>
           <a:p>
             <a:pPr marL="864000" lvl="1" indent="-324000" algn="l">
+              <a:lnSpc>
+                <a:spcPct val="100000"/>
+              </a:lnSpc>
               <a:spcBef>
                 <a:spcPts val="1134"/>
               </a:spcBef>
@@ -3678,6 +6749,9 @@
           </a:p>
           <a:p>
             <a:pPr marL="432000" indent="-324000" algn="l">
+              <a:lnSpc>
+                <a:spcPct val="100000"/>
+              </a:lnSpc>
               <a:spcBef>
                 <a:spcPts val="1417"/>
               </a:spcBef>
@@ -3710,6 +6784,9 @@
           </a:p>
           <a:p>
             <a:pPr marL="864000" lvl="1" indent="-324000" algn="l">
+              <a:lnSpc>
+                <a:spcPct val="100000"/>
+              </a:lnSpc>
               <a:spcBef>
                 <a:spcPts val="1134"/>
               </a:spcBef>
@@ -3742,6 +6819,9 @@
           </a:p>
           <a:p>
             <a:pPr marL="432000" indent="-324000" algn="l">
+              <a:lnSpc>
+                <a:spcPct val="100000"/>
+              </a:lnSpc>
               <a:spcBef>
                 <a:spcPts val="1417"/>
               </a:spcBef>
@@ -3774,6 +6854,9 @@
           </a:p>
           <a:p>
             <a:pPr marL="864000" lvl="1" indent="-324000" algn="l">
+              <a:lnSpc>
+                <a:spcPct val="100000"/>
+              </a:lnSpc>
               <a:spcBef>
                 <a:spcPts val="1134"/>
               </a:spcBef>
@@ -3796,6 +6879,88 @@
               <a:t>Константа к у том контексту игра улогу тежинског фактора</a:t>
             </a:r>
             <a:endParaRPr lang="sr-Latn-RS" sz="1800" b="0" u="none" strike="noStrike">
+              <a:solidFill>
+                <a:srgbClr val="000000"/>
+              </a:solidFill>
+              <a:effectLst/>
+              <a:uFillTx/>
+              <a:latin typeface="Arial"/>
+            </a:endParaRPr>
+          </a:p>
+        </p:txBody>
+      </p:sp>
+      <p:sp>
+        <p:nvSpPr>
+          <p:cNvPr id="39" name="Rectangle 5"/>
+          <p:cNvSpPr/>
+          <p:nvPr/>
+        </p:nvSpPr>
+        <p:spPr>
+          <a:xfrm>
+            <a:off x="8278560" y="5003640"/>
+            <a:ext cx="722520" cy="455400"/>
+          </a:xfrm>
+          <a:prstGeom prst="rect">
+            <a:avLst/>
+          </a:prstGeom>
+          <a:noFill/>
+          <a:ln w="0">
+            <a:noFill/>
+          </a:ln>
+        </p:spPr>
+        <p:style>
+          <a:lnRef idx="0"/>
+          <a:fillRef idx="0"/>
+          <a:effectRef idx="0"/>
+          <a:fontRef idx="minor"/>
+        </p:style>
+        <p:txBody>
+          <a:bodyPr wrap="none" lIns="90000" tIns="45000" rIns="90000" bIns="45000" anchor="t">
+            <a:spAutoFit/>
+          </a:bodyPr>
+          <a:p>
+            <a:pPr defTabSz="914400">
+              <a:lnSpc>
+                <a:spcPct val="100000"/>
+              </a:lnSpc>
+            </a:pPr>
+            <a:fld id="{5863B5DB-DFAA-4ED2-8571-E3F96457843E}" type="slidenum">
+              <a:rPr lang="sr-Latn-RS" sz="2400" b="0" u="none" strike="noStrike">
+                <a:solidFill>
+                  <a:srgbClr val="000000"/>
+                </a:solidFill>
+                <a:effectLst/>
+                <a:uFillTx/>
+                <a:latin typeface="Times New Roman"/>
+                <a:ea typeface="DejaVu Sans"/>
+              </a:rPr>
+              <a:t>4</a:t>
+            </a:fld>
+            <a:r>
+              <a:rPr lang="sr-Latn-RS" sz="2400" b="0" u="none" strike="noStrike">
+                <a:solidFill>
+                  <a:srgbClr val="000000"/>
+                </a:solidFill>
+                <a:effectLst/>
+                <a:uFillTx/>
+                <a:latin typeface="Times New Roman"/>
+                <a:ea typeface="DejaVu Sans"/>
+              </a:rPr>
+              <a:t>/</a:t>
+            </a:r>
+            <a:fld id="{1DC01E2C-9AAF-4484-B8AB-328015AA5E81}" type="slidecount">
+              <a:rPr lang="sr-Latn-RS" sz="2400" b="0" u="none" strike="noStrike">
+                <a:solidFill>
+                  <a:srgbClr val="000000"/>
+                </a:solidFill>
+                <a:effectLst/>
+                <a:uFillTx/>
+                <a:latin typeface="Times New Roman"/>
+                <a:ea typeface="DejaVu Sans"/>
+              </a:rPr>
+              <a:t>14</a:t>
+            </a:fld>
+            <a:endParaRPr lang="sr-Latn-RS" sz="2400" b="0" u="none" strike="noStrike">
               <a:solidFill>
                 <a:srgbClr val="000000"/>
               </a:solidFill>
@@ -3838,7 +7003,7 @@
       </p:grpSpPr>
       <p:sp>
         <p:nvSpPr>
-          <p:cNvPr id="27" name="PlaceHolder 1"/>
+          <p:cNvPr id="40" name="PlaceHolder 1"/>
           <p:cNvSpPr>
             <a:spLocks noGrp="1"/>
           </p:cNvSpPr>
@@ -3848,8 +7013,8 @@
         </p:nvSpPr>
         <p:spPr>
           <a:xfrm>
-            <a:off x="504000" y="226080"/>
-            <a:ext cx="9071640" cy="946440"/>
+            <a:off x="504000" y="225720"/>
+            <a:ext cx="9071280" cy="946800"/>
           </a:xfrm>
           <a:prstGeom prst="rect">
             <a:avLst/>
@@ -3865,7 +7030,13 @@
           </a:bodyPr>
           <a:p>
             <a:pPr indent="0" algn="ctr">
+              <a:lnSpc>
+                <a:spcPct val="100000"/>
+              </a:lnSpc>
               <a:buNone/>
+              <a:tabLst>
+                <a:tab pos="0" algn="l"/>
+              </a:tabLst>
             </a:pPr>
             <a:r>
               <a:rPr lang="sr-Latn-RS" sz="3200" b="0" u="none" strike="noStrike">
@@ -3891,7 +7062,7 @@
       </p:sp>
       <p:sp>
         <p:nvSpPr>
-          <p:cNvPr id="28" name="PlaceHolder 2"/>
+          <p:cNvPr id="41" name="PlaceHolder 2"/>
           <p:cNvSpPr>
             <a:spLocks noGrp="1"/>
           </p:cNvSpPr>
@@ -3902,7 +7073,7 @@
         <p:spPr>
           <a:xfrm>
             <a:off x="504000" y="1326600"/>
-            <a:ext cx="9071640" cy="3288240"/>
+            <a:ext cx="9071280" cy="3287880"/>
           </a:xfrm>
           <a:prstGeom prst="rect">
             <a:avLst/>
@@ -3918,6 +7089,9 @@
           </a:bodyPr>
           <a:p>
             <a:pPr marL="432000" indent="-324000" algn="l">
+              <a:lnSpc>
+                <a:spcPct val="100000"/>
+              </a:lnSpc>
               <a:spcBef>
                 <a:spcPts val="1417"/>
               </a:spcBef>
@@ -3950,6 +7124,9 @@
           </a:p>
           <a:p>
             <a:pPr marL="864000" lvl="1" indent="-324000" algn="l">
+              <a:lnSpc>
+                <a:spcPct val="100000"/>
+              </a:lnSpc>
               <a:spcBef>
                 <a:spcPts val="1134"/>
               </a:spcBef>
@@ -3982,6 +7159,9 @@
           </a:p>
           <a:p>
             <a:pPr marL="864000" lvl="1" indent="-324000" algn="l">
+              <a:lnSpc>
+                <a:spcPct val="100000"/>
+              </a:lnSpc>
               <a:spcBef>
                 <a:spcPts val="1134"/>
               </a:spcBef>
@@ -4014,6 +7194,9 @@
           </a:p>
           <a:p>
             <a:pPr marL="864000" lvl="1" indent="-324000" algn="l">
+              <a:lnSpc>
+                <a:spcPct val="100000"/>
+              </a:lnSpc>
               <a:spcBef>
                 <a:spcPts val="1134"/>
               </a:spcBef>
@@ -4046,6 +7229,9 @@
           </a:p>
           <a:p>
             <a:pPr marL="864000" lvl="1" indent="-324000" algn="l">
+              <a:lnSpc>
+                <a:spcPct val="100000"/>
+              </a:lnSpc>
               <a:spcBef>
                 <a:spcPts val="1134"/>
               </a:spcBef>
@@ -4078,6 +7264,9 @@
           </a:p>
           <a:p>
             <a:pPr marL="864000" lvl="1" indent="-324000" algn="l">
+              <a:lnSpc>
+                <a:spcPct val="100000"/>
+              </a:lnSpc>
               <a:spcBef>
                 <a:spcPts val="1134"/>
               </a:spcBef>
@@ -4110,6 +7299,9 @@
           </a:p>
           <a:p>
             <a:pPr marL="864000" lvl="1" indent="-324000" algn="l">
+              <a:lnSpc>
+                <a:spcPct val="100000"/>
+              </a:lnSpc>
               <a:spcBef>
                 <a:spcPts val="1134"/>
               </a:spcBef>
@@ -4132,6 +7324,88 @@
               <a:t>Брзина преливања може да се контролише вискозношћу</a:t>
             </a:r>
             <a:endParaRPr lang="sr-Latn-RS" sz="1800" b="0" u="none" strike="noStrike">
+              <a:solidFill>
+                <a:srgbClr val="000000"/>
+              </a:solidFill>
+              <a:effectLst/>
+              <a:uFillTx/>
+              <a:latin typeface="Arial"/>
+            </a:endParaRPr>
+          </a:p>
+        </p:txBody>
+      </p:sp>
+      <p:sp>
+        <p:nvSpPr>
+          <p:cNvPr id="42" name="Rectangle 6"/>
+          <p:cNvSpPr/>
+          <p:nvPr/>
+        </p:nvSpPr>
+        <p:spPr>
+          <a:xfrm>
+            <a:off x="8278560" y="5003640"/>
+            <a:ext cx="722520" cy="455400"/>
+          </a:xfrm>
+          <a:prstGeom prst="rect">
+            <a:avLst/>
+          </a:prstGeom>
+          <a:noFill/>
+          <a:ln w="0">
+            <a:noFill/>
+          </a:ln>
+        </p:spPr>
+        <p:style>
+          <a:lnRef idx="0"/>
+          <a:fillRef idx="0"/>
+          <a:effectRef idx="0"/>
+          <a:fontRef idx="minor"/>
+        </p:style>
+        <p:txBody>
+          <a:bodyPr wrap="none" lIns="90000" tIns="45000" rIns="90000" bIns="45000" anchor="t">
+            <a:spAutoFit/>
+          </a:bodyPr>
+          <a:p>
+            <a:pPr defTabSz="914400">
+              <a:lnSpc>
+                <a:spcPct val="100000"/>
+              </a:lnSpc>
+            </a:pPr>
+            <a:fld id="{9D151F4E-9466-42F6-8384-6CB36B64A8D3}" type="slidenum">
+              <a:rPr lang="sr-Latn-RS" sz="2400" b="0" u="none" strike="noStrike">
+                <a:solidFill>
+                  <a:srgbClr val="000000"/>
+                </a:solidFill>
+                <a:effectLst/>
+                <a:uFillTx/>
+                <a:latin typeface="Times New Roman"/>
+                <a:ea typeface="DejaVu Sans"/>
+              </a:rPr>
+              <a:t>5</a:t>
+            </a:fld>
+            <a:r>
+              <a:rPr lang="sr-Latn-RS" sz="2400" b="0" u="none" strike="noStrike">
+                <a:solidFill>
+                  <a:srgbClr val="000000"/>
+                </a:solidFill>
+                <a:effectLst/>
+                <a:uFillTx/>
+                <a:latin typeface="Times New Roman"/>
+                <a:ea typeface="DejaVu Sans"/>
+              </a:rPr>
+              <a:t>/</a:t>
+            </a:r>
+            <a:fld id="{B447128C-4B23-4067-A8BA-A6F375F610EE}" type="slidecount">
+              <a:rPr lang="sr-Latn-RS" sz="2400" b="0" u="none" strike="noStrike">
+                <a:solidFill>
+                  <a:srgbClr val="000000"/>
+                </a:solidFill>
+                <a:effectLst/>
+                <a:uFillTx/>
+                <a:latin typeface="Times New Roman"/>
+                <a:ea typeface="DejaVu Sans"/>
+              </a:rPr>
+              <a:t>14</a:t>
+            </a:fld>
+            <a:endParaRPr lang="sr-Latn-RS" sz="2400" b="0" u="none" strike="noStrike">
               <a:solidFill>
                 <a:srgbClr val="000000"/>
               </a:solidFill>
@@ -4174,7 +7448,7 @@
       </p:grpSpPr>
       <p:sp>
         <p:nvSpPr>
-          <p:cNvPr id="29" name="PlaceHolder 1"/>
+          <p:cNvPr id="43" name="PlaceHolder 1"/>
           <p:cNvSpPr>
             <a:spLocks noGrp="1"/>
           </p:cNvSpPr>
@@ -4184,8 +7458,8 @@
         </p:nvSpPr>
         <p:spPr>
           <a:xfrm>
-            <a:off x="504000" y="226080"/>
-            <a:ext cx="9071640" cy="946440"/>
+            <a:off x="504000" y="225720"/>
+            <a:ext cx="9071280" cy="946800"/>
           </a:xfrm>
           <a:prstGeom prst="rect">
             <a:avLst/>
@@ -4201,7 +7475,13 @@
           </a:bodyPr>
           <a:p>
             <a:pPr indent="0" algn="ctr">
+              <a:lnSpc>
+                <a:spcPct val="100000"/>
+              </a:lnSpc>
               <a:buNone/>
+              <a:tabLst>
+                <a:tab pos="0" algn="l"/>
+              </a:tabLst>
             </a:pPr>
             <a:r>
               <a:rPr lang="sr-Latn-RS" sz="4400" b="0" u="none" strike="noStrike">
@@ -4227,7 +7507,7 @@
       </p:sp>
       <p:pic>
         <p:nvPicPr>
-          <p:cNvPr id="30" name=""/>
+          <p:cNvPr id="44" name=""/>
           <p:cNvPicPr/>
           <p:nvPr/>
         </p:nvPicPr>
@@ -4238,7 +7518,7 @@
         <p:spPr>
           <a:xfrm>
             <a:off x="360" y="1440000"/>
-            <a:ext cx="10079640" cy="3359520"/>
+            <a:ext cx="10079280" cy="3359160"/>
           </a:xfrm>
           <a:prstGeom prst="rect">
             <a:avLst/>
@@ -4249,6 +7529,88 @@
           </a:ln>
         </p:spPr>
       </p:pic>
+      <p:sp>
+        <p:nvSpPr>
+          <p:cNvPr id="45" name="Rectangle 7"/>
+          <p:cNvSpPr/>
+          <p:nvPr/>
+        </p:nvSpPr>
+        <p:spPr>
+          <a:xfrm>
+            <a:off x="8278560" y="5003640"/>
+            <a:ext cx="722520" cy="455400"/>
+          </a:xfrm>
+          <a:prstGeom prst="rect">
+            <a:avLst/>
+          </a:prstGeom>
+          <a:noFill/>
+          <a:ln w="0">
+            <a:noFill/>
+          </a:ln>
+        </p:spPr>
+        <p:style>
+          <a:lnRef idx="0"/>
+          <a:fillRef idx="0"/>
+          <a:effectRef idx="0"/>
+          <a:fontRef idx="minor"/>
+        </p:style>
+        <p:txBody>
+          <a:bodyPr wrap="none" lIns="90000" tIns="45000" rIns="90000" bIns="45000" anchor="t">
+            <a:spAutoFit/>
+          </a:bodyPr>
+          <a:p>
+            <a:pPr defTabSz="914400">
+              <a:lnSpc>
+                <a:spcPct val="100000"/>
+              </a:lnSpc>
+            </a:pPr>
+            <a:fld id="{0443C283-CF73-493B-A894-67F400878FC9}" type="slidenum">
+              <a:rPr lang="sr-Latn-RS" sz="2400" b="0" u="none" strike="noStrike">
+                <a:solidFill>
+                  <a:srgbClr val="000000"/>
+                </a:solidFill>
+                <a:effectLst/>
+                <a:uFillTx/>
+                <a:latin typeface="Times New Roman"/>
+                <a:ea typeface="DejaVu Sans"/>
+              </a:rPr>
+              <a:t>5</a:t>
+            </a:fld>
+            <a:r>
+              <a:rPr lang="sr-Latn-RS" sz="2400" b="0" u="none" strike="noStrike">
+                <a:solidFill>
+                  <a:srgbClr val="000000"/>
+                </a:solidFill>
+                <a:effectLst/>
+                <a:uFillTx/>
+                <a:latin typeface="Times New Roman"/>
+                <a:ea typeface="DejaVu Sans"/>
+              </a:rPr>
+              <a:t>/</a:t>
+            </a:r>
+            <a:fld id="{CF52C4F9-C38E-42EC-8058-BB2B3776EDCB}" type="slidecount">
+              <a:rPr lang="sr-Latn-RS" sz="2400" b="0" u="none" strike="noStrike">
+                <a:solidFill>
+                  <a:srgbClr val="000000"/>
+                </a:solidFill>
+                <a:effectLst/>
+                <a:uFillTx/>
+                <a:latin typeface="Times New Roman"/>
+                <a:ea typeface="DejaVu Sans"/>
+              </a:rPr>
+              <a:t>14</a:t>
+            </a:fld>
+            <a:endParaRPr lang="sr-Latn-RS" sz="2400" b="0" u="none" strike="noStrike">
+              <a:solidFill>
+                <a:srgbClr val="000000"/>
+              </a:solidFill>
+              <a:effectLst/>
+              <a:uFillTx/>
+              <a:latin typeface="Arial"/>
+            </a:endParaRPr>
+          </a:p>
+        </p:txBody>
+      </p:sp>
     </p:spTree>
   </p:cSld>
   <mc:AlternateContent>
@@ -4281,7 +7643,7 @@
       </p:grpSpPr>
       <p:sp>
         <p:nvSpPr>
-          <p:cNvPr id="31" name="PlaceHolder 1"/>
+          <p:cNvPr id="46" name="PlaceHolder 1"/>
           <p:cNvSpPr>
             <a:spLocks noGrp="1"/>
           </p:cNvSpPr>
@@ -4291,8 +7653,8 @@
         </p:nvSpPr>
         <p:spPr>
           <a:xfrm>
-            <a:off x="504000" y="226080"/>
-            <a:ext cx="9071640" cy="946440"/>
+            <a:off x="504000" y="225720"/>
+            <a:ext cx="9071280" cy="946800"/>
           </a:xfrm>
           <a:prstGeom prst="rect">
             <a:avLst/>
@@ -4308,7 +7670,13 @@
           </a:bodyPr>
           <a:p>
             <a:pPr indent="0" algn="ctr">
+              <a:lnSpc>
+                <a:spcPct val="100000"/>
+              </a:lnSpc>
               <a:buNone/>
+              <a:tabLst>
+                <a:tab pos="0" algn="l"/>
+              </a:tabLst>
             </a:pPr>
             <a:r>
               <a:rPr lang="sr-Latn-RS" sz="3200" b="0" u="none" strike="noStrike">
@@ -4334,7 +7702,7 @@
       </p:sp>
       <p:sp>
         <p:nvSpPr>
-          <p:cNvPr id="32" name="PlaceHolder 2"/>
+          <p:cNvPr id="47" name="PlaceHolder 2"/>
           <p:cNvSpPr>
             <a:spLocks noGrp="1"/>
           </p:cNvSpPr>
@@ -4345,7 +7713,7 @@
         <p:spPr>
           <a:xfrm>
             <a:off x="504000" y="1326600"/>
-            <a:ext cx="9071640" cy="3288240"/>
+            <a:ext cx="9071280" cy="3893400"/>
           </a:xfrm>
           <a:prstGeom prst="rect">
             <a:avLst/>
@@ -4357,10 +7725,13 @@
         </p:spPr>
         <p:txBody>
           <a:bodyPr lIns="0" tIns="0" rIns="0" bIns="0" anchor="t">
-            <a:normAutofit/>
+            <a:normAutofit lnSpcReduction="9999"/>
           </a:bodyPr>
           <a:p>
             <a:pPr marL="432000" indent="-324000" algn="l">
+              <a:lnSpc>
+                <a:spcPct val="100000"/>
+              </a:lnSpc>
               <a:spcBef>
                 <a:spcPts val="1417"/>
               </a:spcBef>
@@ -4393,6 +7764,9 @@
           </a:p>
           <a:p>
             <a:pPr marL="432000" indent="-324000" algn="l">
+              <a:lnSpc>
+                <a:spcPct val="100000"/>
+              </a:lnSpc>
               <a:spcBef>
                 <a:spcPts val="1417"/>
               </a:spcBef>
@@ -4425,6 +7799,9 @@
           </a:p>
           <a:p>
             <a:pPr marL="432000" indent="-324000" algn="l">
+              <a:lnSpc>
+                <a:spcPct val="100000"/>
+              </a:lnSpc>
               <a:spcBef>
                 <a:spcPts val="1417"/>
               </a:spcBef>
@@ -4457,6 +7834,9 @@
           </a:p>
           <a:p>
             <a:pPr marL="864000" lvl="1" indent="-324000" algn="l">
+              <a:lnSpc>
+                <a:spcPct val="100000"/>
+              </a:lnSpc>
               <a:spcBef>
                 <a:spcPts val="1134"/>
               </a:spcBef>
@@ -4477,18 +7857,7 @@
                 <a:latin typeface="Arial"/>
                 <a:ea typeface="Microsoft YaHei"/>
               </a:rPr>
-              <a:t>Нпр. Розе → плаво →розе </a:t>
-            </a:r>
-            <a:r>
-              <a:rPr lang="sr-Latn-RS" sz="1800" b="0" u="none" strike="noStrike">
-                <a:solidFill>
-                  <a:srgbClr val="000000"/>
-                </a:solidFill>
-                <a:effectLst/>
-                <a:uFillTx/>
-                <a:latin typeface="Arial"/>
-              </a:rPr>
-              <a:t>→ плаво</a:t>
+              <a:t>Нпр. Розе → плаво →розе → плаво</a:t>
             </a:r>
             <a:endParaRPr lang="sr-Latn-RS" sz="1800" b="0" u="none" strike="noStrike">
               <a:solidFill>
@@ -4501,6 +7870,9 @@
           </a:p>
           <a:p>
             <a:pPr marL="432000" indent="-324000" algn="l">
+              <a:lnSpc>
+                <a:spcPct val="100000"/>
+              </a:lnSpc>
               <a:spcBef>
                 <a:spcPts val="1417"/>
               </a:spcBef>
@@ -4519,6 +7891,7 @@
                 <a:effectLst/>
                 <a:uFillTx/>
                 <a:latin typeface="Arial"/>
+                <a:ea typeface="Microsoft YaHei"/>
               </a:rPr>
               <a:t>Информације се могу кодирати</a:t>
             </a:r>
@@ -4533,6 +7906,9 @@
           </a:p>
           <a:p>
             <a:pPr marL="864000" lvl="1" indent="-324000" algn="l">
+              <a:lnSpc>
+                <a:spcPct val="100000"/>
+              </a:lnSpc>
               <a:spcBef>
                 <a:spcPts val="1134"/>
               </a:spcBef>
@@ -4551,8 +7927,9 @@
                 <a:effectLst/>
                 <a:uFillTx/>
                 <a:latin typeface="Arial"/>
-              </a:rPr>
-              <a:t>Нема таласа = 0, присуство таласа = 1, фаза таласа = код</a:t>
+                <a:ea typeface="Microsoft YaHei"/>
+              </a:rPr>
+              <a:t>Нема таласа = 0</a:t>
             </a:r>
             <a:endParaRPr lang="sr-Latn-RS" sz="1800" b="0" u="none" strike="noStrike">
               <a:solidFill>
@@ -4565,6 +7942,9 @@
           </a:p>
           <a:p>
             <a:pPr marL="864000" lvl="1" indent="-324000" algn="l">
+              <a:lnSpc>
+                <a:spcPct val="100000"/>
+              </a:lnSpc>
               <a:spcBef>
                 <a:spcPts val="1134"/>
               </a:spcBef>
@@ -4583,10 +7963,189 @@
                 <a:effectLst/>
                 <a:uFillTx/>
                 <a:latin typeface="Arial"/>
+                <a:ea typeface="Microsoft YaHei"/>
+              </a:rPr>
+              <a:t>Присуство таласа = 1</a:t>
+            </a:r>
+            <a:endParaRPr lang="sr-Latn-RS" sz="1800" b="0" u="none" strike="noStrike">
+              <a:solidFill>
+                <a:srgbClr val="000000"/>
+              </a:solidFill>
+              <a:effectLst/>
+              <a:uFillTx/>
+              <a:latin typeface="Arial"/>
+            </a:endParaRPr>
+          </a:p>
+          <a:p>
+            <a:pPr marL="864000" lvl="1" indent="-324000" algn="l">
+              <a:lnSpc>
+                <a:spcPct val="100000"/>
+              </a:lnSpc>
+              <a:spcBef>
+                <a:spcPts val="1134"/>
+              </a:spcBef>
+              <a:buClr>
+                <a:srgbClr val="000000"/>
+              </a:buClr>
+              <a:buSzPct val="75000"/>
+              <a:buFont typeface="Symbol" charset="2"/>
+              <a:buChar char=""/>
+            </a:pPr>
+            <a:r>
+              <a:rPr lang="sr-Latn-RS" sz="1800" b="0" u="none" strike="noStrike">
+                <a:solidFill>
+                  <a:srgbClr val="000000"/>
+                </a:solidFill>
+                <a:effectLst/>
+                <a:uFillTx/>
+                <a:latin typeface="Arial"/>
+                <a:ea typeface="Microsoft YaHei"/>
+              </a:rPr>
+              <a:t>Фаза таласа = код</a:t>
+            </a:r>
+            <a:endParaRPr lang="sr-Latn-RS" sz="1800" b="0" u="none" strike="noStrike">
+              <a:solidFill>
+                <a:srgbClr val="000000"/>
+              </a:solidFill>
+              <a:effectLst/>
+              <a:uFillTx/>
+              <a:latin typeface="Arial"/>
+            </a:endParaRPr>
+          </a:p>
+          <a:p>
+            <a:pPr marL="864000" lvl="1" indent="-324000" algn="l">
+              <a:lnSpc>
+                <a:spcPct val="100000"/>
+              </a:lnSpc>
+              <a:spcBef>
+                <a:spcPts val="1134"/>
+              </a:spcBef>
+              <a:buClr>
+                <a:srgbClr val="000000"/>
+              </a:buClr>
+              <a:buSzPct val="75000"/>
+              <a:buFont typeface="Symbol" charset="2"/>
+              <a:buChar char=""/>
+            </a:pPr>
+            <a:r>
+              <a:rPr lang="sr-Latn-RS" sz="1800" b="0" u="none" strike="noStrike">
+                <a:solidFill>
+                  <a:srgbClr val="000000"/>
+                </a:solidFill>
+                <a:effectLst/>
+                <a:uFillTx/>
+                <a:latin typeface="Arial"/>
+                <a:ea typeface="Microsoft YaHei"/>
               </a:rPr>
               <a:t>Интерференција таласа = рачунање</a:t>
             </a:r>
             <a:endParaRPr lang="sr-Latn-RS" sz="1800" b="0" u="none" strike="noStrike">
+              <a:solidFill>
+                <a:srgbClr val="000000"/>
+              </a:solidFill>
+              <a:effectLst/>
+              <a:uFillTx/>
+              <a:latin typeface="Arial"/>
+            </a:endParaRPr>
+          </a:p>
+        </p:txBody>
+      </p:sp>
+      <p:pic>
+        <p:nvPicPr>
+          <p:cNvPr id="48" name=""/>
+          <p:cNvPicPr/>
+          <p:nvPr/>
+        </p:nvPicPr>
+        <p:blipFill>
+          <a:blip r:embed="rId1"/>
+          <a:stretch/>
+        </p:blipFill>
+        <p:spPr>
+          <a:xfrm>
+            <a:off x="6120000" y="2700000"/>
+            <a:ext cx="3178800" cy="2194200"/>
+          </a:xfrm>
+          <a:prstGeom prst="rect">
+            <a:avLst/>
+          </a:prstGeom>
+          <a:noFill/>
+          <a:ln w="0">
+            <a:noFill/>
+          </a:ln>
+        </p:spPr>
+      </p:pic>
+      <p:sp>
+        <p:nvSpPr>
+          <p:cNvPr id="49" name="Rectangle 8"/>
+          <p:cNvSpPr/>
+          <p:nvPr/>
+        </p:nvSpPr>
+        <p:spPr>
+          <a:xfrm>
+            <a:off x="8278560" y="5003640"/>
+            <a:ext cx="722520" cy="455400"/>
+          </a:xfrm>
+          <a:prstGeom prst="rect">
+            <a:avLst/>
+          </a:prstGeom>
+          <a:noFill/>
+          <a:ln w="0">
+            <a:noFill/>
+          </a:ln>
+        </p:spPr>
+        <p:style>
+          <a:lnRef idx="0"/>
+          <a:fillRef idx="0"/>
+          <a:effectRef idx="0"/>
+          <a:fontRef idx="minor"/>
+        </p:style>
+        <p:txBody>
+          <a:bodyPr wrap="none" lIns="90000" tIns="45000" rIns="90000" bIns="45000" anchor="t">
+            <a:spAutoFit/>
+          </a:bodyPr>
+          <a:p>
+            <a:pPr defTabSz="914400">
+              <a:lnSpc>
+                <a:spcPct val="100000"/>
+              </a:lnSpc>
+            </a:pPr>
+            <a:fld id="{8F85E092-D71D-4FB8-B3C9-14DE54BA253F}" type="slidenum">
+              <a:rPr lang="sr-Latn-RS" sz="2400" b="0" u="none" strike="noStrike">
+                <a:solidFill>
+                  <a:srgbClr val="000000"/>
+                </a:solidFill>
+                <a:effectLst/>
+                <a:uFillTx/>
+                <a:latin typeface="Times New Roman"/>
+                <a:ea typeface="DejaVu Sans"/>
+              </a:rPr>
+              <a:t>&lt;number&gt;</a:t>
+            </a:fld>
+            <a:r>
+              <a:rPr lang="sr-Latn-RS" sz="2400" b="0" u="none" strike="noStrike">
+                <a:solidFill>
+                  <a:srgbClr val="000000"/>
+                </a:solidFill>
+                <a:effectLst/>
+                <a:uFillTx/>
+                <a:latin typeface="Times New Roman"/>
+                <a:ea typeface="DejaVu Sans"/>
+              </a:rPr>
+              <a:t>/</a:t>
+            </a:r>
+            <a:fld id="{35D20B9C-34E1-4C35-B448-834B0EF3D6A5}" type="slidecount">
+              <a:rPr lang="sr-Latn-RS" sz="2400" b="0" u="none" strike="noStrike">
+                <a:solidFill>
+                  <a:srgbClr val="000000"/>
+                </a:solidFill>
+                <a:effectLst/>
+                <a:uFillTx/>
+                <a:latin typeface="Times New Roman"/>
+                <a:ea typeface="DejaVu Sans"/>
+              </a:rPr>
+              <a:t>14</a:t>
+            </a:fld>
+            <a:endParaRPr lang="sr-Latn-RS" sz="2400" b="0" u="none" strike="noStrike">
               <a:solidFill>
                 <a:srgbClr val="000000"/>
               </a:solidFill>
@@ -4629,7 +8188,7 @@
       </p:grpSpPr>
       <p:sp>
         <p:nvSpPr>
-          <p:cNvPr id="33" name="PlaceHolder 1"/>
+          <p:cNvPr id="50" name="PlaceHolder 1"/>
           <p:cNvSpPr>
             <a:spLocks noGrp="1"/>
           </p:cNvSpPr>
@@ -4639,8 +8198,8 @@
         </p:nvSpPr>
         <p:spPr>
           <a:xfrm>
-            <a:off x="504000" y="226080"/>
-            <a:ext cx="9071640" cy="946440"/>
+            <a:off x="504000" y="225720"/>
+            <a:ext cx="9071280" cy="946800"/>
           </a:xfrm>
           <a:prstGeom prst="rect">
             <a:avLst/>
@@ -4656,7 +8215,13 @@
           </a:bodyPr>
           <a:p>
             <a:pPr indent="0" algn="ctr">
+              <a:lnSpc>
+                <a:spcPct val="100000"/>
+              </a:lnSpc>
               <a:buNone/>
+              <a:tabLst>
+                <a:tab pos="0" algn="l"/>
+              </a:tabLst>
             </a:pPr>
             <a:r>
               <a:rPr lang="sr-Latn-RS" sz="3200" b="0" u="none" strike="noStrike">
@@ -4682,7 +8247,7 @@
       </p:sp>
       <p:sp>
         <p:nvSpPr>
-          <p:cNvPr id="34" name="PlaceHolder 2"/>
+          <p:cNvPr id="51" name="PlaceHolder 2"/>
           <p:cNvSpPr>
             <a:spLocks noGrp="1"/>
           </p:cNvSpPr>
@@ -4693,7 +8258,7 @@
         <p:spPr>
           <a:xfrm>
             <a:off x="504000" y="1326600"/>
-            <a:ext cx="9071640" cy="3288240"/>
+            <a:ext cx="9071280" cy="3287880"/>
           </a:xfrm>
           <a:prstGeom prst="rect">
             <a:avLst/>
@@ -4709,6 +8274,9 @@
           </a:bodyPr>
           <a:p>
             <a:pPr marL="432000" indent="-324000" algn="l">
+              <a:lnSpc>
+                <a:spcPct val="100000"/>
+              </a:lnSpc>
               <a:spcBef>
                 <a:spcPts val="1417"/>
               </a:spcBef>
@@ -4741,6 +8309,9 @@
           </a:p>
           <a:p>
             <a:pPr marL="432000" indent="-324000" algn="l">
+              <a:lnSpc>
+                <a:spcPct val="100000"/>
+              </a:lnSpc>
               <a:spcBef>
                 <a:spcPts val="1417"/>
               </a:spcBef>
@@ -4773,6 +8344,9 @@
           </a:p>
           <a:p>
             <a:pPr marL="432000" indent="-324000" algn="l">
+              <a:lnSpc>
+                <a:spcPct val="100000"/>
+              </a:lnSpc>
               <a:spcBef>
                 <a:spcPts val="1417"/>
               </a:spcBef>
@@ -4805,6 +8379,9 @@
           </a:p>
           <a:p>
             <a:pPr marL="864000" lvl="1" indent="-324000" algn="l">
+              <a:lnSpc>
+                <a:spcPct val="100000"/>
+              </a:lnSpc>
               <a:spcBef>
                 <a:spcPts val="1134"/>
               </a:spcBef>
@@ -4837,6 +8414,9 @@
           </a:p>
           <a:p>
             <a:pPr marL="432000" indent="-324000" algn="l">
+              <a:lnSpc>
+                <a:spcPct val="100000"/>
+              </a:lnSpc>
               <a:spcBef>
                 <a:spcPts val="1417"/>
               </a:spcBef>
@@ -4869,6 +8449,9 @@
           </a:p>
           <a:p>
             <a:pPr marL="864000" lvl="1" indent="-324000" algn="l">
+              <a:lnSpc>
+                <a:spcPct val="100000"/>
+              </a:lnSpc>
               <a:spcBef>
                 <a:spcPts val="1134"/>
               </a:spcBef>
@@ -4888,7 +8471,7 @@
                 <a:uFillTx/>
                 <a:latin typeface="Arial"/>
               </a:rPr>
-              <a:t>БЖ реакција може примати улазне </a:t>
+              <a:t>БЖ реакција може примати улазне податке матрице</a:t>
             </a:r>
             <a:endParaRPr lang="sr-Latn-RS" sz="1800" b="0" u="none" strike="noStrike">
               <a:solidFill>
@@ -4901,6 +8484,9 @@
           </a:p>
           <a:p>
             <a:pPr marL="864000" lvl="1" indent="-324000" algn="l">
+              <a:lnSpc>
+                <a:spcPct val="100000"/>
+              </a:lnSpc>
               <a:spcBef>
                 <a:spcPts val="1134"/>
               </a:spcBef>
@@ -4923,6 +8509,88 @@
               <a:t>Подаци се примају путем оптичке пројекције на хемијски раствор</a:t>
             </a:r>
             <a:endParaRPr lang="sr-Latn-RS" sz="1800" b="0" u="none" strike="noStrike">
+              <a:solidFill>
+                <a:srgbClr val="000000"/>
+              </a:solidFill>
+              <a:effectLst/>
+              <a:uFillTx/>
+              <a:latin typeface="Arial"/>
+            </a:endParaRPr>
+          </a:p>
+        </p:txBody>
+      </p:sp>
+      <p:sp>
+        <p:nvSpPr>
+          <p:cNvPr id="52" name="Rectangle 9"/>
+          <p:cNvSpPr/>
+          <p:nvPr/>
+        </p:nvSpPr>
+        <p:spPr>
+          <a:xfrm>
+            <a:off x="8278560" y="5003640"/>
+            <a:ext cx="722520" cy="455400"/>
+          </a:xfrm>
+          <a:prstGeom prst="rect">
+            <a:avLst/>
+          </a:prstGeom>
+          <a:noFill/>
+          <a:ln w="0">
+            <a:noFill/>
+          </a:ln>
+        </p:spPr>
+        <p:style>
+          <a:lnRef idx="0"/>
+          <a:fillRef idx="0"/>
+          <a:effectRef idx="0"/>
+          <a:fontRef idx="minor"/>
+        </p:style>
+        <p:txBody>
+          <a:bodyPr wrap="none" lIns="90000" tIns="45000" rIns="90000" bIns="45000" anchor="t">
+            <a:spAutoFit/>
+          </a:bodyPr>
+          <a:p>
+            <a:pPr defTabSz="914400">
+              <a:lnSpc>
+                <a:spcPct val="100000"/>
+              </a:lnSpc>
+            </a:pPr>
+            <a:fld id="{FF474DA5-4A14-431E-8888-4271B35F1118}" type="slidenum">
+              <a:rPr lang="sr-Latn-RS" sz="2400" b="0" u="none" strike="noStrike">
+                <a:solidFill>
+                  <a:srgbClr val="000000"/>
+                </a:solidFill>
+                <a:effectLst/>
+                <a:uFillTx/>
+                <a:latin typeface="Times New Roman"/>
+                <a:ea typeface="DejaVu Sans"/>
+              </a:rPr>
+              <a:t>&lt;number&gt;</a:t>
+            </a:fld>
+            <a:r>
+              <a:rPr lang="sr-Latn-RS" sz="2400" b="0" u="none" strike="noStrike">
+                <a:solidFill>
+                  <a:srgbClr val="000000"/>
+                </a:solidFill>
+                <a:effectLst/>
+                <a:uFillTx/>
+                <a:latin typeface="Times New Roman"/>
+                <a:ea typeface="DejaVu Sans"/>
+              </a:rPr>
+              <a:t>/</a:t>
+            </a:r>
+            <a:fld id="{1BDDEDD3-2A66-4523-83C8-8CBBD2A3E0AE}" type="slidecount">
+              <a:rPr lang="sr-Latn-RS" sz="2400" b="0" u="none" strike="noStrike">
+                <a:solidFill>
+                  <a:srgbClr val="000000"/>
+                </a:solidFill>
+                <a:effectLst/>
+                <a:uFillTx/>
+                <a:latin typeface="Times New Roman"/>
+                <a:ea typeface="DejaVu Sans"/>
+              </a:rPr>
+              <a:t>14</a:t>
+            </a:fld>
+            <a:endParaRPr lang="sr-Latn-RS" sz="2400" b="0" u="none" strike="noStrike">
               <a:solidFill>
                 <a:srgbClr val="000000"/>
               </a:solidFill>
@@ -4965,7 +8633,7 @@
       </p:grpSpPr>
       <p:sp>
         <p:nvSpPr>
-          <p:cNvPr id="35" name="PlaceHolder 1"/>
+          <p:cNvPr id="53" name="PlaceHolder 1"/>
           <p:cNvSpPr>
             <a:spLocks noGrp="1"/>
           </p:cNvSpPr>
@@ -4975,8 +8643,8 @@
         </p:nvSpPr>
         <p:spPr>
           <a:xfrm>
-            <a:off x="504000" y="226080"/>
-            <a:ext cx="9071640" cy="946440"/>
+            <a:off x="504000" y="225720"/>
+            <a:ext cx="9071280" cy="946800"/>
           </a:xfrm>
           <a:prstGeom prst="rect">
             <a:avLst/>
@@ -4992,7 +8660,13 @@
           </a:bodyPr>
           <a:p>
             <a:pPr indent="0" algn="ctr">
+              <a:lnSpc>
+                <a:spcPct val="100000"/>
+              </a:lnSpc>
               <a:buNone/>
+              <a:tabLst>
+                <a:tab pos="0" algn="l"/>
+              </a:tabLst>
             </a:pPr>
             <a:r>
               <a:rPr lang="sr-Latn-RS" sz="3200" b="0" u="none" strike="noStrike">
@@ -5003,7 +8677,7 @@
                 <a:uFillTx/>
                 <a:latin typeface="Arial"/>
               </a:rPr>
-              <a:t>Reservoir computing</a:t>
+              <a:t>Логичка кола и микрофлуидика</a:t>
             </a:r>
             <a:endParaRPr lang="sr-Latn-RS" sz="3200" b="0" u="none" strike="noStrike">
               <a:solidFill>
@@ -5018,7 +8692,7 @@
       </p:sp>
       <p:sp>
         <p:nvSpPr>
-          <p:cNvPr id="36" name="PlaceHolder 2"/>
+          <p:cNvPr id="54" name="PlaceHolder 2"/>
           <p:cNvSpPr>
             <a:spLocks noGrp="1"/>
           </p:cNvSpPr>
@@ -5028,8 +8702,8 @@
         </p:nvSpPr>
         <p:spPr>
           <a:xfrm>
-            <a:off x="360000" y="1326600"/>
-            <a:ext cx="9540000" cy="3288240"/>
+            <a:off x="180000" y="1326600"/>
+            <a:ext cx="9719640" cy="3893400"/>
           </a:xfrm>
           <a:prstGeom prst="rect">
             <a:avLst/>
@@ -5041,10 +8715,13 @@
         </p:spPr>
         <p:txBody>
           <a:bodyPr lIns="0" tIns="0" rIns="0" bIns="0" anchor="t">
-            <a:normAutofit/>
+            <a:normAutofit lnSpcReduction="9999"/>
           </a:bodyPr>
           <a:p>
             <a:pPr marL="432000" indent="-324000" algn="l">
+              <a:lnSpc>
+                <a:spcPct val="100000"/>
+              </a:lnSpc>
               <a:spcBef>
                 <a:spcPts val="1417"/>
               </a:spcBef>
@@ -5064,9 +8741,377 @@
                 <a:uFillTx/>
                 <a:latin typeface="Arial"/>
               </a:rPr>
-              <a:t>БЖ раствор игра улогурезервоара нелинеарних трансформација</a:t>
+              <a:t>Молекуларна кола могу обављати И, ИЛИ и НЕ</a:t>
             </a:r>
             <a:endParaRPr lang="sr-Latn-RS" sz="2300" b="0" u="none" strike="noStrike">
+              <a:solidFill>
+                <a:srgbClr val="000000"/>
+              </a:solidFill>
+              <a:effectLst/>
+              <a:uFillTx/>
+              <a:latin typeface="Arial"/>
+            </a:endParaRPr>
+          </a:p>
+          <a:p>
+            <a:pPr marL="432000" indent="-324000" algn="l">
+              <a:lnSpc>
+                <a:spcPct val="100000"/>
+              </a:lnSpc>
+              <a:spcBef>
+                <a:spcPts val="1417"/>
+              </a:spcBef>
+              <a:buClr>
+                <a:srgbClr val="000000"/>
+              </a:buClr>
+              <a:buSzPct val="45000"/>
+              <a:buFont typeface="Wingdings" charset="2"/>
+              <a:buChar char=""/>
+            </a:pPr>
+            <a:r>
+              <a:rPr lang="sr-Latn-RS" sz="2300" b="0" u="none" strike="noStrike">
+                <a:solidFill>
+                  <a:srgbClr val="000000"/>
+                </a:solidFill>
+                <a:effectLst/>
+                <a:uFillTx/>
+                <a:latin typeface="Arial"/>
+              </a:rPr>
+              <a:t>Ово се ради брзим каскадним хемијским реакцијама (БЖ реакција)</a:t>
+            </a:r>
+            <a:endParaRPr lang="sr-Latn-RS" sz="2300" b="0" u="none" strike="noStrike">
+              <a:solidFill>
+                <a:srgbClr val="000000"/>
+              </a:solidFill>
+              <a:effectLst/>
+              <a:uFillTx/>
+              <a:latin typeface="Arial"/>
+            </a:endParaRPr>
+          </a:p>
+          <a:p>
+            <a:pPr marL="432000" indent="-324000" algn="l">
+              <a:lnSpc>
+                <a:spcPct val="100000"/>
+              </a:lnSpc>
+              <a:spcBef>
+                <a:spcPts val="1417"/>
+              </a:spcBef>
+              <a:buClr>
+                <a:srgbClr val="000000"/>
+              </a:buClr>
+              <a:buSzPct val="45000"/>
+              <a:buFont typeface="Wingdings" charset="2"/>
+              <a:buChar char=""/>
+            </a:pPr>
+            <a:r>
+              <a:rPr lang="sr-Latn-RS" sz="2300" b="0" u="none" strike="noStrike">
+                <a:solidFill>
+                  <a:srgbClr val="000000"/>
+                </a:solidFill>
+                <a:effectLst/>
+                <a:uFillTx/>
+                <a:latin typeface="Arial"/>
+              </a:rPr>
+              <a:t>Физичка реаелизација:</a:t>
+            </a:r>
+            <a:endParaRPr lang="sr-Latn-RS" sz="2300" b="0" u="none" strike="noStrike">
+              <a:solidFill>
+                <a:srgbClr val="000000"/>
+              </a:solidFill>
+              <a:effectLst/>
+              <a:uFillTx/>
+              <a:latin typeface="Arial"/>
+            </a:endParaRPr>
+          </a:p>
+          <a:p>
+            <a:pPr marL="864000" lvl="1" indent="-324000" algn="l">
+              <a:spcBef>
+                <a:spcPts val="1134"/>
+              </a:spcBef>
+              <a:buClr>
+                <a:srgbClr val="000000"/>
+              </a:buClr>
+              <a:buSzPct val="75000"/>
+              <a:buFont typeface="Symbol" charset="2"/>
+              <a:buChar char=""/>
+            </a:pPr>
+            <a:r>
+              <a:rPr lang="sr-Latn-RS" sz="1800" b="0" u="none" strike="noStrike">
+                <a:solidFill>
+                  <a:srgbClr val="000000"/>
+                </a:solidFill>
+                <a:effectLst/>
+                <a:uFillTx/>
+                <a:latin typeface="Arial"/>
+              </a:rPr>
+              <a:t>Састоји се од микрофлуидних чипова </a:t>
+            </a:r>
+            <a:endParaRPr lang="sr-Latn-RS" sz="1800" b="0" u="none" strike="noStrike">
+              <a:solidFill>
+                <a:srgbClr val="000000"/>
+              </a:solidFill>
+              <a:effectLst/>
+              <a:uFillTx/>
+              <a:latin typeface="Arial"/>
+            </a:endParaRPr>
+          </a:p>
+          <a:p>
+            <a:pPr marL="864000" lvl="1" indent="-324000" algn="l">
+              <a:spcBef>
+                <a:spcPts val="1134"/>
+              </a:spcBef>
+              <a:buClr>
+                <a:srgbClr val="000000"/>
+              </a:buClr>
+              <a:buSzPct val="75000"/>
+              <a:buFont typeface="Symbol" charset="2"/>
+              <a:buChar char=""/>
+            </a:pPr>
+            <a:r>
+              <a:rPr lang="sr-Latn-RS" sz="1800" b="0" u="none" strike="noStrike">
+                <a:solidFill>
+                  <a:srgbClr val="000000"/>
+                </a:solidFill>
+                <a:effectLst/>
+                <a:uFillTx/>
+                <a:latin typeface="Arial"/>
+              </a:rPr>
+              <a:t>Течности се крећу кроз микроскопске канале који симулирају арх. Рачунара</a:t>
+            </a:r>
+            <a:endParaRPr lang="sr-Latn-RS" sz="1800" b="0" u="none" strike="noStrike">
+              <a:solidFill>
+                <a:srgbClr val="000000"/>
+              </a:solidFill>
+              <a:effectLst/>
+              <a:uFillTx/>
+              <a:latin typeface="Arial"/>
+            </a:endParaRPr>
+          </a:p>
+          <a:p>
+            <a:pPr marL="864000" lvl="1" indent="-324000" algn="l">
+              <a:spcBef>
+                <a:spcPts val="1134"/>
+              </a:spcBef>
+              <a:buClr>
+                <a:srgbClr val="000000"/>
+              </a:buClr>
+              <a:buSzPct val="75000"/>
+              <a:buFont typeface="Symbol" charset="2"/>
+              <a:buChar char=""/>
+            </a:pPr>
+            <a:r>
+              <a:rPr lang="sr-Latn-RS" sz="1800" b="0" u="none" strike="noStrike">
+                <a:solidFill>
+                  <a:srgbClr val="000000"/>
+                </a:solidFill>
+                <a:effectLst/>
+                <a:uFillTx/>
+                <a:latin typeface="Arial"/>
+              </a:rPr>
+              <a:t>Ако постоје две супстанце → И</a:t>
+            </a:r>
+            <a:endParaRPr lang="sr-Latn-RS" sz="1800" b="0" u="none" strike="noStrike">
+              <a:solidFill>
+                <a:srgbClr val="000000"/>
+              </a:solidFill>
+              <a:effectLst/>
+              <a:uFillTx/>
+              <a:latin typeface="Arial"/>
+            </a:endParaRPr>
+          </a:p>
+          <a:p>
+            <a:pPr marL="864000" lvl="1" indent="-324000" algn="l">
+              <a:spcBef>
+                <a:spcPts val="1134"/>
+              </a:spcBef>
+              <a:buClr>
+                <a:srgbClr val="000000"/>
+              </a:buClr>
+              <a:buSzPct val="75000"/>
+              <a:buFont typeface="Symbol" charset="2"/>
+              <a:buChar char=""/>
+            </a:pPr>
+            <a:r>
+              <a:rPr lang="sr-Latn-RS" sz="1800" b="0" u="none" strike="noStrike">
+                <a:solidFill>
+                  <a:srgbClr val="000000"/>
+                </a:solidFill>
+                <a:effectLst/>
+                <a:uFillTx/>
+                <a:latin typeface="Arial"/>
+                <a:ea typeface="Microsoft YaHei"/>
+              </a:rPr>
+              <a:t>Довољна је било која од две </a:t>
+            </a:r>
+            <a:r>
+              <a:rPr lang="sr-Latn-RS" sz="1800" b="0" u="none" strike="noStrike">
+                <a:solidFill>
+                  <a:srgbClr val="000000"/>
+                </a:solidFill>
+                <a:effectLst/>
+                <a:uFillTx/>
+                <a:latin typeface="Arial"/>
+              </a:rPr>
+              <a:t>→ ИЛИ</a:t>
+            </a:r>
+            <a:endParaRPr lang="sr-Latn-RS" sz="1800" b="0" u="none" strike="noStrike">
+              <a:solidFill>
+                <a:srgbClr val="000000"/>
+              </a:solidFill>
+              <a:effectLst/>
+              <a:uFillTx/>
+              <a:latin typeface="Arial"/>
+            </a:endParaRPr>
+          </a:p>
+          <a:p>
+            <a:pPr marL="864000" lvl="1" indent="-324000" algn="l">
+              <a:spcBef>
+                <a:spcPts val="1134"/>
+              </a:spcBef>
+              <a:buClr>
+                <a:srgbClr val="000000"/>
+              </a:buClr>
+              <a:buSzPct val="75000"/>
+              <a:buFont typeface="Symbol" charset="2"/>
+              <a:buChar char=""/>
+            </a:pPr>
+            <a:r>
+              <a:rPr lang="sr-Latn-RS" sz="1800" b="0" u="none" strike="noStrike">
+                <a:solidFill>
+                  <a:srgbClr val="000000"/>
+                </a:solidFill>
+                <a:effectLst/>
+                <a:uFillTx/>
+                <a:latin typeface="Arial"/>
+                <a:ea typeface="Microsoft YaHei"/>
+              </a:rPr>
+              <a:t>Једна супстанца гаси сигнал друге </a:t>
+            </a:r>
+            <a:r>
+              <a:rPr lang="sr-Latn-RS" sz="1800" b="0" u="none" strike="noStrike">
+                <a:solidFill>
+                  <a:srgbClr val="000000"/>
+                </a:solidFill>
+                <a:effectLst/>
+                <a:uFillTx/>
+                <a:latin typeface="Arial"/>
+              </a:rPr>
+              <a:t>→ НЕ </a:t>
+            </a:r>
+            <a:endParaRPr lang="sr-Latn-RS" sz="1800" b="0" u="none" strike="noStrike">
+              <a:solidFill>
+                <a:srgbClr val="000000"/>
+              </a:solidFill>
+              <a:effectLst/>
+              <a:uFillTx/>
+              <a:latin typeface="Arial"/>
+            </a:endParaRPr>
+          </a:p>
+          <a:p>
+            <a:pPr marL="864000" lvl="1" indent="-324000" algn="l">
+              <a:spcBef>
+                <a:spcPts val="1134"/>
+              </a:spcBef>
+              <a:buClr>
+                <a:srgbClr val="000000"/>
+              </a:buClr>
+              <a:buSzPct val="75000"/>
+              <a:buFont typeface="Symbol" charset="2"/>
+              <a:buChar char=""/>
+            </a:pPr>
+            <a:r>
+              <a:rPr lang="sr-Latn-RS" sz="1800" b="0" u="none" strike="noStrike">
+                <a:solidFill>
+                  <a:srgbClr val="000000"/>
+                </a:solidFill>
+                <a:effectLst/>
+                <a:uFillTx/>
+                <a:latin typeface="Arial"/>
+              </a:rPr>
+              <a:t>На овај начин могу се реализовати све познате рачунарске компоненте</a:t>
+            </a:r>
+            <a:endParaRPr lang="sr-Latn-RS" sz="1800" b="0" u="none" strike="noStrike">
+              <a:solidFill>
+                <a:srgbClr val="000000"/>
+              </a:solidFill>
+              <a:effectLst/>
+              <a:uFillTx/>
+              <a:latin typeface="Arial"/>
+            </a:endParaRPr>
+          </a:p>
+        </p:txBody>
+      </p:sp>
+      <p:sp>
+        <p:nvSpPr>
+          <p:cNvPr id="55" name="Rectangle 10"/>
+          <p:cNvSpPr/>
+          <p:nvPr/>
+        </p:nvSpPr>
+        <p:spPr>
+          <a:xfrm>
+            <a:off x="8278560" y="5003640"/>
+            <a:ext cx="722520" cy="455400"/>
+          </a:xfrm>
+          <a:prstGeom prst="rect">
+            <a:avLst/>
+          </a:prstGeom>
+          <a:noFill/>
+          <a:ln w="0">
+            <a:noFill/>
+          </a:ln>
+        </p:spPr>
+        <p:style>
+          <a:lnRef idx="0"/>
+          <a:fillRef idx="0"/>
+          <a:effectRef idx="0"/>
+          <a:fontRef idx="minor"/>
+        </p:style>
+        <p:txBody>
+          <a:bodyPr wrap="none" lIns="90000" tIns="45000" rIns="90000" bIns="45000" anchor="t">
+            <a:spAutoFit/>
+          </a:bodyPr>
+          <a:p>
+            <a:pPr defTabSz="914400">
+              <a:lnSpc>
+                <a:spcPct val="100000"/>
+              </a:lnSpc>
+            </a:pPr>
+            <a:fld id="{38256E8A-23D9-4396-B360-0C7E55296C21}" type="slidenum">
+              <a:rPr lang="sr-Latn-RS" sz="2400" b="0" u="none" strike="noStrike">
+                <a:solidFill>
+                  <a:srgbClr val="000000"/>
+                </a:solidFill>
+                <a:effectLst/>
+                <a:uFillTx/>
+                <a:latin typeface="Times New Roman"/>
+                <a:ea typeface="DejaVu Sans"/>
+              </a:rPr>
+              <a:t>&lt;number&gt;</a:t>
+            </a:fld>
+            <a:r>
+              <a:rPr lang="sr-Latn-RS" sz="2400" b="0" u="none" strike="noStrike">
+                <a:solidFill>
+                  <a:srgbClr val="000000"/>
+                </a:solidFill>
+                <a:effectLst/>
+                <a:uFillTx/>
+                <a:latin typeface="Times New Roman"/>
+                <a:ea typeface="DejaVu Sans"/>
+              </a:rPr>
+              <a:t>/</a:t>
+            </a:r>
+            <a:fld id="{C38DBB8D-C6C8-4B2C-827A-509868132EA5}" type="slidecount">
+              <a:rPr lang="sr-Latn-RS" sz="2400" b="0" u="none" strike="noStrike">
+                <a:solidFill>
+                  <a:srgbClr val="000000"/>
+                </a:solidFill>
+                <a:effectLst/>
+                <a:uFillTx/>
+                <a:latin typeface="Times New Roman"/>
+                <a:ea typeface="DejaVu Sans"/>
+              </a:rPr>
+              <a:t>14</a:t>
+            </a:fld>
+            <a:endParaRPr lang="sr-Latn-RS" sz="2400" b="0" u="none" strike="noStrike">
               <a:solidFill>
                 <a:srgbClr val="000000"/>
               </a:solidFill>
